--- a/docs/links-26/presentations/Second-Edition-for-colleagues.pptx
+++ b/docs/links-26/presentations/Second-Edition-for-colleagues.pptx
@@ -1308,7 +1308,7 @@
           <a:p>
             <a:r>
               <a:rPr lang="en-US" dirty="0"/>
-              <a:t>Monday to Saturday, counting a cover week as four days worked, the same way the clerks do. Sundays are overtime by agreement, so they are not in these figures — today or in Second Edition. Exactly, Second Edition works out at 218.6 days a year: just under today’s 219, which is also the most the 26-week link is allowed (agreed 1 October 2026). The average shift is two minutes longer, which is on slide 6.</a:t>
+              <a:t>Monday to Saturday, counting a cover week as four days worked, the same way the clerks do. Sundays are overtime by agreement, so they are not in these figures — today or in Second Edition. Exactly, Second Edition works out at 218.6 days a year: just under today’s 219, which is also the most the 26-week link is allowed (agreed 1 October 2026). The average shift is about two minutes longer, which is on slide 6.</a:t>
             </a:r>
             <a:endParaRPr lang="en-US" dirty="0"/>
           </a:p>
@@ -4977,7 +4977,7 @@
                 <a:ea typeface="Inter" pitchFamily="34" charset="-122"/>
                 <a:cs typeface="Inter" pitchFamily="34" charset="-120"/>
               </a:rPr>
-              <a:t>Shifts 2 minutes longer on average</a:t>
+              <a:t>Shifts about 2 minutes longer on average</a:t>
             </a:r>
             <a:endParaRPr lang="en-US" sz="1400" dirty="0"/>
           </a:p>
@@ -11424,7 +11424,7 @@
                 <a:ea typeface="Inter" pitchFamily="34" charset="-122"/>
                 <a:cs typeface="Inter" pitchFamily="34" charset="-120"/>
               </a:rPr>
-              <a:t>Every closing shift gets shorter — the average goes up two minutes</a:t>
+              <a:t>Every closing shift gets shorter — the average goes up about two minutes</a:t>
             </a:r>
             <a:endParaRPr lang="en-US" sz="1500" dirty="0"/>
           </a:p>

--- a/docs/links-26/presentations/Second-Edition-for-colleagues.pptx
+++ b/docs/links-26/presentations/Second-Edition-for-colleagues.pptx
@@ -1660,7 +1660,7 @@
           <a:p>
             <a:r>
               <a:rPr lang="en-US" dirty="0"/>
-              <a:t>Second Edition was built the way Familiar Nine was: keeping the times people already work wherever that cost little. Nine of its fifteen are worked today, and it uses fewer different times overall than today’s eighteen. Three of the six new ones are today’s shifts starting later — the weekday closer, the Sunday closer and the Sunday ticket-office late — so they are shorter, not longer. The Sunday opener stays today’s 07:15–15:45.</a:t>
+              <a:t>Second Edition was built keeping the times people already work wherever that cost little. Nine of its fifteen are worked today, and it uses fewer different times overall than today’s eighteen. Four of the six new ones are today’s shifts starting later — the weekday closer, the Sunday closer, and the ticket-office late on weekdays and on Sundays — so they are shorter, not longer. The Sunday opener stays today’s 07:15–15:45.</a:t>
             </a:r>
             <a:endParaRPr lang="en-US" dirty="0"/>
           </a:p>
@@ -4911,7 +4911,7 @@
                 <a:ea typeface="Inter" pitchFamily="34" charset="-122"/>
                 <a:cs typeface="Inter" pitchFamily="34" charset="-120"/>
               </a:rPr>
-              <a:t>Three are today’s lates starting later, so shorter.</a:t>
+              <a:t>Four are today’s lates starting later, so shorter.</a:t>
             </a:r>
             <a:endParaRPr lang="en-US" sz="1250" dirty="0"/>
           </a:p>

--- a/docs/links-26/presentations/Second-Edition-for-colleagues.pptx
+++ b/docs/links-26/presentations/Second-Edition-for-colleagues.pptx
@@ -604,7 +604,7 @@
           <a:p>
             <a:r>
               <a:rPr lang="en-US" dirty="0"/>
-              <a:t>Earlies here means a start before 11:00. A weekday has 7 earlies and 8 lates; a Saturday 7 and 7; a Sunday 5 and 5. Sundays: today 8 Sunday duties across 16 working weeks, Second Edition 10 across 21 — about the same share of working weeks. With six more people to share them, that is about one fewer Sunday a year each (20 against 21).</a:t>
+              <a:t>Read the strip left to right; week 27 is week 1 again. A cover week has no fixed shifts of its own — its four duties are placed later to cover leave and sickness, which is why it is drawn empty. Earlies here means a start before 11:00. A weekday has 7 earlies and 8 lates; a Saturday 7 and 7; a Sunday 5 and 5. Sundays stay overtime, 20 a year each (today 21), and still finish at 23:25. Who starts on which week is decided after the link is chosen.</a:t>
             </a:r>
             <a:endParaRPr lang="en-US" dirty="0"/>
           </a:p>
@@ -692,7 +692,7 @@
           <a:p>
             <a:r>
               <a:rPr lang="en-US" dirty="0"/>
-              <a:t>Leave is only needed on working days Monday to Saturday; rest days and Sundays cost nothing. Today there is one unusual stretch of the roster where 14 days buys 30 days off — Second Edition spreads rest days more evenly, so its best is 28. On average it is the same, 23.4 days, and at its worst it is a day better than today. Four full weeks off (Sunday to Saturday) takes at least 15 days of leave, instead of 14 at best today. The exact averages depend on where you count a booking as starting, so quote them as “about the same”.</a:t>
+              <a:t>Leave is only needed on working days Monday to Saturday; rest days and Sundays cost nothing. Today there is one unusual stretch of the roster where 14 days buys 30 days off — Second Edition spreads rest days more evenly, so its best is 28. On average it is the same, 23.4 days, and at its worst it is a day better than today. Four full weeks off (Sunday to Saturday) takes at least 15 days of leave, instead of 14 at best today. Say the four-weeks figure plainly: it is the one place every proposal in the pack is worse than today, and people plan a year around it. The averages depend on where you count a booking as starting, so quote those as “about the same”.</a:t>
             </a:r>
             <a:endParaRPr lang="en-US" dirty="0"/>
           </a:p>
@@ -1132,7 +1132,7 @@
           <a:p>
             <a:r>
               <a:rPr lang="en-US" dirty="0"/>
-              <a:t>This is the whole pitch on one slide. Same 35-hour week as now. Never more than six days in a row. Seven full weekends off in every 26 weeks, against four in 20 today, and never more than five weeks apart — though each person works about two more Saturdays a year. Every week is all earlies or all lates, and 18 of the 21 working weeks keep one shift time Monday to Friday. Nine of the fifteen shift times are ones people already work. And every closing shift is shorter: the weekday and Saturday closers by 30 minutes, the Sunday closer by 45.</a:t>
+              <a:t>This is the whole pitch on one slide. Same 35-hour week as now. Never more than six days in a row. Seven full weekends off in every 26 weeks, against four in 20 today, and never more than five weeks apart — though each person works about two more Saturdays a year. Every week is all earlies or all lates, and 18 of the 21 working weeks keep one shift time Monday to Friday. Nine of the fifteen shift times are ones people already work. And every closing shift is shorter: the weekday and Saturday closers by 30 minutes, the Sunday closer by 45. Say the leave cost here too, before anyone asks: four full weeks off takes 15 days’ leave rather than 14, and the best 14-day stretch is 28 days off rather than 30; the average is the same and the worst a day better. A cover week is one of the five weeks in 26 with no fixed shifts: its four duties are placed later to cover leave and sickness.</a:t>
             </a:r>
             <a:endParaRPr lang="en-US" dirty="0"/>
           </a:p>
@@ -2352,7 +2352,7 @@
                 <a:ea typeface="Inter" pitchFamily="34" charset="-122"/>
                 <a:cs typeface="Inter" pitchFamily="34" charset="-120"/>
               </a:rPr>
-              <a:t>Earlies, lates and Sundays</a:t>
+              <a:t>Your 26 weeks at a glance</a:t>
             </a:r>
             <a:endParaRPr lang="en-US" sz="3000" dirty="0"/>
           </a:p>
@@ -2391,474 +2391,36 @@
                 <a:ea typeface="Inter" pitchFamily="34" charset="-122"/>
                 <a:cs typeface="Inter" pitchFamily="34" charset="-120"/>
               </a:rPr>
-              <a:t>The balance you have now stays much the same</a:t>
+              <a:t>Each week is all earlies or all lates; the green bars are the full weekends off — where you start is decided later</a:t>
             </a:r>
             <a:endParaRPr lang="en-US" sz="1500" dirty="0"/>
           </a:p>
         </p:txBody>
-      </p:sp>
-      <p:sp>
-        <p:nvSpPr>
-          <p:cNvPr id="4" name="Shape 2"/>
-          <p:cNvSpPr/>
-          <p:nvPr/>
-        </p:nvSpPr>
-        <p:spPr>
-          <a:xfrm>
-            <a:off x="457200" y="1417320"/>
-            <a:ext cx="2606040" cy="2514600"/>
-          </a:xfrm>
-          <a:prstGeom prst="roundRect">
-            <a:avLst>
-              <a:gd name="adj" fmla="val 3636"/>
-            </a:avLst>
-          </a:prstGeom>
-          <a:solidFill>
-            <a:srgbClr val="EEF2F7"/>
-          </a:solidFill>
-          <a:ln w="12700">
-            <a:solidFill>
-              <a:srgbClr val="EEF2F7"/>
-            </a:solidFill>
-            <a:prstDash val="solid"/>
-          </a:ln>
-        </p:spPr>
-      </p:sp>
-      <p:sp>
-        <p:nvSpPr>
-          <p:cNvPr id="5" name="Shape 3"/>
-          <p:cNvSpPr/>
-          <p:nvPr/>
-        </p:nvSpPr>
-        <p:spPr>
-          <a:xfrm>
-            <a:off x="640080" y="1600200"/>
-            <a:ext cx="502920" cy="502920"/>
-          </a:xfrm>
-          <a:prstGeom prst="ellipse">
-            <a:avLst/>
-          </a:prstGeom>
-          <a:solidFill>
-            <a:srgbClr val="F5C800"/>
-          </a:solidFill>
-          <a:ln w="12700">
-            <a:solidFill>
-              <a:srgbClr val="F5C800"/>
-            </a:solidFill>
-            <a:prstDash val="solid"/>
-          </a:ln>
-        </p:spPr>
       </p:sp>
       <p:pic>
         <p:nvPicPr>
-          <p:cNvPr id="6" name="Image 0" descr="preencoded.png">    </p:cNvPr>
+          <p:cNvPr id="990" name="Rota strip" descr="The 26 weeks of the link"/>
           <p:cNvPicPr>
             <a:picLocks noChangeAspect="1"/>
           </p:cNvPicPr>
           <p:nvPr/>
         </p:nvPicPr>
         <p:blipFill>
-          <a:blip r:embed="rId1"/>
+          <a:blip r:embed="rIdStrip"/>
           <a:stretch>
             <a:fillRect/>
           </a:stretch>
         </p:blipFill>
         <p:spPr>
           <a:xfrm>
-            <a:off x="750722" y="1710842"/>
-            <a:ext cx="281635" cy="281635"/>
+            <a:off x="457200" y="1371600"/>
+            <a:ext cx="8229600" cy="2651760"/>
           </a:xfrm>
           <a:prstGeom prst="rect">
             <a:avLst/>
           </a:prstGeom>
         </p:spPr>
       </p:pic>
-      <p:sp>
-        <p:nvSpPr>
-          <p:cNvPr id="7" name="Text 4"/>
-          <p:cNvSpPr txBox="1"/>
-          <p:nvPr/>
-        </p:nvSpPr>
-        <p:spPr>
-          <a:xfrm>
-            <a:off x="640080" y="2240280"/>
-            <a:ext cx="2240280" cy="548640"/>
-          </a:xfrm>
-          <a:prstGeom prst="rect">
-            <a:avLst/>
-          </a:prstGeom>
-          <a:noFill/>
-          <a:ln/>
-        </p:spPr>
-        <p:txBody>
-          <a:bodyPr wrap="square" lIns="0" tIns="0" rIns="0" bIns="0" rtlCol="0" anchor="ctr"/>
-          <a:lstStyle/>
-          <a:p>
-            <a:pPr indent="0" marL="0">
-              <a:buNone/>
-            </a:pPr>
-            <a:r>
-              <a:rPr lang="en-US" sz="1600" b="1" dirty="0">
-                <a:solidFill>
-                  <a:srgbClr val="1B2533"/>
-                </a:solidFill>
-                <a:latin typeface="Inter" pitchFamily="34" charset="0"/>
-                <a:ea typeface="Inter" pitchFamily="34" charset="-122"/>
-                <a:cs typeface="Inter" pitchFamily="34" charset="-120"/>
-              </a:rPr>
-              <a:t>About half earlies, half lates</a:t>
-            </a:r>
-            <a:endParaRPr lang="en-US" sz="1600" dirty="0"/>
-          </a:p>
-        </p:txBody>
-      </p:sp>
-      <p:sp>
-        <p:nvSpPr>
-          <p:cNvPr id="8" name="Text 5"/>
-          <p:cNvSpPr txBox="1"/>
-          <p:nvPr/>
-        </p:nvSpPr>
-        <p:spPr>
-          <a:xfrm>
-            <a:off x="640080" y="2788920"/>
-            <a:ext cx="2240280" cy="1097280"/>
-          </a:xfrm>
-          <a:prstGeom prst="rect">
-            <a:avLst/>
-          </a:prstGeom>
-          <a:noFill/>
-          <a:ln/>
-        </p:spPr>
-        <p:txBody>
-          <a:bodyPr wrap="square" lIns="0" tIns="0" rIns="0" bIns="0" rtlCol="0" anchor="t"/>
-          <a:lstStyle/>
-          <a:p>
-            <a:pPr indent="0" marL="0">
-              <a:buNone/>
-            </a:pPr>
-            <a:r>
-              <a:rPr lang="en-US" sz="1300" dirty="0">
-                <a:solidFill>
-                  <a:srgbClr val="5B6778"/>
-                </a:solidFill>
-                <a:latin typeface="Inter" pitchFamily="34" charset="0"/>
-                <a:ea typeface="Inter" pitchFamily="34" charset="-122"/>
-                <a:cs typeface="Inter" pitchFamily="34" charset="-120"/>
-              </a:rPr>
-              <a:t>Saturday and Sunday split evenly; a weekday has one more late than early.</a:t>
-            </a:r>
-            <a:endParaRPr lang="en-US" sz="1300" dirty="0"/>
-          </a:p>
-        </p:txBody>
-      </p:sp>
-      <p:sp>
-        <p:nvSpPr>
-          <p:cNvPr id="9" name="Shape 6"/>
-          <p:cNvSpPr/>
-          <p:nvPr/>
-        </p:nvSpPr>
-        <p:spPr>
-          <a:xfrm>
-            <a:off x="3246120" y="1417320"/>
-            <a:ext cx="2606040" cy="2514600"/>
-          </a:xfrm>
-          <a:prstGeom prst="roundRect">
-            <a:avLst>
-              <a:gd name="adj" fmla="val 3636"/>
-            </a:avLst>
-          </a:prstGeom>
-          <a:solidFill>
-            <a:srgbClr val="EEF2F7"/>
-          </a:solidFill>
-          <a:ln w="12700">
-            <a:solidFill>
-              <a:srgbClr val="EEF2F7"/>
-            </a:solidFill>
-            <a:prstDash val="solid"/>
-          </a:ln>
-        </p:spPr>
-      </p:sp>
-      <p:sp>
-        <p:nvSpPr>
-          <p:cNvPr id="10" name="Shape 7"/>
-          <p:cNvSpPr/>
-          <p:nvPr/>
-        </p:nvSpPr>
-        <p:spPr>
-          <a:xfrm>
-            <a:off x="3429000" y="1600200"/>
-            <a:ext cx="502920" cy="502920"/>
-          </a:xfrm>
-          <a:prstGeom prst="ellipse">
-            <a:avLst/>
-          </a:prstGeom>
-          <a:solidFill>
-            <a:srgbClr val="F5C800"/>
-          </a:solidFill>
-          <a:ln w="12700">
-            <a:solidFill>
-              <a:srgbClr val="F5C800"/>
-            </a:solidFill>
-            <a:prstDash val="solid"/>
-          </a:ln>
-        </p:spPr>
-      </p:sp>
-      <p:pic>
-        <p:nvPicPr>
-          <p:cNvPr id="11" name="Image 1" descr="preencoded.png">    </p:cNvPr>
-          <p:cNvPicPr>
-            <a:picLocks noChangeAspect="1"/>
-          </p:cNvPicPr>
-          <p:nvPr/>
-        </p:nvPicPr>
-        <p:blipFill>
-          <a:blip r:embed="rId2"/>
-          <a:stretch>
-            <a:fillRect/>
-          </a:stretch>
-        </p:blipFill>
-        <p:spPr>
-          <a:xfrm>
-            <a:off x="3539642" y="1710842"/>
-            <a:ext cx="281635" cy="281635"/>
-          </a:xfrm>
-          <a:prstGeom prst="rect">
-            <a:avLst/>
-          </a:prstGeom>
-        </p:spPr>
-      </p:pic>
-      <p:sp>
-        <p:nvSpPr>
-          <p:cNvPr id="12" name="Text 8"/>
-          <p:cNvSpPr txBox="1"/>
-          <p:nvPr/>
-        </p:nvSpPr>
-        <p:spPr>
-          <a:xfrm>
-            <a:off x="3429000" y="2240280"/>
-            <a:ext cx="2240280" cy="548640"/>
-          </a:xfrm>
-          <a:prstGeom prst="rect">
-            <a:avLst/>
-          </a:prstGeom>
-          <a:noFill/>
-          <a:ln/>
-        </p:spPr>
-        <p:txBody>
-          <a:bodyPr wrap="square" lIns="0" tIns="0" rIns="0" bIns="0" rtlCol="0" anchor="ctr"/>
-          <a:lstStyle/>
-          <a:p>
-            <a:pPr indent="0" marL="0">
-              <a:buNone/>
-            </a:pPr>
-            <a:r>
-              <a:rPr lang="en-US" sz="1600" b="1" dirty="0">
-                <a:solidFill>
-                  <a:srgbClr val="1B2533"/>
-                </a:solidFill>
-                <a:latin typeface="Inter" pitchFamily="34" charset="0"/>
-                <a:ea typeface="Inter" pitchFamily="34" charset="-122"/>
-                <a:cs typeface="Inter" pitchFamily="34" charset="-120"/>
-              </a:rPr>
-              <a:t>Sundays are still overtime</a:t>
-            </a:r>
-            <a:endParaRPr lang="en-US" sz="1600" dirty="0"/>
-          </a:p>
-        </p:txBody>
-      </p:sp>
-      <p:sp>
-        <p:nvSpPr>
-          <p:cNvPr id="13" name="Text 9"/>
-          <p:cNvSpPr txBox="1"/>
-          <p:nvPr/>
-        </p:nvSpPr>
-        <p:spPr>
-          <a:xfrm>
-            <a:off x="3429000" y="2788920"/>
-            <a:ext cx="2240280" cy="1097280"/>
-          </a:xfrm>
-          <a:prstGeom prst="rect">
-            <a:avLst/>
-          </a:prstGeom>
-          <a:noFill/>
-          <a:ln/>
-        </p:spPr>
-        <p:txBody>
-          <a:bodyPr wrap="square" lIns="0" tIns="0" rIns="0" bIns="0" rtlCol="0" anchor="t"/>
-          <a:lstStyle/>
-          <a:p>
-            <a:pPr indent="0" marL="0">
-              <a:buNone/>
-            </a:pPr>
-            <a:r>
-              <a:rPr lang="en-US" sz="1300" dirty="0">
-                <a:solidFill>
-                  <a:srgbClr val="5B6778"/>
-                </a:solidFill>
-                <a:latin typeface="Inter" pitchFamily="34" charset="0"/>
-                <a:ea typeface="Inter" pitchFamily="34" charset="-122"/>
-                <a:cs typeface="Inter" pitchFamily="34" charset="-120"/>
-              </a:rPr>
-              <a:t>Not part of the contract, same as now — and about the same number of Sundays as today.</a:t>
-            </a:r>
-            <a:endParaRPr lang="en-US" sz="1300" dirty="0"/>
-          </a:p>
-        </p:txBody>
-      </p:sp>
-      <p:sp>
-        <p:nvSpPr>
-          <p:cNvPr id="14" name="Shape 10"/>
-          <p:cNvSpPr/>
-          <p:nvPr/>
-        </p:nvSpPr>
-        <p:spPr>
-          <a:xfrm>
-            <a:off x="6035040" y="1417320"/>
-            <a:ext cx="2606040" cy="2514600"/>
-          </a:xfrm>
-          <a:prstGeom prst="roundRect">
-            <a:avLst>
-              <a:gd name="adj" fmla="val 3636"/>
-            </a:avLst>
-          </a:prstGeom>
-          <a:solidFill>
-            <a:srgbClr val="EEF2F7"/>
-          </a:solidFill>
-          <a:ln w="12700">
-            <a:solidFill>
-              <a:srgbClr val="EEF2F7"/>
-            </a:solidFill>
-            <a:prstDash val="solid"/>
-          </a:ln>
-        </p:spPr>
-      </p:sp>
-      <p:sp>
-        <p:nvSpPr>
-          <p:cNvPr id="15" name="Shape 11"/>
-          <p:cNvSpPr/>
-          <p:nvPr/>
-        </p:nvSpPr>
-        <p:spPr>
-          <a:xfrm>
-            <a:off x="6217920" y="1600200"/>
-            <a:ext cx="502920" cy="502920"/>
-          </a:xfrm>
-          <a:prstGeom prst="ellipse">
-            <a:avLst/>
-          </a:prstGeom>
-          <a:solidFill>
-            <a:srgbClr val="F5C800"/>
-          </a:solidFill>
-          <a:ln w="12700">
-            <a:solidFill>
-              <a:srgbClr val="F5C800"/>
-            </a:solidFill>
-            <a:prstDash val="solid"/>
-          </a:ln>
-        </p:spPr>
-      </p:sp>
-      <p:pic>
-        <p:nvPicPr>
-          <p:cNvPr id="16" name="Image 2" descr="preencoded.png">    </p:cNvPr>
-          <p:cNvPicPr>
-            <a:picLocks noChangeAspect="1"/>
-          </p:cNvPicPr>
-          <p:nvPr/>
-        </p:nvPicPr>
-        <p:blipFill>
-          <a:blip r:embed="rId3"/>
-          <a:stretch>
-            <a:fillRect/>
-          </a:stretch>
-        </p:blipFill>
-        <p:spPr>
-          <a:xfrm>
-            <a:off x="6328562" y="1710842"/>
-            <a:ext cx="281635" cy="281635"/>
-          </a:xfrm>
-          <a:prstGeom prst="rect">
-            <a:avLst/>
-          </a:prstGeom>
-        </p:spPr>
-      </p:pic>
-      <p:sp>
-        <p:nvSpPr>
-          <p:cNvPr id="17" name="Text 12"/>
-          <p:cNvSpPr txBox="1"/>
-          <p:nvPr/>
-        </p:nvSpPr>
-        <p:spPr>
-          <a:xfrm>
-            <a:off x="6217920" y="2240280"/>
-            <a:ext cx="2240280" cy="548640"/>
-          </a:xfrm>
-          <a:prstGeom prst="rect">
-            <a:avLst/>
-          </a:prstGeom>
-          <a:noFill/>
-          <a:ln/>
-        </p:spPr>
-        <p:txBody>
-          <a:bodyPr wrap="square" lIns="0" tIns="0" rIns="0" bIns="0" rtlCol="0" anchor="ctr"/>
-          <a:lstStyle/>
-          <a:p>
-            <a:pPr indent="0" marL="0">
-              <a:buNone/>
-            </a:pPr>
-            <a:r>
-              <a:rPr lang="en-US" sz="1600" b="1" dirty="0">
-                <a:solidFill>
-                  <a:srgbClr val="1B2533"/>
-                </a:solidFill>
-                <a:latin typeface="Inter" pitchFamily="34" charset="0"/>
-                <a:ea typeface="Inter" pitchFamily="34" charset="-122"/>
-                <a:cs typeface="Inter" pitchFamily="34" charset="-120"/>
-              </a:rPr>
-              <a:t>Nobody past 23:25 on a Sunday</a:t>
-            </a:r>
-            <a:endParaRPr lang="en-US" sz="1600" dirty="0"/>
-          </a:p>
-        </p:txBody>
-      </p:sp>
-      <p:sp>
-        <p:nvSpPr>
-          <p:cNvPr id="18" name="Text 13"/>
-          <p:cNvSpPr txBox="1"/>
-          <p:nvPr/>
-        </p:nvSpPr>
-        <p:spPr>
-          <a:xfrm>
-            <a:off x="6217920" y="2788920"/>
-            <a:ext cx="2240280" cy="1097280"/>
-          </a:xfrm>
-          <a:prstGeom prst="rect">
-            <a:avLst/>
-          </a:prstGeom>
-          <a:noFill/>
-          <a:ln/>
-        </p:spPr>
-        <p:txBody>
-          <a:bodyPr wrap="square" lIns="0" tIns="0" rIns="0" bIns="0" rtlCol="0" anchor="t"/>
-          <a:lstStyle/>
-          <a:p>
-            <a:pPr indent="0" marL="0">
-              <a:buNone/>
-            </a:pPr>
-            <a:r>
-              <a:rPr lang="en-US" sz="1300" dirty="0">
-                <a:solidFill>
-                  <a:srgbClr val="5B6778"/>
-                </a:solidFill>
-                <a:latin typeface="Inter" pitchFamily="34" charset="0"/>
-                <a:ea typeface="Inter" pitchFamily="34" charset="-122"/>
-                <a:cs typeface="Inter" pitchFamily="34" charset="-120"/>
-              </a:rPr>
-              <a:t>The Sunday finish stays where it is. That is agreed practice (settled 28 Sep 2026).</a:t>
-            </a:r>
-            <a:endParaRPr lang="en-US" sz="1300" dirty="0"/>
-          </a:p>
-        </p:txBody>
-      </p:sp>
       <p:sp>
         <p:nvSpPr>
           <p:cNvPr id="19" name="Shape 14"/>
@@ -2919,7 +2481,7 @@
                 <a:ea typeface="Inter" pitchFamily="34" charset="-122"/>
                 <a:cs typeface="Inter" pitchFamily="34" charset="-120"/>
               </a:rPr>
-              <a:t>Much the same balance. Sundays stay overtime and still finish at 23:25.</a:t>
+              <a:t>14 full weekends off a year, never more than five weeks apart; the longest run of one kind is 5 weeks of lates.</a:t>
             </a:r>
             <a:endParaRPr lang="en-US" sz="1400" dirty="0"/>
           </a:p>
@@ -3788,7 +3350,7 @@
                 <a:ea typeface="Inter" pitchFamily="34" charset="-122"/>
                 <a:cs typeface="Inter" pitchFamily="34" charset="-120"/>
               </a:rPr>
-              <a:t>About the same. A cover week still counts as at most 4 days of leave, as now.</a:t>
+              <a:t>Best stretch 28 days, not 30; four full weeks off costs 15 days’ leave, not 14. Average the same, worst a day better.</a:t>
             </a:r>
             <a:endParaRPr lang="en-US" sz="1400" dirty="0"/>
           </a:p>
@@ -5082,7 +4644,7 @@
                 <a:ea typeface="Inter" pitchFamily="34" charset="-122"/>
                 <a:cs typeface="Inter" pitchFamily="34" charset="-120"/>
               </a:rPr>
-              <a:t>Best leave stretch: 28 days, not 30</a:t>
+              <a:t>Four weeks off: 15 days’ leave, not 14</a:t>
             </a:r>
             <a:endParaRPr lang="en-US" sz="1400" dirty="0"/>
           </a:p>
@@ -5121,7 +4683,7 @@
                 <a:ea typeface="Inter" pitchFamily="34" charset="-122"/>
                 <a:cs typeface="Inter" pitchFamily="34" charset="-120"/>
               </a:rPr>
-              <a:t>Average as today, and the worst a day better.</a:t>
+              <a:t>Best 14-day stretch 28 days, not 30; average as today, worst a day better.</a:t>
             </a:r>
             <a:endParaRPr lang="en-US" sz="1250" dirty="0"/>
           </a:p>
@@ -5187,7 +4749,7 @@
                 <a:ea typeface="Inter" pitchFamily="34" charset="-122"/>
                 <a:cs typeface="Inter" pitchFamily="34" charset="-120"/>
               </a:rPr>
-              <a:t>Five cover weeks</a:t>
+              <a:t>Two more Saturdays a year</a:t>
             </a:r>
             <a:endParaRPr lang="en-US" sz="1400" dirty="0"/>
           </a:p>
@@ -5226,7 +4788,7 @@
                 <a:ea typeface="Inter" pitchFamily="34" charset="-122"/>
                 <a:cs typeface="Inter" pitchFamily="34" charset="-120"/>
               </a:rPr>
-              <a:t>Spaced evenly: weeks 1, 6, 11, 16 and 21.</a:t>
+              <a:t>28 a year each, today 26 — fourteen on a Saturday, shared across 26 lines.</a:t>
             </a:r>
             <a:endParaRPr lang="en-US" sz="1250" dirty="0"/>
           </a:p>
@@ -6105,7 +5667,7 @@
                           <a:ea typeface="Inter" pitchFamily="34" charset="-122"/>
                           <a:cs typeface="Inter" pitchFamily="34" charset="-120"/>
                         </a:rPr>
-                        <a:t>219</a:t>
+                        <a:t>219.0</a:t>
                       </a:r>
                       <a:endParaRPr lang="en-US" sz="1200" dirty="0">
                         <a:latin typeface="Inter" charset="0"/>
@@ -6173,7 +5735,7 @@
                           <a:ea typeface="Inter" pitchFamily="34" charset="-122"/>
                           <a:cs typeface="Inter" pitchFamily="34" charset="-120"/>
                         </a:rPr>
-                        <a:t>219</a:t>
+                        <a:t>218.6</a:t>
                       </a:r>
                       <a:endParaRPr lang="en-US" sz="1200" dirty="0">
                         <a:latin typeface="Inter" charset="0"/>
@@ -6655,7 +6217,7 @@
                           <a:ea typeface="Inter" pitchFamily="34" charset="-122"/>
                           <a:cs typeface="Inter" pitchFamily="34" charset="-120"/>
                         </a:rPr>
-                        <a:t>Full weekends off</a:t>
+                        <a:t>Full weekends off, about a year</a:t>
                       </a:r>
                       <a:endParaRPr lang="en-US" sz="1200" dirty="0">
                         <a:latin typeface="Inter" charset="0"/>
@@ -6723,7 +6285,7 @@
                           <a:ea typeface="Inter" pitchFamily="34" charset="-122"/>
                           <a:cs typeface="Inter" pitchFamily="34" charset="-120"/>
                         </a:rPr>
-                        <a:t>4 in 20</a:t>
+                        <a:t>10</a:t>
                       </a:r>
                       <a:endParaRPr lang="en-US" sz="1200" dirty="0">
                         <a:latin typeface="Inter" charset="0"/>
@@ -6791,7 +6353,7 @@
                           <a:ea typeface="Inter" pitchFamily="34" charset="-122"/>
                           <a:cs typeface="Inter" pitchFamily="34" charset="-120"/>
                         </a:rPr>
-                        <a:t>7 in 26</a:t>
+                        <a:t>14</a:t>
                       </a:r>
                       <a:endParaRPr lang="en-US" sz="1200" dirty="0">
                         <a:latin typeface="Inter" charset="0"/>
@@ -8693,7 +8255,7 @@
                 <a:ea typeface="Inter" pitchFamily="34" charset="-122"/>
                 <a:cs typeface="Inter" pitchFamily="34" charset="-120"/>
               </a:rPr>
-              <a:t>7 in 26</a:t>
+              <a:t>14</a:t>
             </a:r>
             <a:endParaRPr lang="en-US" sz="3000" dirty="0"/>
           </a:p>
@@ -8732,7 +8294,7 @@
                 <a:ea typeface="Inter" pitchFamily="34" charset="-122"/>
                 <a:cs typeface="Inter" pitchFamily="34" charset="-120"/>
               </a:rPr>
-              <a:t>full weekends off</a:t>
+              <a:t>full weekends off a year</a:t>
             </a:r>
             <a:endParaRPr lang="en-US" sz="1400" dirty="0"/>
           </a:p>
@@ -8771,7 +8333,7 @@
                 <a:ea typeface="Inter" pitchFamily="34" charset="-122"/>
                 <a:cs typeface="Inter" pitchFamily="34" charset="-120"/>
               </a:rPr>
-              <a:t>at most 5 weeks apart</a:t>
+              <a:t>today 10 · 7 in 26 · at most 5 apart</a:t>
             </a:r>
             <a:endParaRPr lang="en-US" sz="1200" dirty="0"/>
           </a:p>
@@ -10262,7 +9824,7 @@
                 <a:ea typeface="Inter" pitchFamily="34" charset="-122"/>
                 <a:cs typeface="Inter" pitchFamily="34" charset="-120"/>
               </a:rPr>
-              <a:t>4.2</a:t>
+              <a:t>4.20</a:t>
             </a:r>
             <a:endParaRPr lang="en-US" sz="1600" dirty="0"/>
           </a:p>
@@ -10406,7 +9968,7 @@
                 <a:ea typeface="Inter" pitchFamily="34" charset="-122"/>
                 <a:cs typeface="Inter" pitchFamily="34" charset="-120"/>
               </a:rPr>
-              <a:t>219</a:t>
+              <a:t>219.0</a:t>
             </a:r>
             <a:endParaRPr lang="en-US" sz="1600" dirty="0"/>
           </a:p>
@@ -10445,7 +10007,7 @@
                 <a:ea typeface="Inter" pitchFamily="34" charset="-122"/>
                 <a:cs typeface="Inter" pitchFamily="34" charset="-120"/>
               </a:rPr>
-              <a:t>219</a:t>
+              <a:t>218.6</a:t>
             </a:r>
             <a:endParaRPr lang="en-US" sz="1800" dirty="0"/>
           </a:p>
@@ -14296,7 +13858,7 @@
                 <a:ea typeface="Inter" pitchFamily="34" charset="-122"/>
                 <a:cs typeface="Inter" pitchFamily="34" charset="-120"/>
               </a:rPr>
-              <a:t>Full weekends off</a:t>
+              <a:t>Full weekends off, about a year</a:t>
             </a:r>
             <a:endParaRPr lang="en-US" sz="1400" dirty="0"/>
           </a:p>
@@ -14335,7 +13897,7 @@
                 <a:ea typeface="Inter" pitchFamily="34" charset="-122"/>
                 <a:cs typeface="Inter" pitchFamily="34" charset="-120"/>
               </a:rPr>
-              <a:t>4 in 20</a:t>
+              <a:t>10</a:t>
             </a:r>
             <a:endParaRPr lang="en-US" sz="1600" dirty="0"/>
           </a:p>
@@ -14374,7 +13936,7 @@
                 <a:ea typeface="Inter" pitchFamily="34" charset="-122"/>
                 <a:cs typeface="Inter" pitchFamily="34" charset="-120"/>
               </a:rPr>
-              <a:t>7 in 26</a:t>
+              <a:t>14</a:t>
             </a:r>
             <a:endParaRPr lang="en-US" sz="1800" dirty="0"/>
           </a:p>
@@ -14872,7 +14434,7 @@
                 <a:ea typeface="Inter" pitchFamily="34" charset="-122"/>
                 <a:cs typeface="Inter" pitchFamily="34" charset="-120"/>
               </a:rPr>
-              <a:t>Weeks on one turn, Monday to Friday</a:t>
+              <a:t>Weeks on one turn, no early–late switch</a:t>
             </a:r>
             <a:endParaRPr lang="en-US" sz="1400" dirty="0"/>
           </a:p>
@@ -15016,7 +14578,7 @@
                 <a:ea typeface="Inter" pitchFamily="34" charset="-122"/>
                 <a:cs typeface="Inter" pitchFamily="34" charset="-120"/>
               </a:rPr>
-              <a:t>Seven weekends off in 26, at most five weeks apart, and one shift time in 18 of 21 weeks.</a:t>
+              <a:t>14 full weekends off a year, at most five weeks apart, and one shift time in 18 of 21 weeks.</a:t>
             </a:r>
             <a:endParaRPr lang="en-US" sz="1400" dirty="0"/>
           </a:p>

--- a/docs/links-26/presentations/Second-Edition-for-colleagues.pptx
+++ b/docs/links-26/presentations/Second-Edition-for-colleagues.pptx
@@ -1132,7 +1132,7 @@
           <a:p>
             <a:r>
               <a:rPr lang="en-US" dirty="0"/>
-              <a:t>This is the whole pitch on one slide. Same 35-hour week as now. Never more than six days in a row. Seven full weekends off in every 26 weeks, against four in 20 today, and never more than five weeks apart — though each person works about two more Saturdays a year. Every week is all earlies or all lates, and 18 of the 21 working weeks keep one shift time Monday to Friday. Nine of the fifteen shift times are ones people already work. And every closing shift is shorter: the weekday and Saturday closers by 30 minutes, the Sunday closer by 45. Say the leave cost here too, before anyone asks: four full weeks off takes 15 days’ leave rather than 14, and the best 14-day stretch is 28 days off rather than 30; the average is the same and the worst a day better. A cover week is one of the five weeks in 26 with no fixed shifts: its four duties are placed later to cover leave and sickness.</a:t>
+              <a:t>This is the whole pitch on one slide. Same 35-hour week as now. Never more than six days in a row. Seven full weekends off in every 26 weeks, against four in 20 today, and never more than five weeks apart — though each person works about two more Saturdays a year. Every week is all earlies or all lates, and 18 of the 21 working weeks keep one shift time Monday to Friday. Nine of the fifteen shift times are ones people already work. And every closing shift is shorter: the weekday and Saturday closers by 30 minutes, the Sunday closer by 45. Say the leave cost here too, before anyone asks: four full weeks off takes 15 days’ leave rather than 14, and the best 14-day stretch is 28 days off rather than 30; the average is the same and the worst a day better. A cover week is one of the five weeks in 26 with no fixed shifts: its four duties are placed later to cover leave and sickness; the fixed rota is the other 21 weeks, whose shifts are set.</a:t>
             </a:r>
             <a:endParaRPr lang="en-US" dirty="0"/>
           </a:p>
@@ -10073,7 +10073,7 @@
                 <a:ea typeface="Inter" pitchFamily="34" charset="-122"/>
                 <a:cs typeface="Inter" pitchFamily="34" charset="-120"/>
               </a:rPr>
-              <a:t>No. Exactly the same 35-hour week — and no more contracted days than today.</a:t>
+              <a:t>No. The same 35-hour week on average and no more days; weeks run from 25h 30m to 42h 00m (today 25h 10m to 43h 50m), and two more of the days fall on a Saturday.</a:t>
             </a:r>
             <a:endParaRPr lang="en-US" sz="1400" dirty="0"/>
           </a:p>
@@ -11850,7 +11850,7 @@
                 <a:ea typeface="Inter" pitchFamily="34" charset="-122"/>
                 <a:cs typeface="Inter" pitchFamily="34" charset="-120"/>
               </a:rPr>
-              <a:t>Every closing shift is 30 to 45 minutes shorter, and nothing runs over 9 hours.</a:t>
+              <a:t>Every closing shift is 30 to 45 minutes shorter; the longest early turn goes from 8h 30m to 9h 00m, and nothing runs over 9 hours.</a:t>
             </a:r>
             <a:endParaRPr lang="en-US" sz="1400" dirty="0"/>
           </a:p>
@@ -11999,7 +11999,7 @@
                 <a:ea typeface="Inter" pitchFamily="34" charset="-122"/>
                 <a:cs typeface="Inter" pitchFamily="34" charset="-120"/>
               </a:rPr>
-              <a:t>A little — about 42 a year each, against 39 today</a:t>
+              <a:t>3 more a year after 23:00 (42, today 39); 16 more after 22:00 (94, today 78)</a:t>
             </a:r>
             <a:endParaRPr lang="en-US" sz="1500" dirty="0"/>
           </a:p>
@@ -12719,7 +12719,7 @@
                 <a:ea typeface="Inter" pitchFamily="34" charset="-122"/>
                 <a:cs typeface="Inter" pitchFamily="34" charset="-120"/>
               </a:rPr>
-              <a:t>Three more late finishes a year — the fewest the rules allow — and every closer is shorter.</a:t>
+              <a:t>More people stay on after 22:00 under the December staffing; the three more after 23:00 are the fewest the rules allow.</a:t>
             </a:r>
             <a:endParaRPr lang="en-US" sz="1400" dirty="0"/>
           </a:p>

--- a/docs/links-26/presentations/Second-Edition-for-colleagues.pptx
+++ b/docs/links-26/presentations/Second-Edition-for-colleagues.pptx
@@ -1396,7 +1396,7 @@
           <a:p>
             <a:r>
               <a:rPr lang="en-US" dirty="0"/>
-              <a:t>Basic pay follows the 35-hour week, which does not change; overtime and premium duties vary person to person. The Saturday and Sunday counts are the link’s fixed duties and leave out anything later given in a cover week. Saturdays in the contract are paid at time and a quarter, and on average a person is rostered about 28 a year instead of 26. Sundays stay overtime: 10 a week shared among 26 people instead of 8 among 20, so about the same each (20 a year, against 21). These are averages across the whole link — your own depends on which line you start on — and they are not a payslip; the Pay Calculator in the app does that.</a:t>
+              <a:t>Basic pay follows the 35-hour week, which does not change; overtime and premium duties vary person to person. The Saturday and Sunday counts are the link’s fixed duties and leave out anything later given in a cover week. Saturdays in the contract are paid at time and a quarter, and on average a person is rostered about 28 a year instead of 26. Sundays stay overtime: 10 a week shared among 26 people instead of 8 among 20, so about the same each (20 a year, against 21). These are averages across the whole link — your own depends on which line you start on — and they are not a payslip; the Pay Calculator in the app does that. The yearly figures are averages from the fixed rota; a cover week’s duties are not known yet and are left out.</a:t>
             </a:r>
             <a:endParaRPr lang="en-US" dirty="0"/>
           </a:p>
@@ -1572,7 +1572,7 @@
           <a:p>
             <a:r>
               <a:rPr lang="en-US" dirty="0"/>
-              <a:t>Be straight about this one. About three more a year each finish at 23:00 or later, and all of that comes from the December rules: three on duty to the close every day, where today’s weekdays have two. In Second Edition the only people who finish after 23:00 are those three closers, so no link that meets the rules on 26 weeks can have fewer. Finishes at 22:00 or later go up more, from 78 to 94 a year: the rules also want five still on duty after 22:00, and two weekday lates finish at 22:30 with the ticket office. Early 06:20 starts hardly change. And because the shortest gap between two shifts is 14h 20m, nobody finishes late and starts early the next morning.</a:t>
+              <a:t>Be straight about this one. About three more a year each finish at 23:00 or later, and all of that comes from the December rules: three on duty to the close every day, where today’s weekdays have two. In Second Edition the only people who finish after 23:00 are those three closers, so no link that meets the rules on 26 weeks can have fewer. Finishes at 22:00 or later go up more, from 78 to 94 a year: the rules also want five still on duty after 22:00, and two weekday lates finish at 22:30 with the ticket office. Early 06:20 starts hardly change. And because the shortest gap between two shifts is 14h 20m, nobody finishes late and starts early the next morning. The yearly figures are averages from the fixed rota; a cover week’s duties are not known yet and are left out.</a:t>
             </a:r>
             <a:endParaRPr lang="en-US" dirty="0"/>
           </a:p>
@@ -10806,45 +10806,6 @@
       </p:sp>
       <p:sp>
         <p:nvSpPr>
-          <p:cNvPr id="20" name="Text 18"/>
-          <p:cNvSpPr txBox="1"/>
-          <p:nvPr/>
-        </p:nvSpPr>
-        <p:spPr>
-          <a:xfrm>
-            <a:off x="4023360" y="4754880"/>
-            <a:ext cx="4663440" cy="310896"/>
-          </a:xfrm>
-          <a:prstGeom prst="rect">
-            <a:avLst/>
-          </a:prstGeom>
-          <a:noFill/>
-          <a:ln/>
-        </p:spPr>
-        <p:txBody>
-          <a:bodyPr wrap="square" lIns="0" tIns="0" rIns="0" bIns="0" rtlCol="0" anchor="t"/>
-          <a:lstStyle/>
-          <a:p>
-            <a:pPr algn="r" indent="0" marL="0">
-              <a:buNone/>
-            </a:pPr>
-            <a:r>
-              <a:rPr lang="en-US" sz="850" i="1" dirty="0">
-                <a:solidFill>
-                  <a:srgbClr val="5B6778"/>
-                </a:solidFill>
-                <a:latin typeface="Inter" pitchFamily="34" charset="0"/>
-                <a:ea typeface="Inter" pitchFamily="34" charset="-122"/>
-                <a:cs typeface="Inter" pitchFamily="34" charset="-120"/>
-              </a:rPr>
-              <a:t>Yearly figures are averages from the fixed rota; cover-week duties are not included.</a:t>
-            </a:r>
-            <a:endParaRPr lang="en-US" sz="850" dirty="0"/>
-          </a:p>
-        </p:txBody>
-      </p:sp>
-      <p:sp>
-        <p:nvSpPr>
           <p:cNvPr id="21" name="Text 19"/>
           <p:cNvSpPr txBox="1"/>
           <p:nvPr/>
@@ -12722,45 +12683,6 @@
               <a:t>More people stay on after 22:00 under the December staffing; the three more after 23:00 are the fewest the rules allow.</a:t>
             </a:r>
             <a:endParaRPr lang="en-US" sz="1400" dirty="0"/>
-          </a:p>
-        </p:txBody>
-      </p:sp>
-      <p:sp>
-        <p:nvSpPr>
-          <p:cNvPr id="24" name="Text 22"/>
-          <p:cNvSpPr txBox="1"/>
-          <p:nvPr/>
-        </p:nvSpPr>
-        <p:spPr>
-          <a:xfrm>
-            <a:off x="4023360" y="4754880"/>
-            <a:ext cx="4663440" cy="310896"/>
-          </a:xfrm>
-          <a:prstGeom prst="rect">
-            <a:avLst/>
-          </a:prstGeom>
-          <a:noFill/>
-          <a:ln/>
-        </p:spPr>
-        <p:txBody>
-          <a:bodyPr wrap="square" lIns="0" tIns="0" rIns="0" bIns="0" rtlCol="0" anchor="t"/>
-          <a:lstStyle/>
-          <a:p>
-            <a:pPr algn="r" indent="0" marL="0">
-              <a:buNone/>
-            </a:pPr>
-            <a:r>
-              <a:rPr lang="en-US" sz="850" i="1" dirty="0">
-                <a:solidFill>
-                  <a:srgbClr val="5B6778"/>
-                </a:solidFill>
-                <a:latin typeface="Inter" pitchFamily="34" charset="0"/>
-                <a:ea typeface="Inter" pitchFamily="34" charset="-122"/>
-                <a:cs typeface="Inter" pitchFamily="34" charset="-120"/>
-              </a:rPr>
-              <a:t>Yearly figures are averages from the fixed rota; cover-week duties are not included.</a:t>
-            </a:r>
-            <a:endParaRPr lang="en-US" sz="850" dirty="0"/>
           </a:p>
         </p:txBody>
       </p:sp>

--- a/docs/links-26/presentations/Second-Edition-for-colleagues.pptx
+++ b/docs/links-26/presentations/Second-Edition-for-colleagues.pptx
@@ -692,7 +692,7 @@
           <a:p>
             <a:r>
               <a:rPr lang="en-US" dirty="0"/>
-              <a:t>Leave is only needed on working days Monday to Saturday; rest days and Sundays cost nothing. Today there is one unusual stretch of the roster where 14 days buys 30 days off — Second Edition spreads rest days more evenly, so its best is 28. On average it is the same, 23.4 days, and at its worst it is a day better than today. Four full weeks off (Sunday to Saturday) takes at least 15 days of leave, instead of 14 at best today. Say the four-weeks figure plainly: it is the one place every proposal in the pack is worse than today, and people plan a year around it. The averages depend on where you count a booking as starting, so quote those as “about the same”.</a:t>
+              <a:t>Leave is only needed on working days Monday to Saturday; rest days and Sundays cost nothing. Today there is one unusual stretch of the roster where 14 days buys 30 days off — Second Edition spreads rest days more evenly, so its best is 28. On average it is the same, 23.4 days, and at its worst it is a day better than today. Four full weeks off (Sunday to Saturday) takes at least 15 days of leave, instead of 14 at best today. Say the four-weeks figure plainly: all three shortlisted links are worse than today here (Long Break, the leave-first design in the pack, keeps the 14), and people plan a year around it. The averages depend on where you count a booking as starting, so quote those as “about the same”.</a:t>
             </a:r>
             <a:endParaRPr lang="en-US" dirty="0"/>
           </a:p>
@@ -1660,7 +1660,7 @@
           <a:p>
             <a:r>
               <a:rPr lang="en-US" dirty="0"/>
-              <a:t>Second Edition was built keeping the times people already work wherever that cost little. Nine of its fifteen are worked today, and it uses fewer different times overall than today’s eighteen. Four of the six new ones are today’s shifts starting later — the weekday closer, the Sunday closer, and the ticket-office late on weekdays and on Sundays — so they are shorter, not longer. The Sunday opener stays today’s 07:15–15:45.</a:t>
+              <a:t>Second Edition was built keeping the times people already work wherever that cost little. Nine of its fifteen are worked today, and it uses fewer different times overall than today’s eighteen. Several of the new times are shorter versions of today’s lates: the weekday and Sunday closers start later, and the Sunday office late finishes earlier. The full list is on the slide. The Sunday opener stays today’s 07:15–15:45.</a:t>
             </a:r>
             <a:endParaRPr lang="en-US" dirty="0"/>
           </a:p>
@@ -4473,7 +4473,7 @@
                 <a:ea typeface="Inter" pitchFamily="34" charset="-122"/>
                 <a:cs typeface="Inter" pitchFamily="34" charset="-120"/>
               </a:rPr>
-              <a:t>Four are today’s lates starting later, so shorter.</a:t>
+              <a:t>Several are shorter versions of today’s lates.</a:t>
             </a:r>
             <a:endParaRPr lang="en-US" sz="1250" dirty="0"/>
           </a:p>
@@ -11960,7 +11960,7 @@
                 <a:ea typeface="Inter" pitchFamily="34" charset="-122"/>
                 <a:cs typeface="Inter" pitchFamily="34" charset="-120"/>
               </a:rPr>
-              <a:t>3 more a year after 23:00 (42, today 39); 16 more after 22:00 (94, today 78)</a:t>
+              <a:t>3 more a year after 23:00 (42, today 39); 16 more at 22:00 or later (94, today 78)</a:t>
             </a:r>
             <a:endParaRPr lang="en-US" sz="1500" dirty="0"/>
           </a:p>

--- a/docs/links-26/presentations/Second-Edition-for-colleagues.pptx
+++ b/docs/links-26/presentations/Second-Edition-for-colleagues.pptx
@@ -2391,7 +2391,7 @@
                 <a:ea typeface="Inter" pitchFamily="34" charset="-122"/>
                 <a:cs typeface="Inter" pitchFamily="34" charset="-120"/>
               </a:rPr>
-              <a:t>Each week is all earlies or all lates; the green bars are the full weekends off — where you start is decided later</a:t>
+              <a:t>The green bars are the full weekends off; where you start is decided later</a:t>
             </a:r>
             <a:endParaRPr lang="en-US" sz="1500" dirty="0"/>
           </a:p>
@@ -2414,7 +2414,7 @@
         <p:spPr>
           <a:xfrm>
             <a:off x="457200" y="1371600"/>
-            <a:ext cx="8229600" cy="2651760"/>
+            <a:ext cx="8229600" cy="2575381"/>
           </a:xfrm>
           <a:prstGeom prst="rect">
             <a:avLst/>
@@ -2644,8 +2644,8 @@
         </p:nvSpPr>
         <p:spPr>
           <a:xfrm>
-            <a:off x="4297680" y="1417320"/>
-            <a:ext cx="2194560" cy="320040"/>
+            <a:off x="4663440" y="1417320"/>
+            <a:ext cx="2011680" cy="320040"/>
           </a:xfrm>
           <a:prstGeom prst="rect">
             <a:avLst/>
@@ -2683,8 +2683,8 @@
         </p:nvSpPr>
         <p:spPr>
           <a:xfrm>
-            <a:off x="6492240" y="1417320"/>
-            <a:ext cx="2194560" cy="320040"/>
+            <a:off x="6675120" y="1417320"/>
+            <a:ext cx="2011680" cy="320040"/>
           </a:xfrm>
           <a:prstGeom prst="rect">
             <a:avLst/>
@@ -2723,7 +2723,7 @@
         <p:spPr>
           <a:xfrm>
             <a:off x="457200" y="1801368"/>
-            <a:ext cx="8229600" cy="475488"/>
+            <a:ext cx="8229600" cy="365760"/>
           </a:xfrm>
           <a:prstGeom prst="roundRect">
             <a:avLst>
@@ -2750,7 +2750,7 @@
         <p:spPr>
           <a:xfrm>
             <a:off x="640080" y="1801368"/>
-            <a:ext cx="3657600" cy="475488"/>
+            <a:ext cx="4023360" cy="365760"/>
           </a:xfrm>
           <a:prstGeom prst="rect">
             <a:avLst/>
@@ -2788,8 +2788,8 @@
         </p:nvSpPr>
         <p:spPr>
           <a:xfrm>
-            <a:off x="4297680" y="1801368"/>
-            <a:ext cx="2194560" cy="475488"/>
+            <a:off x="4663440" y="1801368"/>
+            <a:ext cx="2011680" cy="365760"/>
           </a:xfrm>
           <a:prstGeom prst="rect">
             <a:avLst/>
@@ -2827,8 +2827,8 @@
         </p:nvSpPr>
         <p:spPr>
           <a:xfrm>
-            <a:off x="6492240" y="1801368"/>
-            <a:ext cx="2194560" cy="475488"/>
+            <a:off x="6675120" y="1801368"/>
+            <a:ext cx="2011680" cy="365760"/>
           </a:xfrm>
           <a:prstGeom prst="rect">
             <a:avLst/>
@@ -2866,8 +2866,8 @@
         </p:nvSpPr>
         <p:spPr>
           <a:xfrm>
-            <a:off x="457200" y="2368296"/>
-            <a:ext cx="8229600" cy="475488"/>
+            <a:off x="457200" y="2240280"/>
+            <a:ext cx="8229600" cy="365760"/>
           </a:xfrm>
           <a:prstGeom prst="roundRect">
             <a:avLst>
@@ -2893,8 +2893,8 @@
         </p:nvSpPr>
         <p:spPr>
           <a:xfrm>
-            <a:off x="640080" y="2368296"/>
-            <a:ext cx="3657600" cy="475488"/>
+            <a:off x="640080" y="2240280"/>
+            <a:ext cx="4023360" cy="365760"/>
           </a:xfrm>
           <a:prstGeom prst="rect">
             <a:avLst/>
@@ -2932,8 +2932,8 @@
         </p:nvSpPr>
         <p:spPr>
           <a:xfrm>
-            <a:off x="4297680" y="2368296"/>
-            <a:ext cx="2194560" cy="475488"/>
+            <a:off x="4663440" y="2240280"/>
+            <a:ext cx="2011680" cy="365760"/>
           </a:xfrm>
           <a:prstGeom prst="rect">
             <a:avLst/>
@@ -2971,8 +2971,8 @@
         </p:nvSpPr>
         <p:spPr>
           <a:xfrm>
-            <a:off x="6492240" y="2368296"/>
-            <a:ext cx="2194560" cy="475488"/>
+            <a:off x="6675120" y="2240280"/>
+            <a:ext cx="2011680" cy="365760"/>
           </a:xfrm>
           <a:prstGeom prst="rect">
             <a:avLst/>
@@ -3010,8 +3010,8 @@
         </p:nvSpPr>
         <p:spPr>
           <a:xfrm>
-            <a:off x="457200" y="2935224"/>
-            <a:ext cx="8229600" cy="475488"/>
+            <a:off x="457200" y="2679192"/>
+            <a:ext cx="8229600" cy="365760"/>
           </a:xfrm>
           <a:prstGeom prst="roundRect">
             <a:avLst>
@@ -3037,8 +3037,8 @@
         </p:nvSpPr>
         <p:spPr>
           <a:xfrm>
-            <a:off x="640080" y="2935224"/>
-            <a:ext cx="3657600" cy="475488"/>
+            <a:off x="640080" y="2679192"/>
+            <a:ext cx="4023360" cy="365760"/>
           </a:xfrm>
           <a:prstGeom prst="rect">
             <a:avLst/>
@@ -3076,8 +3076,8 @@
         </p:nvSpPr>
         <p:spPr>
           <a:xfrm>
-            <a:off x="4297680" y="2935224"/>
-            <a:ext cx="2194560" cy="475488"/>
+            <a:off x="4663440" y="2679192"/>
+            <a:ext cx="2011680" cy="365760"/>
           </a:xfrm>
           <a:prstGeom prst="rect">
             <a:avLst/>
@@ -3115,8 +3115,8 @@
         </p:nvSpPr>
         <p:spPr>
           <a:xfrm>
-            <a:off x="6492240" y="2935224"/>
-            <a:ext cx="2194560" cy="475488"/>
+            <a:off x="6675120" y="2679192"/>
+            <a:ext cx="2011680" cy="365760"/>
           </a:xfrm>
           <a:prstGeom prst="rect">
             <a:avLst/>
@@ -3154,8 +3154,8 @@
         </p:nvSpPr>
         <p:spPr>
           <a:xfrm>
-            <a:off x="457200" y="3502152"/>
-            <a:ext cx="8229600" cy="475488"/>
+            <a:off x="457200" y="3118104"/>
+            <a:ext cx="8229600" cy="365760"/>
           </a:xfrm>
           <a:prstGeom prst="roundRect">
             <a:avLst>
@@ -3181,8 +3181,8 @@
         </p:nvSpPr>
         <p:spPr>
           <a:xfrm>
-            <a:off x="640080" y="3502152"/>
-            <a:ext cx="3657600" cy="475488"/>
+            <a:off x="640080" y="3118104"/>
+            <a:ext cx="4023360" cy="365760"/>
           </a:xfrm>
           <a:prstGeom prst="rect">
             <a:avLst/>
@@ -3220,8 +3220,8 @@
         </p:nvSpPr>
         <p:spPr>
           <a:xfrm>
-            <a:off x="4297680" y="3502152"/>
-            <a:ext cx="2194560" cy="475488"/>
+            <a:off x="4663440" y="3118104"/>
+            <a:ext cx="2011680" cy="365760"/>
           </a:xfrm>
           <a:prstGeom prst="rect">
             <a:avLst/>
@@ -3259,8 +3259,8 @@
         </p:nvSpPr>
         <p:spPr>
           <a:xfrm>
-            <a:off x="6492240" y="3502152"/>
-            <a:ext cx="2194560" cy="475488"/>
+            <a:off x="6675120" y="3118104"/>
+            <a:ext cx="2011680" cy="365760"/>
           </a:xfrm>
           <a:prstGeom prst="rect">
             <a:avLst/>
@@ -3513,8 +3513,8 @@
         </p:nvSpPr>
         <p:spPr>
           <a:xfrm>
-            <a:off x="4297680" y="1417320"/>
-            <a:ext cx="2194560" cy="320040"/>
+            <a:off x="4663440" y="1417320"/>
+            <a:ext cx="2011680" cy="320040"/>
           </a:xfrm>
           <a:prstGeom prst="rect">
             <a:avLst/>
@@ -3552,8 +3552,8 @@
         </p:nvSpPr>
         <p:spPr>
           <a:xfrm>
-            <a:off x="6492240" y="1417320"/>
-            <a:ext cx="2194560" cy="320040"/>
+            <a:off x="6675120" y="1417320"/>
+            <a:ext cx="2011680" cy="320040"/>
           </a:xfrm>
           <a:prstGeom prst="rect">
             <a:avLst/>
@@ -3592,7 +3592,7 @@
         <p:spPr>
           <a:xfrm>
             <a:off x="457200" y="1801368"/>
-            <a:ext cx="8229600" cy="475488"/>
+            <a:ext cx="8229600" cy="365760"/>
           </a:xfrm>
           <a:prstGeom prst="roundRect">
             <a:avLst>
@@ -3619,7 +3619,7 @@
         <p:spPr>
           <a:xfrm>
             <a:off x="640080" y="1801368"/>
-            <a:ext cx="3657600" cy="475488"/>
+            <a:ext cx="4023360" cy="365760"/>
           </a:xfrm>
           <a:prstGeom prst="rect">
             <a:avLst/>
@@ -3657,8 +3657,8 @@
         </p:nvSpPr>
         <p:spPr>
           <a:xfrm>
-            <a:off x="4297680" y="1801368"/>
-            <a:ext cx="2194560" cy="475488"/>
+            <a:off x="4663440" y="1801368"/>
+            <a:ext cx="2011680" cy="365760"/>
           </a:xfrm>
           <a:prstGeom prst="rect">
             <a:avLst/>
@@ -3696,8 +3696,8 @@
         </p:nvSpPr>
         <p:spPr>
           <a:xfrm>
-            <a:off x="6492240" y="1801368"/>
-            <a:ext cx="2194560" cy="475488"/>
+            <a:off x="6675120" y="1801368"/>
+            <a:ext cx="2011680" cy="365760"/>
           </a:xfrm>
           <a:prstGeom prst="rect">
             <a:avLst/>
@@ -3735,8 +3735,8 @@
         </p:nvSpPr>
         <p:spPr>
           <a:xfrm>
-            <a:off x="457200" y="2368296"/>
-            <a:ext cx="8229600" cy="475488"/>
+            <a:off x="457200" y="2240280"/>
+            <a:ext cx="8229600" cy="365760"/>
           </a:xfrm>
           <a:prstGeom prst="roundRect">
             <a:avLst>
@@ -3762,8 +3762,8 @@
         </p:nvSpPr>
         <p:spPr>
           <a:xfrm>
-            <a:off x="640080" y="2368296"/>
-            <a:ext cx="3657600" cy="475488"/>
+            <a:off x="640080" y="2240280"/>
+            <a:ext cx="4023360" cy="365760"/>
           </a:xfrm>
           <a:prstGeom prst="rect">
             <a:avLst/>
@@ -3801,8 +3801,8 @@
         </p:nvSpPr>
         <p:spPr>
           <a:xfrm>
-            <a:off x="4297680" y="2368296"/>
-            <a:ext cx="2194560" cy="475488"/>
+            <a:off x="4663440" y="2240280"/>
+            <a:ext cx="2011680" cy="365760"/>
           </a:xfrm>
           <a:prstGeom prst="rect">
             <a:avLst/>
@@ -3840,8 +3840,8 @@
         </p:nvSpPr>
         <p:spPr>
           <a:xfrm>
-            <a:off x="6492240" y="2368296"/>
-            <a:ext cx="2194560" cy="475488"/>
+            <a:off x="6675120" y="2240280"/>
+            <a:ext cx="2011680" cy="365760"/>
           </a:xfrm>
           <a:prstGeom prst="rect">
             <a:avLst/>
@@ -3879,8 +3879,8 @@
         </p:nvSpPr>
         <p:spPr>
           <a:xfrm>
-            <a:off x="457200" y="2935224"/>
-            <a:ext cx="8229600" cy="475488"/>
+            <a:off x="457200" y="2679192"/>
+            <a:ext cx="8229600" cy="365760"/>
           </a:xfrm>
           <a:prstGeom prst="roundRect">
             <a:avLst>
@@ -3906,8 +3906,8 @@
         </p:nvSpPr>
         <p:spPr>
           <a:xfrm>
-            <a:off x="640080" y="2935224"/>
-            <a:ext cx="3657600" cy="475488"/>
+            <a:off x="640080" y="2679192"/>
+            <a:ext cx="4023360" cy="365760"/>
           </a:xfrm>
           <a:prstGeom prst="rect">
             <a:avLst/>
@@ -3945,8 +3945,8 @@
         </p:nvSpPr>
         <p:spPr>
           <a:xfrm>
-            <a:off x="4297680" y="2935224"/>
-            <a:ext cx="2194560" cy="475488"/>
+            <a:off x="4663440" y="2679192"/>
+            <a:ext cx="2011680" cy="365760"/>
           </a:xfrm>
           <a:prstGeom prst="rect">
             <a:avLst/>
@@ -3984,8 +3984,8 @@
         </p:nvSpPr>
         <p:spPr>
           <a:xfrm>
-            <a:off x="6492240" y="2935224"/>
-            <a:ext cx="2194560" cy="475488"/>
+            <a:off x="6675120" y="2679192"/>
+            <a:ext cx="2011680" cy="365760"/>
           </a:xfrm>
           <a:prstGeom prst="rect">
             <a:avLst/>
@@ -4023,8 +4023,8 @@
         </p:nvSpPr>
         <p:spPr>
           <a:xfrm>
-            <a:off x="457200" y="3502152"/>
-            <a:ext cx="8229600" cy="475488"/>
+            <a:off x="457200" y="3118104"/>
+            <a:ext cx="8229600" cy="365760"/>
           </a:xfrm>
           <a:prstGeom prst="roundRect">
             <a:avLst>
@@ -4050,8 +4050,8 @@
         </p:nvSpPr>
         <p:spPr>
           <a:xfrm>
-            <a:off x="640080" y="3502152"/>
-            <a:ext cx="3657600" cy="475488"/>
+            <a:off x="640080" y="3118104"/>
+            <a:ext cx="4023360" cy="365760"/>
           </a:xfrm>
           <a:prstGeom prst="rect">
             <a:avLst/>
@@ -4089,8 +4089,8 @@
         </p:nvSpPr>
         <p:spPr>
           <a:xfrm>
-            <a:off x="4297680" y="3502152"/>
-            <a:ext cx="2194560" cy="475488"/>
+            <a:off x="4663440" y="3118104"/>
+            <a:ext cx="2011680" cy="365760"/>
           </a:xfrm>
           <a:prstGeom prst="rect">
             <a:avLst/>
@@ -4128,8 +4128,8 @@
         </p:nvSpPr>
         <p:spPr>
           <a:xfrm>
-            <a:off x="6492240" y="3502152"/>
-            <a:ext cx="2194560" cy="475488"/>
+            <a:off x="6675120" y="3118104"/>
+            <a:ext cx="2011680" cy="365760"/>
           </a:xfrm>
           <a:prstGeom prst="rect">
             <a:avLst/>
@@ -4383,7 +4383,7 @@
         <p:spPr>
           <a:xfrm>
             <a:off x="457200" y="1371600"/>
-            <a:ext cx="4023360" cy="975272"/>
+            <a:ext cx="4023360" cy="822960"/>
           </a:xfrm>
           <a:prstGeom prst="roundRect">
             <a:avLst>
@@ -4409,8 +4409,8 @@
         </p:nvSpPr>
         <p:spPr>
           <a:xfrm>
-            <a:off x="640080" y="1530052"/>
-            <a:ext cx="3703320" cy="310896"/>
+            <a:off x="640080" y="1444752"/>
+            <a:ext cx="3703320" cy="274320"/>
           </a:xfrm>
           <a:prstGeom prst="rect">
             <a:avLst/>
@@ -4448,7 +4448,7 @@
         </p:nvSpPr>
         <p:spPr>
           <a:xfrm>
-            <a:off x="640080" y="1840948"/>
+            <a:off x="640080" y="1719072"/>
             <a:ext cx="3657600" cy="347472"/>
           </a:xfrm>
           <a:prstGeom prst="rect">
@@ -4473,7 +4473,7 @@
                 <a:ea typeface="Inter" pitchFamily="34" charset="-122"/>
                 <a:cs typeface="Inter" pitchFamily="34" charset="-120"/>
               </a:rPr>
-              <a:t>Several are shorter versions of today’s lates.</a:t>
+              <a:t>Several of them are shorter versions of the lates you already work today.</a:t>
             </a:r>
             <a:endParaRPr lang="en-US" sz="1250" dirty="0"/>
           </a:p>
@@ -4488,7 +4488,7 @@
         <p:spPr>
           <a:xfrm>
             <a:off x="4663440" y="1371600"/>
-            <a:ext cx="4023360" cy="975272"/>
+            <a:ext cx="4023360" cy="822960"/>
           </a:xfrm>
           <a:prstGeom prst="roundRect">
             <a:avLst>
@@ -4514,8 +4514,8 @@
         </p:nvSpPr>
         <p:spPr>
           <a:xfrm>
-            <a:off x="4846320" y="1530052"/>
-            <a:ext cx="3703320" cy="310896"/>
+            <a:off x="4846320" y="1444752"/>
+            <a:ext cx="3703320" cy="274320"/>
           </a:xfrm>
           <a:prstGeom prst="rect">
             <a:avLst/>
@@ -4553,7 +4553,7 @@
         </p:nvSpPr>
         <p:spPr>
           <a:xfrm>
-            <a:off x="4846320" y="1840948"/>
+            <a:off x="4846320" y="1719072"/>
             <a:ext cx="3657600" cy="347472"/>
           </a:xfrm>
           <a:prstGeom prst="rect">
@@ -4578,7 +4578,7 @@
                 <a:ea typeface="Inter" pitchFamily="34" charset="-122"/>
                 <a:cs typeface="Inter" pitchFamily="34" charset="-120"/>
               </a:rPr>
-              <a:t>It keeps days at work to 219 a year or fewer.</a:t>
+              <a:t>That is what keeps days at work to 219 a year or fewer on the same 35 hours.</a:t>
             </a:r>
             <a:endParaRPr lang="en-US" sz="1250" dirty="0"/>
           </a:p>
@@ -4592,8 +4592,8 @@
         </p:nvSpPr>
         <p:spPr>
           <a:xfrm>
-            <a:off x="457200" y="2456600"/>
-            <a:ext cx="4023360" cy="975272"/>
+            <a:off x="457200" y="2267712"/>
+            <a:ext cx="4023360" cy="822960"/>
           </a:xfrm>
           <a:prstGeom prst="roundRect">
             <a:avLst>
@@ -4619,8 +4619,8 @@
         </p:nvSpPr>
         <p:spPr>
           <a:xfrm>
-            <a:off x="640080" y="2615052"/>
-            <a:ext cx="3703320" cy="310896"/>
+            <a:off x="640080" y="2340864"/>
+            <a:ext cx="3703320" cy="274320"/>
           </a:xfrm>
           <a:prstGeom prst="rect">
             <a:avLst/>
@@ -4658,7 +4658,7 @@
         </p:nvSpPr>
         <p:spPr>
           <a:xfrm>
-            <a:off x="640080" y="2925948"/>
+            <a:off x="640080" y="2615184"/>
             <a:ext cx="3657600" cy="347472"/>
           </a:xfrm>
           <a:prstGeom prst="rect">
@@ -4697,8 +4697,8 @@
         </p:nvSpPr>
         <p:spPr>
           <a:xfrm>
-            <a:off x="4663440" y="2456600"/>
-            <a:ext cx="4023360" cy="975272"/>
+            <a:off x="4663440" y="2267712"/>
+            <a:ext cx="4023360" cy="822960"/>
           </a:xfrm>
           <a:prstGeom prst="roundRect">
             <a:avLst>
@@ -4724,8 +4724,8 @@
         </p:nvSpPr>
         <p:spPr>
           <a:xfrm>
-            <a:off x="4846320" y="2615052"/>
-            <a:ext cx="3703320" cy="310896"/>
+            <a:off x="4846320" y="2340864"/>
+            <a:ext cx="3703320" cy="274320"/>
           </a:xfrm>
           <a:prstGeom prst="rect">
             <a:avLst/>
@@ -4763,7 +4763,7 @@
         </p:nvSpPr>
         <p:spPr>
           <a:xfrm>
-            <a:off x="4846320" y="2925948"/>
+            <a:off x="4846320" y="2615184"/>
             <a:ext cx="3657600" cy="347472"/>
           </a:xfrm>
           <a:prstGeom prst="rect">
@@ -4802,8 +4802,8 @@
         </p:nvSpPr>
         <p:spPr>
           <a:xfrm>
-            <a:off x="457200" y="3541600"/>
-            <a:ext cx="4023360" cy="975272"/>
+            <a:off x="457200" y="3163824"/>
+            <a:ext cx="4023360" cy="822960"/>
           </a:xfrm>
           <a:prstGeom prst="roundRect">
             <a:avLst>
@@ -4829,8 +4829,8 @@
         </p:nvSpPr>
         <p:spPr>
           <a:xfrm>
-            <a:off x="640080" y="3700052"/>
-            <a:ext cx="3703320" cy="310896"/>
+            <a:off x="640080" y="3236976"/>
+            <a:ext cx="3703320" cy="274320"/>
           </a:xfrm>
           <a:prstGeom prst="rect">
             <a:avLst/>
@@ -4868,7 +4868,7 @@
         </p:nvSpPr>
         <p:spPr>
           <a:xfrm>
-            <a:off x="640080" y="4010948"/>
+            <a:off x="640080" y="3511296"/>
             <a:ext cx="3657600" cy="347472"/>
           </a:xfrm>
           <a:prstGeom prst="rect">
@@ -4907,8 +4907,8 @@
         </p:nvSpPr>
         <p:spPr>
           <a:xfrm>
-            <a:off x="4663440" y="3541600"/>
-            <a:ext cx="4023360" cy="975272"/>
+            <a:off x="4663440" y="3163824"/>
+            <a:ext cx="4023360" cy="822960"/>
           </a:xfrm>
           <a:prstGeom prst="roundRect">
             <a:avLst>
@@ -4934,8 +4934,8 @@
         </p:nvSpPr>
         <p:spPr>
           <a:xfrm>
-            <a:off x="4846320" y="3700052"/>
-            <a:ext cx="3703320" cy="310896"/>
+            <a:off x="4846320" y="3236976"/>
+            <a:ext cx="3703320" cy="274320"/>
           </a:xfrm>
           <a:prstGeom prst="rect">
             <a:avLst/>
@@ -4973,7 +4973,7 @@
         </p:nvSpPr>
         <p:spPr>
           <a:xfrm>
-            <a:off x="4846320" y="4010948"/>
+            <a:off x="4846320" y="3511296"/>
             <a:ext cx="3657600" cy="347472"/>
           </a:xfrm>
           <a:prstGeom prst="rect">
@@ -5001,6 +5001,70 @@
               <a:t>Your views count before a link is chosen, and who goes on which line is not decided.</a:t>
             </a:r>
             <a:endParaRPr lang="en-US" sz="1250" dirty="0"/>
+          </a:p>
+        </p:txBody>
+      </p:sp>
+      <p:sp>
+        <p:nvSpPr>
+          <p:cNvPr id="23" name="Banner"/>
+          <p:cNvSpPr/>
+          <p:nvPr/>
+        </p:nvSpPr>
+        <p:spPr>
+          <a:xfrm>
+            <a:off x="457200" y="4160520"/>
+            <a:ext cx="8229600" cy="548640"/>
+          </a:xfrm>
+          <a:prstGeom prst="roundRect">
+            <a:avLst>
+              <a:gd name="adj" fmla="val 16667"/>
+            </a:avLst>
+          </a:prstGeom>
+          <a:solidFill>
+            <a:srgbClr val="001E3C"/>
+          </a:solidFill>
+          <a:ln w="12700">
+            <a:solidFill>
+              <a:srgbClr val="001E3C"/>
+            </a:solidFill>
+            <a:prstDash val="solid"/>
+          </a:ln>
+        </p:spPr>
+      </p:sp>
+      <p:sp>
+        <p:nvSpPr>
+          <p:cNvPr id="24" name="Banner text"/>
+          <p:cNvSpPr txBox="1"/>
+          <p:nvPr/>
+        </p:nvSpPr>
+        <p:spPr>
+          <a:xfrm>
+            <a:off x="640080" y="4160520"/>
+            <a:ext cx="7863840" cy="548640"/>
+          </a:xfrm>
+          <a:prstGeom prst="rect">
+            <a:avLst/>
+          </a:prstGeom>
+          <a:noFill/>
+        </p:spPr>
+        <p:txBody>
+          <a:bodyPr wrap="square" lIns="0" tIns="0" rIns="0" bIns="0" rtlCol="0" anchor="ctr"/>
+          <a:lstStyle/>
+          <a:p>
+            <a:pPr indent="0" marL="0">
+              <a:buNone/>
+            </a:pPr>
+            <a:r>
+              <a:rPr lang="en-US" sz="1400" b="1" dirty="0">
+                <a:solidFill>
+                  <a:srgbClr val="FFFFFF"/>
+                </a:solidFill>
+                <a:latin typeface="Inter" pitchFamily="34" charset="0"/>
+                <a:ea typeface="Inter" pitchFamily="34" charset="-122"/>
+                <a:cs typeface="Inter" pitchFamily="34" charset="-120"/>
+              </a:rPr>
+              <a:t>None of these is hidden: each one is on the full proposal sheet too.</a:t>
+            </a:r>
           </a:p>
         </p:txBody>
       </p:sp>
@@ -5196,26 +5260,14 @@
                       </a:endParaRPr>
                     </a:p>
                   </a:txBody>
-                  <a:tcPr marL="91440" marR="91440" marT="0" marB="0" anchor="ctr">
-                    <a:lnL w="9525" cap="flat" cmpd="sng" algn="ctr">
-                      <a:solidFill>
-                        <a:srgbClr val="DDE3EA"/>
-                      </a:solidFill>
-                      <a:prstDash val="solid"/>
-                      <a:round/>
-                      <a:headEnd type="none" w="med" len="med"/>
-                      <a:tailEnd type="none" w="med" len="med"/>
+                  <a:tcPr marL="182880" marR="91440" marT="0" marB="0" anchor="ctr">
+                    <a:lnL>
+                      <a:noFill/>
                     </a:lnL>
-                    <a:lnR w="9525" cap="flat" cmpd="sng" algn="ctr">
-                      <a:solidFill>
-                        <a:srgbClr val="DDE3EA"/>
-                      </a:solidFill>
-                      <a:prstDash val="solid"/>
-                      <a:round/>
-                      <a:headEnd type="none" w="med" len="med"/>
-                      <a:tailEnd type="none" w="med" len="med"/>
+                    <a:lnR>
+                      <a:noFill/>
                     </a:lnR>
-                    <a:lnT w="9525" cap="flat" cmpd="sng" algn="ctr">
+                    <a:lnT w="6350" cap="flat" cmpd="sng" algn="ctr">
                       <a:solidFill>
                         <a:srgbClr val="DDE3EA"/>
                       </a:solidFill>
@@ -5224,7 +5276,7 @@
                       <a:headEnd type="none" w="med" len="med"/>
                       <a:tailEnd type="none" w="med" len="med"/>
                     </a:lnT>
-                    <a:lnB w="9525" cap="flat" cmpd="sng" algn="ctr">
+                    <a:lnB w="6350" cap="flat" cmpd="sng" algn="ctr">
                       <a:solidFill>
                         <a:srgbClr val="DDE3EA"/>
                       </a:solidFill>
@@ -5265,25 +5317,13 @@
                     </a:p>
                   </a:txBody>
                   <a:tcPr marL="91440" marR="91440" marT="0" marB="0" anchor="ctr">
-                    <a:lnL w="9525" cap="flat" cmpd="sng" algn="ctr">
-                      <a:solidFill>
-                        <a:srgbClr val="DDE3EA"/>
-                      </a:solidFill>
-                      <a:prstDash val="solid"/>
-                      <a:round/>
-                      <a:headEnd type="none" w="med" len="med"/>
-                      <a:tailEnd type="none" w="med" len="med"/>
+                    <a:lnL>
+                      <a:noFill/>
                     </a:lnL>
-                    <a:lnR w="9525" cap="flat" cmpd="sng" algn="ctr">
-                      <a:solidFill>
-                        <a:srgbClr val="DDE3EA"/>
-                      </a:solidFill>
-                      <a:prstDash val="solid"/>
-                      <a:round/>
-                      <a:headEnd type="none" w="med" len="med"/>
-                      <a:tailEnd type="none" w="med" len="med"/>
+                    <a:lnR>
+                      <a:noFill/>
                     </a:lnR>
-                    <a:lnT w="9525" cap="flat" cmpd="sng" algn="ctr">
+                    <a:lnT w="6350" cap="flat" cmpd="sng" algn="ctr">
                       <a:solidFill>
                         <a:srgbClr val="DDE3EA"/>
                       </a:solidFill>
@@ -5292,7 +5332,7 @@
                       <a:headEnd type="none" w="med" len="med"/>
                       <a:tailEnd type="none" w="med" len="med"/>
                     </a:lnT>
-                    <a:lnB w="9525" cap="flat" cmpd="sng" algn="ctr">
+                    <a:lnB w="6350" cap="flat" cmpd="sng" algn="ctr">
                       <a:solidFill>
                         <a:srgbClr val="DDE3EA"/>
                       </a:solidFill>
@@ -5333,25 +5373,13 @@
                     </a:p>
                   </a:txBody>
                   <a:tcPr marL="91440" marR="91440" marT="0" marB="0" anchor="ctr">
-                    <a:lnL w="9525" cap="flat" cmpd="sng" algn="ctr">
-                      <a:solidFill>
-                        <a:srgbClr val="DDE3EA"/>
-                      </a:solidFill>
-                      <a:prstDash val="solid"/>
-                      <a:round/>
-                      <a:headEnd type="none" w="med" len="med"/>
-                      <a:tailEnd type="none" w="med" len="med"/>
+                    <a:lnL>
+                      <a:noFill/>
                     </a:lnL>
-                    <a:lnR w="9525" cap="flat" cmpd="sng" algn="ctr">
-                      <a:solidFill>
-                        <a:srgbClr val="DDE3EA"/>
-                      </a:solidFill>
-                      <a:prstDash val="solid"/>
-                      <a:round/>
-                      <a:headEnd type="none" w="med" len="med"/>
-                      <a:tailEnd type="none" w="med" len="med"/>
+                    <a:lnR>
+                      <a:noFill/>
                     </a:lnR>
-                    <a:lnT w="9525" cap="flat" cmpd="sng" algn="ctr">
+                    <a:lnT w="6350" cap="flat" cmpd="sng" algn="ctr">
                       <a:solidFill>
                         <a:srgbClr val="DDE3EA"/>
                       </a:solidFill>
@@ -5360,7 +5388,7 @@
                       <a:headEnd type="none" w="med" len="med"/>
                       <a:tailEnd type="none" w="med" len="med"/>
                     </a:lnT>
-                    <a:lnB w="9525" cap="flat" cmpd="sng" algn="ctr">
+                    <a:lnB w="6350" cap="flat" cmpd="sng" algn="ctr">
                       <a:solidFill>
                         <a:srgbClr val="DDE3EA"/>
                       </a:solidFill>
@@ -5402,26 +5430,14 @@
                       </a:endParaRPr>
                     </a:p>
                   </a:txBody>
-                  <a:tcPr marL="91440" marR="91440" marT="0" marB="0" anchor="ctr">
-                    <a:lnL w="9525" cap="flat" cmpd="sng" algn="ctr">
-                      <a:solidFill>
-                        <a:srgbClr val="DDE3EA"/>
-                      </a:solidFill>
-                      <a:prstDash val="solid"/>
-                      <a:round/>
-                      <a:headEnd type="none" w="med" len="med"/>
-                      <a:tailEnd type="none" w="med" len="med"/>
+                  <a:tcPr marL="182880" marR="91440" marT="0" marB="0" anchor="ctr">
+                    <a:lnL>
+                      <a:noFill/>
                     </a:lnL>
-                    <a:lnR w="9525" cap="flat" cmpd="sng" algn="ctr">
-                      <a:solidFill>
-                        <a:srgbClr val="DDE3EA"/>
-                      </a:solidFill>
-                      <a:prstDash val="solid"/>
-                      <a:round/>
-                      <a:headEnd type="none" w="med" len="med"/>
-                      <a:tailEnd type="none" w="med" len="med"/>
+                    <a:lnR>
+                      <a:noFill/>
                     </a:lnR>
-                    <a:lnT w="9525" cap="flat" cmpd="sng" algn="ctr">
+                    <a:lnT w="6350" cap="flat" cmpd="sng" algn="ctr">
                       <a:solidFill>
                         <a:srgbClr val="DDE3EA"/>
                       </a:solidFill>
@@ -5430,7 +5446,7 @@
                       <a:headEnd type="none" w="med" len="med"/>
                       <a:tailEnd type="none" w="med" len="med"/>
                     </a:lnT>
-                    <a:lnB w="9525" cap="flat" cmpd="sng" algn="ctr">
+                    <a:lnB w="6350" cap="flat" cmpd="sng" algn="ctr">
                       <a:solidFill>
                         <a:srgbClr val="DDE3EA"/>
                       </a:solidFill>
@@ -5471,25 +5487,13 @@
                     </a:p>
                   </a:txBody>
                   <a:tcPr marL="91440" marR="91440" marT="0" marB="0" anchor="ctr">
-                    <a:lnL w="9525" cap="flat" cmpd="sng" algn="ctr">
-                      <a:solidFill>
-                        <a:srgbClr val="DDE3EA"/>
-                      </a:solidFill>
-                      <a:prstDash val="solid"/>
-                      <a:round/>
-                      <a:headEnd type="none" w="med" len="med"/>
-                      <a:tailEnd type="none" w="med" len="med"/>
+                    <a:lnL>
+                      <a:noFill/>
                     </a:lnL>
-                    <a:lnR w="9525" cap="flat" cmpd="sng" algn="ctr">
-                      <a:solidFill>
-                        <a:srgbClr val="DDE3EA"/>
-                      </a:solidFill>
-                      <a:prstDash val="solid"/>
-                      <a:round/>
-                      <a:headEnd type="none" w="med" len="med"/>
-                      <a:tailEnd type="none" w="med" len="med"/>
+                    <a:lnR>
+                      <a:noFill/>
                     </a:lnR>
-                    <a:lnT w="9525" cap="flat" cmpd="sng" algn="ctr">
+                    <a:lnT w="6350" cap="flat" cmpd="sng" algn="ctr">
                       <a:solidFill>
                         <a:srgbClr val="DDE3EA"/>
                       </a:solidFill>
@@ -5498,7 +5502,7 @@
                       <a:headEnd type="none" w="med" len="med"/>
                       <a:tailEnd type="none" w="med" len="med"/>
                     </a:lnT>
-                    <a:lnB w="9525" cap="flat" cmpd="sng" algn="ctr">
+                    <a:lnB w="6350" cap="flat" cmpd="sng" algn="ctr">
                       <a:solidFill>
                         <a:srgbClr val="DDE3EA"/>
                       </a:solidFill>
@@ -5539,25 +5543,13 @@
                     </a:p>
                   </a:txBody>
                   <a:tcPr marL="91440" marR="91440" marT="0" marB="0" anchor="ctr">
-                    <a:lnL w="9525" cap="flat" cmpd="sng" algn="ctr">
-                      <a:solidFill>
-                        <a:srgbClr val="DDE3EA"/>
-                      </a:solidFill>
-                      <a:prstDash val="solid"/>
-                      <a:round/>
-                      <a:headEnd type="none" w="med" len="med"/>
-                      <a:tailEnd type="none" w="med" len="med"/>
+                    <a:lnL>
+                      <a:noFill/>
                     </a:lnL>
-                    <a:lnR w="9525" cap="flat" cmpd="sng" algn="ctr">
-                      <a:solidFill>
-                        <a:srgbClr val="DDE3EA"/>
-                      </a:solidFill>
-                      <a:prstDash val="solid"/>
-                      <a:round/>
-                      <a:headEnd type="none" w="med" len="med"/>
-                      <a:tailEnd type="none" w="med" len="med"/>
+                    <a:lnR>
+                      <a:noFill/>
                     </a:lnR>
-                    <a:lnT w="9525" cap="flat" cmpd="sng" algn="ctr">
+                    <a:lnT w="6350" cap="flat" cmpd="sng" algn="ctr">
                       <a:solidFill>
                         <a:srgbClr val="DDE3EA"/>
                       </a:solidFill>
@@ -5566,7 +5558,7 @@
                       <a:headEnd type="none" w="med" len="med"/>
                       <a:tailEnd type="none" w="med" len="med"/>
                     </a:lnT>
-                    <a:lnB w="9525" cap="flat" cmpd="sng" algn="ctr">
+                    <a:lnB w="6350" cap="flat" cmpd="sng" algn="ctr">
                       <a:solidFill>
                         <a:srgbClr val="DDE3EA"/>
                       </a:solidFill>
@@ -5608,26 +5600,14 @@
                       </a:endParaRPr>
                     </a:p>
                   </a:txBody>
-                  <a:tcPr marL="91440" marR="91440" marT="0" marB="0" anchor="ctr">
-                    <a:lnL w="9525" cap="flat" cmpd="sng" algn="ctr">
-                      <a:solidFill>
-                        <a:srgbClr val="DDE3EA"/>
-                      </a:solidFill>
-                      <a:prstDash val="solid"/>
-                      <a:round/>
-                      <a:headEnd type="none" w="med" len="med"/>
-                      <a:tailEnd type="none" w="med" len="med"/>
+                  <a:tcPr marL="182880" marR="91440" marT="0" marB="0" anchor="ctr">
+                    <a:lnL>
+                      <a:noFill/>
                     </a:lnL>
-                    <a:lnR w="9525" cap="flat" cmpd="sng" algn="ctr">
-                      <a:solidFill>
-                        <a:srgbClr val="DDE3EA"/>
-                      </a:solidFill>
-                      <a:prstDash val="solid"/>
-                      <a:round/>
-                      <a:headEnd type="none" w="med" len="med"/>
-                      <a:tailEnd type="none" w="med" len="med"/>
+                    <a:lnR>
+                      <a:noFill/>
                     </a:lnR>
-                    <a:lnT w="9525" cap="flat" cmpd="sng" algn="ctr">
+                    <a:lnT w="6350" cap="flat" cmpd="sng" algn="ctr">
                       <a:solidFill>
                         <a:srgbClr val="DDE3EA"/>
                       </a:solidFill>
@@ -5636,7 +5616,7 @@
                       <a:headEnd type="none" w="med" len="med"/>
                       <a:tailEnd type="none" w="med" len="med"/>
                     </a:lnT>
-                    <a:lnB w="9525" cap="flat" cmpd="sng" algn="ctr">
+                    <a:lnB w="6350" cap="flat" cmpd="sng" algn="ctr">
                       <a:solidFill>
                         <a:srgbClr val="DDE3EA"/>
                       </a:solidFill>
@@ -5677,25 +5657,13 @@
                     </a:p>
                   </a:txBody>
                   <a:tcPr marL="91440" marR="91440" marT="0" marB="0" anchor="ctr">
-                    <a:lnL w="9525" cap="flat" cmpd="sng" algn="ctr">
-                      <a:solidFill>
-                        <a:srgbClr val="DDE3EA"/>
-                      </a:solidFill>
-                      <a:prstDash val="solid"/>
-                      <a:round/>
-                      <a:headEnd type="none" w="med" len="med"/>
-                      <a:tailEnd type="none" w="med" len="med"/>
+                    <a:lnL>
+                      <a:noFill/>
                     </a:lnL>
-                    <a:lnR w="9525" cap="flat" cmpd="sng" algn="ctr">
-                      <a:solidFill>
-                        <a:srgbClr val="DDE3EA"/>
-                      </a:solidFill>
-                      <a:prstDash val="solid"/>
-                      <a:round/>
-                      <a:headEnd type="none" w="med" len="med"/>
-                      <a:tailEnd type="none" w="med" len="med"/>
+                    <a:lnR>
+                      <a:noFill/>
                     </a:lnR>
-                    <a:lnT w="9525" cap="flat" cmpd="sng" algn="ctr">
+                    <a:lnT w="6350" cap="flat" cmpd="sng" algn="ctr">
                       <a:solidFill>
                         <a:srgbClr val="DDE3EA"/>
                       </a:solidFill>
@@ -5704,7 +5672,7 @@
                       <a:headEnd type="none" w="med" len="med"/>
                       <a:tailEnd type="none" w="med" len="med"/>
                     </a:lnT>
-                    <a:lnB w="9525" cap="flat" cmpd="sng" algn="ctr">
+                    <a:lnB w="6350" cap="flat" cmpd="sng" algn="ctr">
                       <a:solidFill>
                         <a:srgbClr val="DDE3EA"/>
                       </a:solidFill>
@@ -5745,25 +5713,13 @@
                     </a:p>
                   </a:txBody>
                   <a:tcPr marL="91440" marR="91440" marT="0" marB="0" anchor="ctr">
-                    <a:lnL w="9525" cap="flat" cmpd="sng" algn="ctr">
-                      <a:solidFill>
-                        <a:srgbClr val="DDE3EA"/>
-                      </a:solidFill>
-                      <a:prstDash val="solid"/>
-                      <a:round/>
-                      <a:headEnd type="none" w="med" len="med"/>
-                      <a:tailEnd type="none" w="med" len="med"/>
+                    <a:lnL>
+                      <a:noFill/>
                     </a:lnL>
-                    <a:lnR w="9525" cap="flat" cmpd="sng" algn="ctr">
-                      <a:solidFill>
-                        <a:srgbClr val="DDE3EA"/>
-                      </a:solidFill>
-                      <a:prstDash val="solid"/>
-                      <a:round/>
-                      <a:headEnd type="none" w="med" len="med"/>
-                      <a:tailEnd type="none" w="med" len="med"/>
+                    <a:lnR>
+                      <a:noFill/>
                     </a:lnR>
-                    <a:lnT w="9525" cap="flat" cmpd="sng" algn="ctr">
+                    <a:lnT w="6350" cap="flat" cmpd="sng" algn="ctr">
                       <a:solidFill>
                         <a:srgbClr val="DDE3EA"/>
                       </a:solidFill>
@@ -5772,7 +5728,7 @@
                       <a:headEnd type="none" w="med" len="med"/>
                       <a:tailEnd type="none" w="med" len="med"/>
                     </a:lnT>
-                    <a:lnB w="9525" cap="flat" cmpd="sng" algn="ctr">
+                    <a:lnB w="6350" cap="flat" cmpd="sng" algn="ctr">
                       <a:solidFill>
                         <a:srgbClr val="DDE3EA"/>
                       </a:solidFill>
@@ -5814,26 +5770,14 @@
                       </a:endParaRPr>
                     </a:p>
                   </a:txBody>
-                  <a:tcPr marL="91440" marR="91440" marT="0" marB="0" anchor="ctr">
-                    <a:lnL w="9525" cap="flat" cmpd="sng" algn="ctr">
-                      <a:solidFill>
-                        <a:srgbClr val="DDE3EA"/>
-                      </a:solidFill>
-                      <a:prstDash val="solid"/>
-                      <a:round/>
-                      <a:headEnd type="none" w="med" len="med"/>
-                      <a:tailEnd type="none" w="med" len="med"/>
+                  <a:tcPr marL="182880" marR="91440" marT="0" marB="0" anchor="ctr">
+                    <a:lnL>
+                      <a:noFill/>
                     </a:lnL>
-                    <a:lnR w="9525" cap="flat" cmpd="sng" algn="ctr">
-                      <a:solidFill>
-                        <a:srgbClr val="DDE3EA"/>
-                      </a:solidFill>
-                      <a:prstDash val="solid"/>
-                      <a:round/>
-                      <a:headEnd type="none" w="med" len="med"/>
-                      <a:tailEnd type="none" w="med" len="med"/>
+                    <a:lnR>
+                      <a:noFill/>
                     </a:lnR>
-                    <a:lnT w="9525" cap="flat" cmpd="sng" algn="ctr">
+                    <a:lnT w="6350" cap="flat" cmpd="sng" algn="ctr">
                       <a:solidFill>
                         <a:srgbClr val="DDE3EA"/>
                       </a:solidFill>
@@ -5842,7 +5786,7 @@
                       <a:headEnd type="none" w="med" len="med"/>
                       <a:tailEnd type="none" w="med" len="med"/>
                     </a:lnT>
-                    <a:lnB w="9525" cap="flat" cmpd="sng" algn="ctr">
+                    <a:lnB w="6350" cap="flat" cmpd="sng" algn="ctr">
                       <a:solidFill>
                         <a:srgbClr val="DDE3EA"/>
                       </a:solidFill>
@@ -5883,25 +5827,13 @@
                     </a:p>
                   </a:txBody>
                   <a:tcPr marL="91440" marR="91440" marT="0" marB="0" anchor="ctr">
-                    <a:lnL w="9525" cap="flat" cmpd="sng" algn="ctr">
-                      <a:solidFill>
-                        <a:srgbClr val="DDE3EA"/>
-                      </a:solidFill>
-                      <a:prstDash val="solid"/>
-                      <a:round/>
-                      <a:headEnd type="none" w="med" len="med"/>
-                      <a:tailEnd type="none" w="med" len="med"/>
+                    <a:lnL>
+                      <a:noFill/>
                     </a:lnL>
-                    <a:lnR w="9525" cap="flat" cmpd="sng" algn="ctr">
-                      <a:solidFill>
-                        <a:srgbClr val="DDE3EA"/>
-                      </a:solidFill>
-                      <a:prstDash val="solid"/>
-                      <a:round/>
-                      <a:headEnd type="none" w="med" len="med"/>
-                      <a:tailEnd type="none" w="med" len="med"/>
+                    <a:lnR>
+                      <a:noFill/>
                     </a:lnR>
-                    <a:lnT w="9525" cap="flat" cmpd="sng" algn="ctr">
+                    <a:lnT w="6350" cap="flat" cmpd="sng" algn="ctr">
                       <a:solidFill>
                         <a:srgbClr val="DDE3EA"/>
                       </a:solidFill>
@@ -5910,7 +5842,7 @@
                       <a:headEnd type="none" w="med" len="med"/>
                       <a:tailEnd type="none" w="med" len="med"/>
                     </a:lnT>
-                    <a:lnB w="9525" cap="flat" cmpd="sng" algn="ctr">
+                    <a:lnB w="6350" cap="flat" cmpd="sng" algn="ctr">
                       <a:solidFill>
                         <a:srgbClr val="DDE3EA"/>
                       </a:solidFill>
@@ -5951,25 +5883,13 @@
                     </a:p>
                   </a:txBody>
                   <a:tcPr marL="91440" marR="91440" marT="0" marB="0" anchor="ctr">
-                    <a:lnL w="9525" cap="flat" cmpd="sng" algn="ctr">
-                      <a:solidFill>
-                        <a:srgbClr val="DDE3EA"/>
-                      </a:solidFill>
-                      <a:prstDash val="solid"/>
-                      <a:round/>
-                      <a:headEnd type="none" w="med" len="med"/>
-                      <a:tailEnd type="none" w="med" len="med"/>
+                    <a:lnL>
+                      <a:noFill/>
                     </a:lnL>
-                    <a:lnR w="9525" cap="flat" cmpd="sng" algn="ctr">
-                      <a:solidFill>
-                        <a:srgbClr val="DDE3EA"/>
-                      </a:solidFill>
-                      <a:prstDash val="solid"/>
-                      <a:round/>
-                      <a:headEnd type="none" w="med" len="med"/>
-                      <a:tailEnd type="none" w="med" len="med"/>
+                    <a:lnR>
+                      <a:noFill/>
                     </a:lnR>
-                    <a:lnT w="9525" cap="flat" cmpd="sng" algn="ctr">
+                    <a:lnT w="6350" cap="flat" cmpd="sng" algn="ctr">
                       <a:solidFill>
                         <a:srgbClr val="DDE3EA"/>
                       </a:solidFill>
@@ -5978,7 +5898,7 @@
                       <a:headEnd type="none" w="med" len="med"/>
                       <a:tailEnd type="none" w="med" len="med"/>
                     </a:lnT>
-                    <a:lnB w="9525" cap="flat" cmpd="sng" algn="ctr">
+                    <a:lnB w="6350" cap="flat" cmpd="sng" algn="ctr">
                       <a:solidFill>
                         <a:srgbClr val="DDE3EA"/>
                       </a:solidFill>
@@ -6020,26 +5940,14 @@
                       </a:endParaRPr>
                     </a:p>
                   </a:txBody>
-                  <a:tcPr marL="91440" marR="91440" marT="0" marB="0" anchor="ctr">
-                    <a:lnL w="9525" cap="flat" cmpd="sng" algn="ctr">
-                      <a:solidFill>
-                        <a:srgbClr val="DDE3EA"/>
-                      </a:solidFill>
-                      <a:prstDash val="solid"/>
-                      <a:round/>
-                      <a:headEnd type="none" w="med" len="med"/>
-                      <a:tailEnd type="none" w="med" len="med"/>
+                  <a:tcPr marL="182880" marR="91440" marT="0" marB="0" anchor="ctr">
+                    <a:lnL>
+                      <a:noFill/>
                     </a:lnL>
-                    <a:lnR w="9525" cap="flat" cmpd="sng" algn="ctr">
-                      <a:solidFill>
-                        <a:srgbClr val="DDE3EA"/>
-                      </a:solidFill>
-                      <a:prstDash val="solid"/>
-                      <a:round/>
-                      <a:headEnd type="none" w="med" len="med"/>
-                      <a:tailEnd type="none" w="med" len="med"/>
+                    <a:lnR>
+                      <a:noFill/>
                     </a:lnR>
-                    <a:lnT w="9525" cap="flat" cmpd="sng" algn="ctr">
+                    <a:lnT w="6350" cap="flat" cmpd="sng" algn="ctr">
                       <a:solidFill>
                         <a:srgbClr val="DDE3EA"/>
                       </a:solidFill>
@@ -6048,7 +5956,7 @@
                       <a:headEnd type="none" w="med" len="med"/>
                       <a:tailEnd type="none" w="med" len="med"/>
                     </a:lnT>
-                    <a:lnB w="9525" cap="flat" cmpd="sng" algn="ctr">
+                    <a:lnB w="6350" cap="flat" cmpd="sng" algn="ctr">
                       <a:solidFill>
                         <a:srgbClr val="DDE3EA"/>
                       </a:solidFill>
@@ -6089,25 +5997,13 @@
                     </a:p>
                   </a:txBody>
                   <a:tcPr marL="91440" marR="91440" marT="0" marB="0" anchor="ctr">
-                    <a:lnL w="9525" cap="flat" cmpd="sng" algn="ctr">
-                      <a:solidFill>
-                        <a:srgbClr val="DDE3EA"/>
-                      </a:solidFill>
-                      <a:prstDash val="solid"/>
-                      <a:round/>
-                      <a:headEnd type="none" w="med" len="med"/>
-                      <a:tailEnd type="none" w="med" len="med"/>
+                    <a:lnL>
+                      <a:noFill/>
                     </a:lnL>
-                    <a:lnR w="9525" cap="flat" cmpd="sng" algn="ctr">
-                      <a:solidFill>
-                        <a:srgbClr val="DDE3EA"/>
-                      </a:solidFill>
-                      <a:prstDash val="solid"/>
-                      <a:round/>
-                      <a:headEnd type="none" w="med" len="med"/>
-                      <a:tailEnd type="none" w="med" len="med"/>
+                    <a:lnR>
+                      <a:noFill/>
                     </a:lnR>
-                    <a:lnT w="9525" cap="flat" cmpd="sng" algn="ctr">
+                    <a:lnT w="6350" cap="flat" cmpd="sng" algn="ctr">
                       <a:solidFill>
                         <a:srgbClr val="DDE3EA"/>
                       </a:solidFill>
@@ -6116,7 +6012,7 @@
                       <a:headEnd type="none" w="med" len="med"/>
                       <a:tailEnd type="none" w="med" len="med"/>
                     </a:lnT>
-                    <a:lnB w="9525" cap="flat" cmpd="sng" algn="ctr">
+                    <a:lnB w="6350" cap="flat" cmpd="sng" algn="ctr">
                       <a:solidFill>
                         <a:srgbClr val="DDE3EA"/>
                       </a:solidFill>
@@ -6157,25 +6053,13 @@
                     </a:p>
                   </a:txBody>
                   <a:tcPr marL="91440" marR="91440" marT="0" marB="0" anchor="ctr">
-                    <a:lnL w="9525" cap="flat" cmpd="sng" algn="ctr">
-                      <a:solidFill>
-                        <a:srgbClr val="DDE3EA"/>
-                      </a:solidFill>
-                      <a:prstDash val="solid"/>
-                      <a:round/>
-                      <a:headEnd type="none" w="med" len="med"/>
-                      <a:tailEnd type="none" w="med" len="med"/>
+                    <a:lnL>
+                      <a:noFill/>
                     </a:lnL>
-                    <a:lnR w="9525" cap="flat" cmpd="sng" algn="ctr">
-                      <a:solidFill>
-                        <a:srgbClr val="DDE3EA"/>
-                      </a:solidFill>
-                      <a:prstDash val="solid"/>
-                      <a:round/>
-                      <a:headEnd type="none" w="med" len="med"/>
-                      <a:tailEnd type="none" w="med" len="med"/>
+                    <a:lnR>
+                      <a:noFill/>
                     </a:lnR>
-                    <a:lnT w="9525" cap="flat" cmpd="sng" algn="ctr">
+                    <a:lnT w="6350" cap="flat" cmpd="sng" algn="ctr">
                       <a:solidFill>
                         <a:srgbClr val="DDE3EA"/>
                       </a:solidFill>
@@ -6184,7 +6068,7 @@
                       <a:headEnd type="none" w="med" len="med"/>
                       <a:tailEnd type="none" w="med" len="med"/>
                     </a:lnT>
-                    <a:lnB w="9525" cap="flat" cmpd="sng" algn="ctr">
+                    <a:lnB w="6350" cap="flat" cmpd="sng" algn="ctr">
                       <a:solidFill>
                         <a:srgbClr val="DDE3EA"/>
                       </a:solidFill>
@@ -6226,26 +6110,14 @@
                       </a:endParaRPr>
                     </a:p>
                   </a:txBody>
-                  <a:tcPr marL="91440" marR="91440" marT="0" marB="0" anchor="ctr">
-                    <a:lnL w="9525" cap="flat" cmpd="sng" algn="ctr">
-                      <a:solidFill>
-                        <a:srgbClr val="DDE3EA"/>
-                      </a:solidFill>
-                      <a:prstDash val="solid"/>
-                      <a:round/>
-                      <a:headEnd type="none" w="med" len="med"/>
-                      <a:tailEnd type="none" w="med" len="med"/>
+                  <a:tcPr marL="182880" marR="91440" marT="0" marB="0" anchor="ctr">
+                    <a:lnL>
+                      <a:noFill/>
                     </a:lnL>
-                    <a:lnR w="9525" cap="flat" cmpd="sng" algn="ctr">
-                      <a:solidFill>
-                        <a:srgbClr val="DDE3EA"/>
-                      </a:solidFill>
-                      <a:prstDash val="solid"/>
-                      <a:round/>
-                      <a:headEnd type="none" w="med" len="med"/>
-                      <a:tailEnd type="none" w="med" len="med"/>
+                    <a:lnR>
+                      <a:noFill/>
                     </a:lnR>
-                    <a:lnT w="9525" cap="flat" cmpd="sng" algn="ctr">
+                    <a:lnT w="6350" cap="flat" cmpd="sng" algn="ctr">
                       <a:solidFill>
                         <a:srgbClr val="DDE3EA"/>
                       </a:solidFill>
@@ -6254,7 +6126,7 @@
                       <a:headEnd type="none" w="med" len="med"/>
                       <a:tailEnd type="none" w="med" len="med"/>
                     </a:lnT>
-                    <a:lnB w="9525" cap="flat" cmpd="sng" algn="ctr">
+                    <a:lnB w="6350" cap="flat" cmpd="sng" algn="ctr">
                       <a:solidFill>
                         <a:srgbClr val="DDE3EA"/>
                       </a:solidFill>
@@ -6295,25 +6167,13 @@
                     </a:p>
                   </a:txBody>
                   <a:tcPr marL="91440" marR="91440" marT="0" marB="0" anchor="ctr">
-                    <a:lnL w="9525" cap="flat" cmpd="sng" algn="ctr">
-                      <a:solidFill>
-                        <a:srgbClr val="DDE3EA"/>
-                      </a:solidFill>
-                      <a:prstDash val="solid"/>
-                      <a:round/>
-                      <a:headEnd type="none" w="med" len="med"/>
-                      <a:tailEnd type="none" w="med" len="med"/>
+                    <a:lnL>
+                      <a:noFill/>
                     </a:lnL>
-                    <a:lnR w="9525" cap="flat" cmpd="sng" algn="ctr">
-                      <a:solidFill>
-                        <a:srgbClr val="DDE3EA"/>
-                      </a:solidFill>
-                      <a:prstDash val="solid"/>
-                      <a:round/>
-                      <a:headEnd type="none" w="med" len="med"/>
-                      <a:tailEnd type="none" w="med" len="med"/>
+                    <a:lnR>
+                      <a:noFill/>
                     </a:lnR>
-                    <a:lnT w="9525" cap="flat" cmpd="sng" algn="ctr">
+                    <a:lnT w="6350" cap="flat" cmpd="sng" algn="ctr">
                       <a:solidFill>
                         <a:srgbClr val="DDE3EA"/>
                       </a:solidFill>
@@ -6322,7 +6182,7 @@
                       <a:headEnd type="none" w="med" len="med"/>
                       <a:tailEnd type="none" w="med" len="med"/>
                     </a:lnT>
-                    <a:lnB w="9525" cap="flat" cmpd="sng" algn="ctr">
+                    <a:lnB w="6350" cap="flat" cmpd="sng" algn="ctr">
                       <a:solidFill>
                         <a:srgbClr val="DDE3EA"/>
                       </a:solidFill>
@@ -6363,25 +6223,13 @@
                     </a:p>
                   </a:txBody>
                   <a:tcPr marL="91440" marR="91440" marT="0" marB="0" anchor="ctr">
-                    <a:lnL w="9525" cap="flat" cmpd="sng" algn="ctr">
-                      <a:solidFill>
-                        <a:srgbClr val="DDE3EA"/>
-                      </a:solidFill>
-                      <a:prstDash val="solid"/>
-                      <a:round/>
-                      <a:headEnd type="none" w="med" len="med"/>
-                      <a:tailEnd type="none" w="med" len="med"/>
+                    <a:lnL>
+                      <a:noFill/>
                     </a:lnL>
-                    <a:lnR w="9525" cap="flat" cmpd="sng" algn="ctr">
-                      <a:solidFill>
-                        <a:srgbClr val="DDE3EA"/>
-                      </a:solidFill>
-                      <a:prstDash val="solid"/>
-                      <a:round/>
-                      <a:headEnd type="none" w="med" len="med"/>
-                      <a:tailEnd type="none" w="med" len="med"/>
+                    <a:lnR>
+                      <a:noFill/>
                     </a:lnR>
-                    <a:lnT w="9525" cap="flat" cmpd="sng" algn="ctr">
+                    <a:lnT w="6350" cap="flat" cmpd="sng" algn="ctr">
                       <a:solidFill>
                         <a:srgbClr val="DDE3EA"/>
                       </a:solidFill>
@@ -6390,7 +6238,7 @@
                       <a:headEnd type="none" w="med" len="med"/>
                       <a:tailEnd type="none" w="med" len="med"/>
                     </a:lnT>
-                    <a:lnB w="9525" cap="flat" cmpd="sng" algn="ctr">
+                    <a:lnB w="6350" cap="flat" cmpd="sng" algn="ctr">
                       <a:solidFill>
                         <a:srgbClr val="DDE3EA"/>
                       </a:solidFill>
@@ -6432,26 +6280,14 @@
                       </a:endParaRPr>
                     </a:p>
                   </a:txBody>
-                  <a:tcPr marL="91440" marR="91440" marT="0" marB="0" anchor="ctr">
-                    <a:lnL w="9525" cap="flat" cmpd="sng" algn="ctr">
-                      <a:solidFill>
-                        <a:srgbClr val="DDE3EA"/>
-                      </a:solidFill>
-                      <a:prstDash val="solid"/>
-                      <a:round/>
-                      <a:headEnd type="none" w="med" len="med"/>
-                      <a:tailEnd type="none" w="med" len="med"/>
+                  <a:tcPr marL="182880" marR="91440" marT="0" marB="0" anchor="ctr">
+                    <a:lnL>
+                      <a:noFill/>
                     </a:lnL>
-                    <a:lnR w="9525" cap="flat" cmpd="sng" algn="ctr">
-                      <a:solidFill>
-                        <a:srgbClr val="DDE3EA"/>
-                      </a:solidFill>
-                      <a:prstDash val="solid"/>
-                      <a:round/>
-                      <a:headEnd type="none" w="med" len="med"/>
-                      <a:tailEnd type="none" w="med" len="med"/>
+                    <a:lnR>
+                      <a:noFill/>
                     </a:lnR>
-                    <a:lnT w="9525" cap="flat" cmpd="sng" algn="ctr">
+                    <a:lnT w="6350" cap="flat" cmpd="sng" algn="ctr">
                       <a:solidFill>
                         <a:srgbClr val="DDE3EA"/>
                       </a:solidFill>
@@ -6460,7 +6296,7 @@
                       <a:headEnd type="none" w="med" len="med"/>
                       <a:tailEnd type="none" w="med" len="med"/>
                     </a:lnT>
-                    <a:lnB w="9525" cap="flat" cmpd="sng" algn="ctr">
+                    <a:lnB w="6350" cap="flat" cmpd="sng" algn="ctr">
                       <a:solidFill>
                         <a:srgbClr val="DDE3EA"/>
                       </a:solidFill>
@@ -6501,25 +6337,13 @@
                     </a:p>
                   </a:txBody>
                   <a:tcPr marL="91440" marR="91440" marT="0" marB="0" anchor="ctr">
-                    <a:lnL w="9525" cap="flat" cmpd="sng" algn="ctr">
-                      <a:solidFill>
-                        <a:srgbClr val="DDE3EA"/>
-                      </a:solidFill>
-                      <a:prstDash val="solid"/>
-                      <a:round/>
-                      <a:headEnd type="none" w="med" len="med"/>
-                      <a:tailEnd type="none" w="med" len="med"/>
+                    <a:lnL>
+                      <a:noFill/>
                     </a:lnL>
-                    <a:lnR w="9525" cap="flat" cmpd="sng" algn="ctr">
-                      <a:solidFill>
-                        <a:srgbClr val="DDE3EA"/>
-                      </a:solidFill>
-                      <a:prstDash val="solid"/>
-                      <a:round/>
-                      <a:headEnd type="none" w="med" len="med"/>
-                      <a:tailEnd type="none" w="med" len="med"/>
+                    <a:lnR>
+                      <a:noFill/>
                     </a:lnR>
-                    <a:lnT w="9525" cap="flat" cmpd="sng" algn="ctr">
+                    <a:lnT w="6350" cap="flat" cmpd="sng" algn="ctr">
                       <a:solidFill>
                         <a:srgbClr val="DDE3EA"/>
                       </a:solidFill>
@@ -6528,7 +6352,7 @@
                       <a:headEnd type="none" w="med" len="med"/>
                       <a:tailEnd type="none" w="med" len="med"/>
                     </a:lnT>
-                    <a:lnB w="9525" cap="flat" cmpd="sng" algn="ctr">
+                    <a:lnB w="6350" cap="flat" cmpd="sng" algn="ctr">
                       <a:solidFill>
                         <a:srgbClr val="DDE3EA"/>
                       </a:solidFill>
@@ -6569,25 +6393,13 @@
                     </a:p>
                   </a:txBody>
                   <a:tcPr marL="91440" marR="91440" marT="0" marB="0" anchor="ctr">
-                    <a:lnL w="9525" cap="flat" cmpd="sng" algn="ctr">
-                      <a:solidFill>
-                        <a:srgbClr val="DDE3EA"/>
-                      </a:solidFill>
-                      <a:prstDash val="solid"/>
-                      <a:round/>
-                      <a:headEnd type="none" w="med" len="med"/>
-                      <a:tailEnd type="none" w="med" len="med"/>
+                    <a:lnL>
+                      <a:noFill/>
                     </a:lnL>
-                    <a:lnR w="9525" cap="flat" cmpd="sng" algn="ctr">
-                      <a:solidFill>
-                        <a:srgbClr val="DDE3EA"/>
-                      </a:solidFill>
-                      <a:prstDash val="solid"/>
-                      <a:round/>
-                      <a:headEnd type="none" w="med" len="med"/>
-                      <a:tailEnd type="none" w="med" len="med"/>
+                    <a:lnR>
+                      <a:noFill/>
                     </a:lnR>
-                    <a:lnT w="9525" cap="flat" cmpd="sng" algn="ctr">
+                    <a:lnT w="6350" cap="flat" cmpd="sng" algn="ctr">
                       <a:solidFill>
                         <a:srgbClr val="DDE3EA"/>
                       </a:solidFill>
@@ -6596,7 +6408,7 @@
                       <a:headEnd type="none" w="med" len="med"/>
                       <a:tailEnd type="none" w="med" len="med"/>
                     </a:lnT>
-                    <a:lnB w="9525" cap="flat" cmpd="sng" algn="ctr">
+                    <a:lnB w="6350" cap="flat" cmpd="sng" algn="ctr">
                       <a:solidFill>
                         <a:srgbClr val="DDE3EA"/>
                       </a:solidFill>
@@ -6638,26 +6450,14 @@
                       </a:endParaRPr>
                     </a:p>
                   </a:txBody>
-                  <a:tcPr marL="91440" marR="91440" marT="0" marB="0" anchor="ctr">
-                    <a:lnL w="9525" cap="flat" cmpd="sng" algn="ctr">
-                      <a:solidFill>
-                        <a:srgbClr val="DDE3EA"/>
-                      </a:solidFill>
-                      <a:prstDash val="solid"/>
-                      <a:round/>
-                      <a:headEnd type="none" w="med" len="med"/>
-                      <a:tailEnd type="none" w="med" len="med"/>
+                  <a:tcPr marL="182880" marR="91440" marT="0" marB="0" anchor="ctr">
+                    <a:lnL>
+                      <a:noFill/>
                     </a:lnL>
-                    <a:lnR w="9525" cap="flat" cmpd="sng" algn="ctr">
-                      <a:solidFill>
-                        <a:srgbClr val="DDE3EA"/>
-                      </a:solidFill>
-                      <a:prstDash val="solid"/>
-                      <a:round/>
-                      <a:headEnd type="none" w="med" len="med"/>
-                      <a:tailEnd type="none" w="med" len="med"/>
+                    <a:lnR>
+                      <a:noFill/>
                     </a:lnR>
-                    <a:lnT w="9525" cap="flat" cmpd="sng" algn="ctr">
+                    <a:lnT w="6350" cap="flat" cmpd="sng" algn="ctr">
                       <a:solidFill>
                         <a:srgbClr val="DDE3EA"/>
                       </a:solidFill>
@@ -6666,7 +6466,7 @@
                       <a:headEnd type="none" w="med" len="med"/>
                       <a:tailEnd type="none" w="med" len="med"/>
                     </a:lnT>
-                    <a:lnB w="9525" cap="flat" cmpd="sng" algn="ctr">
+                    <a:lnB w="6350" cap="flat" cmpd="sng" algn="ctr">
                       <a:solidFill>
                         <a:srgbClr val="DDE3EA"/>
                       </a:solidFill>
@@ -6707,25 +6507,13 @@
                     </a:p>
                   </a:txBody>
                   <a:tcPr marL="91440" marR="91440" marT="0" marB="0" anchor="ctr">
-                    <a:lnL w="9525" cap="flat" cmpd="sng" algn="ctr">
-                      <a:solidFill>
-                        <a:srgbClr val="DDE3EA"/>
-                      </a:solidFill>
-                      <a:prstDash val="solid"/>
-                      <a:round/>
-                      <a:headEnd type="none" w="med" len="med"/>
-                      <a:tailEnd type="none" w="med" len="med"/>
+                    <a:lnL>
+                      <a:noFill/>
                     </a:lnL>
-                    <a:lnR w="9525" cap="flat" cmpd="sng" algn="ctr">
-                      <a:solidFill>
-                        <a:srgbClr val="DDE3EA"/>
-                      </a:solidFill>
-                      <a:prstDash val="solid"/>
-                      <a:round/>
-                      <a:headEnd type="none" w="med" len="med"/>
-                      <a:tailEnd type="none" w="med" len="med"/>
+                    <a:lnR>
+                      <a:noFill/>
                     </a:lnR>
-                    <a:lnT w="9525" cap="flat" cmpd="sng" algn="ctr">
+                    <a:lnT w="6350" cap="flat" cmpd="sng" algn="ctr">
                       <a:solidFill>
                         <a:srgbClr val="DDE3EA"/>
                       </a:solidFill>
@@ -6734,7 +6522,7 @@
                       <a:headEnd type="none" w="med" len="med"/>
                       <a:tailEnd type="none" w="med" len="med"/>
                     </a:lnT>
-                    <a:lnB w="9525" cap="flat" cmpd="sng" algn="ctr">
+                    <a:lnB w="6350" cap="flat" cmpd="sng" algn="ctr">
                       <a:solidFill>
                         <a:srgbClr val="DDE3EA"/>
                       </a:solidFill>
@@ -6775,25 +6563,13 @@
                     </a:p>
                   </a:txBody>
                   <a:tcPr marL="91440" marR="91440" marT="0" marB="0" anchor="ctr">
-                    <a:lnL w="9525" cap="flat" cmpd="sng" algn="ctr">
-                      <a:solidFill>
-                        <a:srgbClr val="DDE3EA"/>
-                      </a:solidFill>
-                      <a:prstDash val="solid"/>
-                      <a:round/>
-                      <a:headEnd type="none" w="med" len="med"/>
-                      <a:tailEnd type="none" w="med" len="med"/>
+                    <a:lnL>
+                      <a:noFill/>
                     </a:lnL>
-                    <a:lnR w="9525" cap="flat" cmpd="sng" algn="ctr">
-                      <a:solidFill>
-                        <a:srgbClr val="DDE3EA"/>
-                      </a:solidFill>
-                      <a:prstDash val="solid"/>
-                      <a:round/>
-                      <a:headEnd type="none" w="med" len="med"/>
-                      <a:tailEnd type="none" w="med" len="med"/>
+                    <a:lnR>
+                      <a:noFill/>
                     </a:lnR>
-                    <a:lnT w="9525" cap="flat" cmpd="sng" algn="ctr">
+                    <a:lnT w="6350" cap="flat" cmpd="sng" algn="ctr">
                       <a:solidFill>
                         <a:srgbClr val="DDE3EA"/>
                       </a:solidFill>
@@ -6802,7 +6578,7 @@
                       <a:headEnd type="none" w="med" len="med"/>
                       <a:tailEnd type="none" w="med" len="med"/>
                     </a:lnT>
-                    <a:lnB w="9525" cap="flat" cmpd="sng" algn="ctr">
+                    <a:lnB w="6350" cap="flat" cmpd="sng" algn="ctr">
                       <a:solidFill>
                         <a:srgbClr val="DDE3EA"/>
                       </a:solidFill>
@@ -6844,26 +6620,14 @@
                       </a:endParaRPr>
                     </a:p>
                   </a:txBody>
-                  <a:tcPr marL="91440" marR="91440" marT="0" marB="0" anchor="ctr">
-                    <a:lnL w="9525" cap="flat" cmpd="sng" algn="ctr">
-                      <a:solidFill>
-                        <a:srgbClr val="DDE3EA"/>
-                      </a:solidFill>
-                      <a:prstDash val="solid"/>
-                      <a:round/>
-                      <a:headEnd type="none" w="med" len="med"/>
-                      <a:tailEnd type="none" w="med" len="med"/>
+                  <a:tcPr marL="182880" marR="91440" marT="0" marB="0" anchor="ctr">
+                    <a:lnL>
+                      <a:noFill/>
                     </a:lnL>
-                    <a:lnR w="9525" cap="flat" cmpd="sng" algn="ctr">
-                      <a:solidFill>
-                        <a:srgbClr val="DDE3EA"/>
-                      </a:solidFill>
-                      <a:prstDash val="solid"/>
-                      <a:round/>
-                      <a:headEnd type="none" w="med" len="med"/>
-                      <a:tailEnd type="none" w="med" len="med"/>
+                    <a:lnR>
+                      <a:noFill/>
                     </a:lnR>
-                    <a:lnT w="9525" cap="flat" cmpd="sng" algn="ctr">
+                    <a:lnT w="6350" cap="flat" cmpd="sng" algn="ctr">
                       <a:solidFill>
                         <a:srgbClr val="DDE3EA"/>
                       </a:solidFill>
@@ -6872,7 +6636,7 @@
                       <a:headEnd type="none" w="med" len="med"/>
                       <a:tailEnd type="none" w="med" len="med"/>
                     </a:lnT>
-                    <a:lnB w="9525" cap="flat" cmpd="sng" algn="ctr">
+                    <a:lnB w="6350" cap="flat" cmpd="sng" algn="ctr">
                       <a:solidFill>
                         <a:srgbClr val="DDE3EA"/>
                       </a:solidFill>
@@ -6913,25 +6677,13 @@
                     </a:p>
                   </a:txBody>
                   <a:tcPr marL="91440" marR="91440" marT="0" marB="0" anchor="ctr">
-                    <a:lnL w="9525" cap="flat" cmpd="sng" algn="ctr">
-                      <a:solidFill>
-                        <a:srgbClr val="DDE3EA"/>
-                      </a:solidFill>
-                      <a:prstDash val="solid"/>
-                      <a:round/>
-                      <a:headEnd type="none" w="med" len="med"/>
-                      <a:tailEnd type="none" w="med" len="med"/>
+                    <a:lnL>
+                      <a:noFill/>
                     </a:lnL>
-                    <a:lnR w="9525" cap="flat" cmpd="sng" algn="ctr">
-                      <a:solidFill>
-                        <a:srgbClr val="DDE3EA"/>
-                      </a:solidFill>
-                      <a:prstDash val="solid"/>
-                      <a:round/>
-                      <a:headEnd type="none" w="med" len="med"/>
-                      <a:tailEnd type="none" w="med" len="med"/>
+                    <a:lnR>
+                      <a:noFill/>
                     </a:lnR>
-                    <a:lnT w="9525" cap="flat" cmpd="sng" algn="ctr">
+                    <a:lnT w="6350" cap="flat" cmpd="sng" algn="ctr">
                       <a:solidFill>
                         <a:srgbClr val="DDE3EA"/>
                       </a:solidFill>
@@ -6940,7 +6692,7 @@
                       <a:headEnd type="none" w="med" len="med"/>
                       <a:tailEnd type="none" w="med" len="med"/>
                     </a:lnT>
-                    <a:lnB w="9525" cap="flat" cmpd="sng" algn="ctr">
+                    <a:lnB w="6350" cap="flat" cmpd="sng" algn="ctr">
                       <a:solidFill>
                         <a:srgbClr val="DDE3EA"/>
                       </a:solidFill>
@@ -6981,25 +6733,13 @@
                     </a:p>
                   </a:txBody>
                   <a:tcPr marL="91440" marR="91440" marT="0" marB="0" anchor="ctr">
-                    <a:lnL w="9525" cap="flat" cmpd="sng" algn="ctr">
-                      <a:solidFill>
-                        <a:srgbClr val="DDE3EA"/>
-                      </a:solidFill>
-                      <a:prstDash val="solid"/>
-                      <a:round/>
-                      <a:headEnd type="none" w="med" len="med"/>
-                      <a:tailEnd type="none" w="med" len="med"/>
+                    <a:lnL>
+                      <a:noFill/>
                     </a:lnL>
-                    <a:lnR w="9525" cap="flat" cmpd="sng" algn="ctr">
-                      <a:solidFill>
-                        <a:srgbClr val="DDE3EA"/>
-                      </a:solidFill>
-                      <a:prstDash val="solid"/>
-                      <a:round/>
-                      <a:headEnd type="none" w="med" len="med"/>
-                      <a:tailEnd type="none" w="med" len="med"/>
+                    <a:lnR>
+                      <a:noFill/>
                     </a:lnR>
-                    <a:lnT w="9525" cap="flat" cmpd="sng" algn="ctr">
+                    <a:lnT w="6350" cap="flat" cmpd="sng" algn="ctr">
                       <a:solidFill>
                         <a:srgbClr val="DDE3EA"/>
                       </a:solidFill>
@@ -7008,7 +6748,7 @@
                       <a:headEnd type="none" w="med" len="med"/>
                       <a:tailEnd type="none" w="med" len="med"/>
                     </a:lnT>
-                    <a:lnB w="9525" cap="flat" cmpd="sng" algn="ctr">
+                    <a:lnB w="6350" cap="flat" cmpd="sng" algn="ctr">
                       <a:solidFill>
                         <a:srgbClr val="DDE3EA"/>
                       </a:solidFill>
@@ -7050,26 +6790,14 @@
                       </a:endParaRPr>
                     </a:p>
                   </a:txBody>
-                  <a:tcPr marL="91440" marR="91440" marT="0" marB="0" anchor="ctr">
-                    <a:lnL w="9525" cap="flat" cmpd="sng" algn="ctr">
-                      <a:solidFill>
-                        <a:srgbClr val="DDE3EA"/>
-                      </a:solidFill>
-                      <a:prstDash val="solid"/>
-                      <a:round/>
-                      <a:headEnd type="none" w="med" len="med"/>
-                      <a:tailEnd type="none" w="med" len="med"/>
+                  <a:tcPr marL="182880" marR="91440" marT="0" marB="0" anchor="ctr">
+                    <a:lnL>
+                      <a:noFill/>
                     </a:lnL>
-                    <a:lnR w="9525" cap="flat" cmpd="sng" algn="ctr">
-                      <a:solidFill>
-                        <a:srgbClr val="DDE3EA"/>
-                      </a:solidFill>
-                      <a:prstDash val="solid"/>
-                      <a:round/>
-                      <a:headEnd type="none" w="med" len="med"/>
-                      <a:tailEnd type="none" w="med" len="med"/>
+                    <a:lnR>
+                      <a:noFill/>
                     </a:lnR>
-                    <a:lnT w="9525" cap="flat" cmpd="sng" algn="ctr">
+                    <a:lnT w="6350" cap="flat" cmpd="sng" algn="ctr">
                       <a:solidFill>
                         <a:srgbClr val="DDE3EA"/>
                       </a:solidFill>
@@ -7078,7 +6806,7 @@
                       <a:headEnd type="none" w="med" len="med"/>
                       <a:tailEnd type="none" w="med" len="med"/>
                     </a:lnT>
-                    <a:lnB w="9525" cap="flat" cmpd="sng" algn="ctr">
+                    <a:lnB w="6350" cap="flat" cmpd="sng" algn="ctr">
                       <a:solidFill>
                         <a:srgbClr val="DDE3EA"/>
                       </a:solidFill>
@@ -7119,25 +6847,13 @@
                     </a:p>
                   </a:txBody>
                   <a:tcPr marL="91440" marR="91440" marT="0" marB="0" anchor="ctr">
-                    <a:lnL w="9525" cap="flat" cmpd="sng" algn="ctr">
-                      <a:solidFill>
-                        <a:srgbClr val="DDE3EA"/>
-                      </a:solidFill>
-                      <a:prstDash val="solid"/>
-                      <a:round/>
-                      <a:headEnd type="none" w="med" len="med"/>
-                      <a:tailEnd type="none" w="med" len="med"/>
+                    <a:lnL>
+                      <a:noFill/>
                     </a:lnL>
-                    <a:lnR w="9525" cap="flat" cmpd="sng" algn="ctr">
-                      <a:solidFill>
-                        <a:srgbClr val="DDE3EA"/>
-                      </a:solidFill>
-                      <a:prstDash val="solid"/>
-                      <a:round/>
-                      <a:headEnd type="none" w="med" len="med"/>
-                      <a:tailEnd type="none" w="med" len="med"/>
+                    <a:lnR>
+                      <a:noFill/>
                     </a:lnR>
-                    <a:lnT w="9525" cap="flat" cmpd="sng" algn="ctr">
+                    <a:lnT w="6350" cap="flat" cmpd="sng" algn="ctr">
                       <a:solidFill>
                         <a:srgbClr val="DDE3EA"/>
                       </a:solidFill>
@@ -7146,7 +6862,7 @@
                       <a:headEnd type="none" w="med" len="med"/>
                       <a:tailEnd type="none" w="med" len="med"/>
                     </a:lnT>
-                    <a:lnB w="9525" cap="flat" cmpd="sng" algn="ctr">
+                    <a:lnB w="6350" cap="flat" cmpd="sng" algn="ctr">
                       <a:solidFill>
                         <a:srgbClr val="DDE3EA"/>
                       </a:solidFill>
@@ -7187,25 +6903,13 @@
                     </a:p>
                   </a:txBody>
                   <a:tcPr marL="91440" marR="91440" marT="0" marB="0" anchor="ctr">
-                    <a:lnL w="9525" cap="flat" cmpd="sng" algn="ctr">
-                      <a:solidFill>
-                        <a:srgbClr val="DDE3EA"/>
-                      </a:solidFill>
-                      <a:prstDash val="solid"/>
-                      <a:round/>
-                      <a:headEnd type="none" w="med" len="med"/>
-                      <a:tailEnd type="none" w="med" len="med"/>
+                    <a:lnL>
+                      <a:noFill/>
                     </a:lnL>
-                    <a:lnR w="9525" cap="flat" cmpd="sng" algn="ctr">
-                      <a:solidFill>
-                        <a:srgbClr val="DDE3EA"/>
-                      </a:solidFill>
-                      <a:prstDash val="solid"/>
-                      <a:round/>
-                      <a:headEnd type="none" w="med" len="med"/>
-                      <a:tailEnd type="none" w="med" len="med"/>
+                    <a:lnR>
+                      <a:noFill/>
                     </a:lnR>
-                    <a:lnT w="9525" cap="flat" cmpd="sng" algn="ctr">
+                    <a:lnT w="6350" cap="flat" cmpd="sng" algn="ctr">
                       <a:solidFill>
                         <a:srgbClr val="DDE3EA"/>
                       </a:solidFill>
@@ -7214,7 +6918,7 @@
                       <a:headEnd type="none" w="med" len="med"/>
                       <a:tailEnd type="none" w="med" len="med"/>
                     </a:lnT>
-                    <a:lnB w="9525" cap="flat" cmpd="sng" algn="ctr">
+                    <a:lnB w="6350" cap="flat" cmpd="sng" algn="ctr">
                       <a:solidFill>
                         <a:srgbClr val="DDE3EA"/>
                       </a:solidFill>
@@ -7256,26 +6960,14 @@
                       </a:endParaRPr>
                     </a:p>
                   </a:txBody>
-                  <a:tcPr marL="91440" marR="91440" marT="0" marB="0" anchor="ctr">
-                    <a:lnL w="9525" cap="flat" cmpd="sng" algn="ctr">
-                      <a:solidFill>
-                        <a:srgbClr val="DDE3EA"/>
-                      </a:solidFill>
-                      <a:prstDash val="solid"/>
-                      <a:round/>
-                      <a:headEnd type="none" w="med" len="med"/>
-                      <a:tailEnd type="none" w="med" len="med"/>
+                  <a:tcPr marL="182880" marR="91440" marT="0" marB="0" anchor="ctr">
+                    <a:lnL>
+                      <a:noFill/>
                     </a:lnL>
-                    <a:lnR w="9525" cap="flat" cmpd="sng" algn="ctr">
-                      <a:solidFill>
-                        <a:srgbClr val="DDE3EA"/>
-                      </a:solidFill>
-                      <a:prstDash val="solid"/>
-                      <a:round/>
-                      <a:headEnd type="none" w="med" len="med"/>
-                      <a:tailEnd type="none" w="med" len="med"/>
+                    <a:lnR>
+                      <a:noFill/>
                     </a:lnR>
-                    <a:lnT w="9525" cap="flat" cmpd="sng" algn="ctr">
+                    <a:lnT w="6350" cap="flat" cmpd="sng" algn="ctr">
                       <a:solidFill>
                         <a:srgbClr val="DDE3EA"/>
                       </a:solidFill>
@@ -7284,7 +6976,7 @@
                       <a:headEnd type="none" w="med" len="med"/>
                       <a:tailEnd type="none" w="med" len="med"/>
                     </a:lnT>
-                    <a:lnB w="9525" cap="flat" cmpd="sng" algn="ctr">
+                    <a:lnB w="6350" cap="flat" cmpd="sng" algn="ctr">
                       <a:solidFill>
                         <a:srgbClr val="DDE3EA"/>
                       </a:solidFill>
@@ -7325,25 +7017,13 @@
                     </a:p>
                   </a:txBody>
                   <a:tcPr marL="91440" marR="91440" marT="0" marB="0" anchor="ctr">
-                    <a:lnL w="9525" cap="flat" cmpd="sng" algn="ctr">
-                      <a:solidFill>
-                        <a:srgbClr val="DDE3EA"/>
-                      </a:solidFill>
-                      <a:prstDash val="solid"/>
-                      <a:round/>
-                      <a:headEnd type="none" w="med" len="med"/>
-                      <a:tailEnd type="none" w="med" len="med"/>
+                    <a:lnL>
+                      <a:noFill/>
                     </a:lnL>
-                    <a:lnR w="9525" cap="flat" cmpd="sng" algn="ctr">
-                      <a:solidFill>
-                        <a:srgbClr val="DDE3EA"/>
-                      </a:solidFill>
-                      <a:prstDash val="solid"/>
-                      <a:round/>
-                      <a:headEnd type="none" w="med" len="med"/>
-                      <a:tailEnd type="none" w="med" len="med"/>
+                    <a:lnR>
+                      <a:noFill/>
                     </a:lnR>
-                    <a:lnT w="9525" cap="flat" cmpd="sng" algn="ctr">
+                    <a:lnT w="6350" cap="flat" cmpd="sng" algn="ctr">
                       <a:solidFill>
                         <a:srgbClr val="DDE3EA"/>
                       </a:solidFill>
@@ -7352,7 +7032,7 @@
                       <a:headEnd type="none" w="med" len="med"/>
                       <a:tailEnd type="none" w="med" len="med"/>
                     </a:lnT>
-                    <a:lnB w="9525" cap="flat" cmpd="sng" algn="ctr">
+                    <a:lnB w="6350" cap="flat" cmpd="sng" algn="ctr">
                       <a:solidFill>
                         <a:srgbClr val="DDE3EA"/>
                       </a:solidFill>
@@ -7393,25 +7073,13 @@
                     </a:p>
                   </a:txBody>
                   <a:tcPr marL="91440" marR="91440" marT="0" marB="0" anchor="ctr">
-                    <a:lnL w="9525" cap="flat" cmpd="sng" algn="ctr">
-                      <a:solidFill>
-                        <a:srgbClr val="DDE3EA"/>
-                      </a:solidFill>
-                      <a:prstDash val="solid"/>
-                      <a:round/>
-                      <a:headEnd type="none" w="med" len="med"/>
-                      <a:tailEnd type="none" w="med" len="med"/>
+                    <a:lnL>
+                      <a:noFill/>
                     </a:lnL>
-                    <a:lnR w="9525" cap="flat" cmpd="sng" algn="ctr">
-                      <a:solidFill>
-                        <a:srgbClr val="DDE3EA"/>
-                      </a:solidFill>
-                      <a:prstDash val="solid"/>
-                      <a:round/>
-                      <a:headEnd type="none" w="med" len="med"/>
-                      <a:tailEnd type="none" w="med" len="med"/>
+                    <a:lnR>
+                      <a:noFill/>
                     </a:lnR>
-                    <a:lnT w="9525" cap="flat" cmpd="sng" algn="ctr">
+                    <a:lnT w="6350" cap="flat" cmpd="sng" algn="ctr">
                       <a:solidFill>
                         <a:srgbClr val="DDE3EA"/>
                       </a:solidFill>
@@ -7420,7 +7088,7 @@
                       <a:headEnd type="none" w="med" len="med"/>
                       <a:tailEnd type="none" w="med" len="med"/>
                     </a:lnT>
-                    <a:lnB w="9525" cap="flat" cmpd="sng" algn="ctr">
+                    <a:lnB w="6350" cap="flat" cmpd="sng" algn="ctr">
                       <a:solidFill>
                         <a:srgbClr val="DDE3EA"/>
                       </a:solidFill>
@@ -7977,8 +7645,8 @@
         </p:nvSpPr>
         <p:spPr>
           <a:xfrm>
-            <a:off x="548640" y="2560320"/>
-            <a:ext cx="1353312" cy="640080"/>
+            <a:off x="512064" y="2560320"/>
+            <a:ext cx="1426464" cy="640080"/>
           </a:xfrm>
           <a:prstGeom prst="rect">
             <a:avLst/>
@@ -8002,7 +7670,19 @@
                 <a:ea typeface="Inter" pitchFamily="34" charset="-122"/>
                 <a:cs typeface="Inter" pitchFamily="34" charset="-120"/>
               </a:rPr>
-              <a:t>the same contracted week</a:t>
+              <a:t>the contracted</a:t>
+            </a:r>
+            <a:br/>
+            <a:r>
+              <a:rPr lang="en-US" sz="1400" b="1" dirty="0">
+                <a:solidFill>
+                  <a:srgbClr val="1B2533"/>
+                </a:solidFill>
+                <a:latin typeface="Inter" pitchFamily="34" charset="0"/>
+                <a:ea typeface="Inter" pitchFamily="34" charset="-122"/>
+                <a:cs typeface="Inter" pitchFamily="34" charset="-120"/>
+              </a:rPr>
+              <a:t>week, as now</a:t>
             </a:r>
             <a:endParaRPr lang="en-US" sz="1400" dirty="0"/>
           </a:p>
@@ -8016,8 +7696,8 @@
         </p:nvSpPr>
         <p:spPr>
           <a:xfrm>
-            <a:off x="548640" y="3200400"/>
-            <a:ext cx="1353312" cy="457200"/>
+            <a:off x="512064" y="3200400"/>
+            <a:ext cx="1426464" cy="457200"/>
           </a:xfrm>
           <a:prstGeom prst="rect">
             <a:avLst/>
@@ -8041,7 +7721,7 @@
                 <a:ea typeface="Inter" pitchFamily="34" charset="-122"/>
                 <a:cs typeface="Inter" pitchFamily="34" charset="-120"/>
               </a:rPr>
-              <a:t>no extra contracted hours</a:t>
+              <a:t>no extra hours</a:t>
             </a:r>
             <a:endParaRPr lang="en-US" sz="1200" dirty="0"/>
           </a:p>
@@ -8123,8 +7803,8 @@
         </p:nvSpPr>
         <p:spPr>
           <a:xfrm>
-            <a:off x="2221992" y="2560320"/>
-            <a:ext cx="1353312" cy="640080"/>
+            <a:off x="2185416" y="2560320"/>
+            <a:ext cx="1426464" cy="640080"/>
           </a:xfrm>
           <a:prstGeom prst="rect">
             <a:avLst/>
@@ -8148,7 +7828,19 @@
                 <a:ea typeface="Inter" pitchFamily="34" charset="-122"/>
                 <a:cs typeface="Inter" pitchFamily="34" charset="-120"/>
               </a:rPr>
-              <a:t>most days in a row</a:t>
+              <a:t>most days</a:t>
+            </a:r>
+            <a:br/>
+            <a:r>
+              <a:rPr lang="en-US" sz="1400" b="1" dirty="0">
+                <a:solidFill>
+                  <a:srgbClr val="1B2533"/>
+                </a:solidFill>
+                <a:latin typeface="Inter" pitchFamily="34" charset="0"/>
+                <a:ea typeface="Inter" pitchFamily="34" charset="-122"/>
+                <a:cs typeface="Inter" pitchFamily="34" charset="-120"/>
+              </a:rPr>
+              <a:t>in a row</a:t>
             </a:r>
             <a:endParaRPr lang="en-US" sz="1400" dirty="0"/>
           </a:p>
@@ -8162,8 +7854,8 @@
         </p:nvSpPr>
         <p:spPr>
           <a:xfrm>
-            <a:off x="2221992" y="3200400"/>
-            <a:ext cx="1353312" cy="457200"/>
+            <a:off x="2185416" y="3200400"/>
+            <a:ext cx="1426464" cy="457200"/>
           </a:xfrm>
           <a:prstGeom prst="rect">
             <a:avLst/>
@@ -8269,8 +7961,8 @@
         </p:nvSpPr>
         <p:spPr>
           <a:xfrm>
-            <a:off x="3895344" y="2560320"/>
-            <a:ext cx="1353312" cy="640080"/>
+            <a:off x="3858768" y="2560320"/>
+            <a:ext cx="1426464" cy="640080"/>
           </a:xfrm>
           <a:prstGeom prst="rect">
             <a:avLst/>
@@ -8294,7 +7986,19 @@
                 <a:ea typeface="Inter" pitchFamily="34" charset="-122"/>
                 <a:cs typeface="Inter" pitchFamily="34" charset="-120"/>
               </a:rPr>
-              <a:t>full weekends off a year</a:t>
+              <a:t>full weekends</a:t>
+            </a:r>
+            <a:br/>
+            <a:r>
+              <a:rPr lang="en-US" sz="1400" b="1" dirty="0">
+                <a:solidFill>
+                  <a:srgbClr val="1B2533"/>
+                </a:solidFill>
+                <a:latin typeface="Inter" pitchFamily="34" charset="0"/>
+                <a:ea typeface="Inter" pitchFamily="34" charset="-122"/>
+                <a:cs typeface="Inter" pitchFamily="34" charset="-120"/>
+              </a:rPr>
+              <a:t>off a year</a:t>
             </a:r>
             <a:endParaRPr lang="en-US" sz="1400" dirty="0"/>
           </a:p>
@@ -8308,8 +8012,8 @@
         </p:nvSpPr>
         <p:spPr>
           <a:xfrm>
-            <a:off x="3895344" y="3200400"/>
-            <a:ext cx="1353312" cy="457200"/>
+            <a:off x="3858768" y="3200400"/>
+            <a:ext cx="1426464" cy="457200"/>
           </a:xfrm>
           <a:prstGeom prst="rect">
             <a:avLst/>
@@ -8333,7 +8037,7 @@
                 <a:ea typeface="Inter" pitchFamily="34" charset="-122"/>
                 <a:cs typeface="Inter" pitchFamily="34" charset="-120"/>
               </a:rPr>
-              <a:t>today 10 · 7 in 26 · at most 5 apart</a:t>
+              <a:t>today 10 · 7 in 26</a:t>
             </a:r>
             <a:endParaRPr lang="en-US" sz="1200" dirty="0"/>
           </a:p>
@@ -8415,8 +8119,8 @@
         </p:nvSpPr>
         <p:spPr>
           <a:xfrm>
-            <a:off x="5568696" y="2560320"/>
-            <a:ext cx="1353312" cy="640080"/>
+            <a:off x="5532120" y="2560320"/>
+            <a:ext cx="1426464" cy="640080"/>
           </a:xfrm>
           <a:prstGeom prst="rect">
             <a:avLst/>
@@ -8440,7 +8144,19 @@
                 <a:ea typeface="Inter" pitchFamily="34" charset="-122"/>
                 <a:cs typeface="Inter" pitchFamily="34" charset="-120"/>
               </a:rPr>
-              <a:t>shift times you already work</a:t>
+              <a:t>shift times you</a:t>
+            </a:r>
+            <a:br/>
+            <a:r>
+              <a:rPr lang="en-US" sz="1400" b="1" dirty="0">
+                <a:solidFill>
+                  <a:srgbClr val="1B2533"/>
+                </a:solidFill>
+                <a:latin typeface="Inter" pitchFamily="34" charset="0"/>
+                <a:ea typeface="Inter" pitchFamily="34" charset="-122"/>
+                <a:cs typeface="Inter" pitchFamily="34" charset="-120"/>
+              </a:rPr>
+              <a:t>already work</a:t>
             </a:r>
             <a:endParaRPr lang="en-US" sz="1400" dirty="0"/>
           </a:p>
@@ -8454,8 +8170,8 @@
         </p:nvSpPr>
         <p:spPr>
           <a:xfrm>
-            <a:off x="5568696" y="3200400"/>
-            <a:ext cx="1353312" cy="457200"/>
+            <a:off x="5532120" y="3200400"/>
+            <a:ext cx="1426464" cy="457200"/>
           </a:xfrm>
           <a:prstGeom prst="rect">
             <a:avLst/>
@@ -8561,8 +8277,8 @@
         </p:nvSpPr>
         <p:spPr>
           <a:xfrm>
-            <a:off x="7242048" y="2560320"/>
-            <a:ext cx="1353312" cy="640080"/>
+            <a:off x="7205472" y="2560320"/>
+            <a:ext cx="1426464" cy="640080"/>
           </a:xfrm>
           <a:prstGeom prst="rect">
             <a:avLst/>
@@ -8586,7 +8302,19 @@
                 <a:ea typeface="Inter" pitchFamily="34" charset="-122"/>
                 <a:cs typeface="Inter" pitchFamily="34" charset="-120"/>
               </a:rPr>
-              <a:t>shorter on every closing shift</a:t>
+              <a:t>off every</a:t>
+            </a:r>
+            <a:br/>
+            <a:r>
+              <a:rPr lang="en-US" sz="1400" b="1" dirty="0">
+                <a:solidFill>
+                  <a:srgbClr val="1B2533"/>
+                </a:solidFill>
+                <a:latin typeface="Inter" pitchFamily="34" charset="0"/>
+                <a:ea typeface="Inter" pitchFamily="34" charset="-122"/>
+                <a:cs typeface="Inter" pitchFamily="34" charset="-120"/>
+              </a:rPr>
+              <a:t>closing shift</a:t>
             </a:r>
             <a:endParaRPr lang="en-US" sz="1400" dirty="0"/>
           </a:p>
@@ -8600,8 +8328,8 @@
         </p:nvSpPr>
         <p:spPr>
           <a:xfrm>
-            <a:off x="7242048" y="3200400"/>
-            <a:ext cx="1353312" cy="457200"/>
+            <a:off x="7205472" y="3200400"/>
+            <a:ext cx="1426464" cy="457200"/>
           </a:xfrm>
           <a:prstGeom prst="rect">
             <a:avLst/>
@@ -8625,7 +8353,7 @@
                 <a:ea typeface="Inter" pitchFamily="34" charset="-122"/>
                 <a:cs typeface="Inter" pitchFamily="34" charset="-120"/>
               </a:rPr>
-              <a:t>45 min on a Sunday</a:t>
+              <a:t>Sundays: 45 min</a:t>
             </a:r>
             <a:endParaRPr lang="en-US" sz="1200" dirty="0"/>
           </a:p>
@@ -8981,7 +8709,7 @@
         </p:nvSpPr>
         <p:spPr>
           <a:xfrm>
-            <a:off x="457200" y="2233968"/>
+            <a:off x="457200" y="2084832"/>
             <a:ext cx="457200" cy="457200"/>
           </a:xfrm>
           <a:prstGeom prst="ellipse">
@@ -9014,7 +8742,7 @@
         </p:blipFill>
         <p:spPr>
           <a:xfrm>
-            <a:off x="557784" y="2334552"/>
+            <a:off x="557784" y="2185416"/>
             <a:ext cx="256032" cy="256032"/>
           </a:xfrm>
           <a:prstGeom prst="rect">
@@ -9030,7 +8758,7 @@
         </p:nvSpPr>
         <p:spPr>
           <a:xfrm>
-            <a:off x="1097280" y="2197392"/>
+            <a:off x="1097280" y="2048256"/>
             <a:ext cx="7589520" cy="292608"/>
           </a:xfrm>
           <a:prstGeom prst="rect">
@@ -9069,7 +8797,7 @@
         </p:nvSpPr>
         <p:spPr>
           <a:xfrm>
-            <a:off x="1097280" y="2480856"/>
+            <a:off x="1097280" y="2331720"/>
             <a:ext cx="7589520" cy="274320"/>
           </a:xfrm>
           <a:prstGeom prst="rect">
@@ -9108,7 +8836,7 @@
         </p:nvSpPr>
         <p:spPr>
           <a:xfrm>
-            <a:off x="457200" y="3096336"/>
+            <a:off x="457200" y="2798064"/>
             <a:ext cx="457200" cy="457200"/>
           </a:xfrm>
           <a:prstGeom prst="ellipse">
@@ -9141,7 +8869,7 @@
         </p:blipFill>
         <p:spPr>
           <a:xfrm>
-            <a:off x="557784" y="3196920"/>
+            <a:off x="557784" y="2898648"/>
             <a:ext cx="256032" cy="256032"/>
           </a:xfrm>
           <a:prstGeom prst="rect">
@@ -9157,7 +8885,7 @@
         </p:nvSpPr>
         <p:spPr>
           <a:xfrm>
-            <a:off x="1097280" y="3059760"/>
+            <a:off x="1097280" y="2761488"/>
             <a:ext cx="7589520" cy="292608"/>
           </a:xfrm>
           <a:prstGeom prst="rect">
@@ -9196,7 +8924,7 @@
         </p:nvSpPr>
         <p:spPr>
           <a:xfrm>
-            <a:off x="1097280" y="3343224"/>
+            <a:off x="1097280" y="3044952"/>
             <a:ext cx="7589520" cy="274320"/>
           </a:xfrm>
           <a:prstGeom prst="rect">
@@ -9235,7 +8963,7 @@
         </p:nvSpPr>
         <p:spPr>
           <a:xfrm>
-            <a:off x="457200" y="3958704"/>
+            <a:off x="457200" y="3511296"/>
             <a:ext cx="457200" cy="457200"/>
           </a:xfrm>
           <a:prstGeom prst="ellipse">
@@ -9268,7 +8996,7 @@
         </p:blipFill>
         <p:spPr>
           <a:xfrm>
-            <a:off x="557784" y="4059288"/>
+            <a:off x="557784" y="3611880"/>
             <a:ext cx="256032" cy="256032"/>
           </a:xfrm>
           <a:prstGeom prst="rect">
@@ -9284,7 +9012,7 @@
         </p:nvSpPr>
         <p:spPr>
           <a:xfrm>
-            <a:off x="1097280" y="3922128"/>
+            <a:off x="1097280" y="3474720"/>
             <a:ext cx="7589520" cy="292608"/>
           </a:xfrm>
           <a:prstGeom prst="rect">
@@ -9323,7 +9051,7 @@
         </p:nvSpPr>
         <p:spPr>
           <a:xfrm>
-            <a:off x="1097280" y="4205592"/>
+            <a:off x="1097280" y="3758184"/>
             <a:ext cx="7589520" cy="274320"/>
           </a:xfrm>
           <a:prstGeom prst="rect">
@@ -9351,6 +9079,70 @@
               <a:t>Two early and two late, on the same shifts, every day.</a:t>
             </a:r>
             <a:endParaRPr lang="en-US" sz="1300" dirty="0"/>
+          </a:p>
+        </p:txBody>
+      </p:sp>
+      <p:sp>
+        <p:nvSpPr>
+          <p:cNvPr id="21" name="Banner"/>
+          <p:cNvSpPr/>
+          <p:nvPr/>
+        </p:nvSpPr>
+        <p:spPr>
+          <a:xfrm>
+            <a:off x="457200" y="4160520"/>
+            <a:ext cx="8229600" cy="548640"/>
+          </a:xfrm>
+          <a:prstGeom prst="roundRect">
+            <a:avLst>
+              <a:gd name="adj" fmla="val 16667"/>
+            </a:avLst>
+          </a:prstGeom>
+          <a:solidFill>
+            <a:srgbClr val="001E3C"/>
+          </a:solidFill>
+          <a:ln w="12700">
+            <a:solidFill>
+              <a:srgbClr val="001E3C"/>
+            </a:solidFill>
+            <a:prstDash val="solid"/>
+          </a:ln>
+        </p:spPr>
+      </p:sp>
+      <p:sp>
+        <p:nvSpPr>
+          <p:cNvPr id="22" name="Banner text"/>
+          <p:cNvSpPr txBox="1"/>
+          <p:nvPr/>
+        </p:nvSpPr>
+        <p:spPr>
+          <a:xfrm>
+            <a:off x="640080" y="4160520"/>
+            <a:ext cx="7863840" cy="548640"/>
+          </a:xfrm>
+          <a:prstGeom prst="rect">
+            <a:avLst/>
+          </a:prstGeom>
+          <a:noFill/>
+        </p:spPr>
+        <p:txBody>
+          <a:bodyPr wrap="square" lIns="0" tIns="0" rIns="0" bIns="0" rtlCol="0" anchor="ctr"/>
+          <a:lstStyle/>
+          <a:p>
+            <a:pPr indent="0" marL="0">
+              <a:buNone/>
+            </a:pPr>
+            <a:r>
+              <a:rPr lang="en-US" sz="1400" b="1" dirty="0">
+                <a:solidFill>
+                  <a:srgbClr val="FFFFFF"/>
+                </a:solidFill>
+                <a:latin typeface="Inter" pitchFamily="34" charset="0"/>
+                <a:ea typeface="Inter" pitchFamily="34" charset="-122"/>
+                <a:cs typeface="Inter" pitchFamily="34" charset="-120"/>
+              </a:rPr>
+              <a:t>The change is coming whatever we do — the question is which version we want.</a:t>
+            </a:r>
           </a:p>
         </p:txBody>
       </p:sp>
@@ -9511,8 +9303,8 @@
         </p:nvSpPr>
         <p:spPr>
           <a:xfrm>
-            <a:off x="4297680" y="1417320"/>
-            <a:ext cx="2194560" cy="320040"/>
+            <a:off x="4663440" y="1417320"/>
+            <a:ext cx="2011680" cy="320040"/>
           </a:xfrm>
           <a:prstGeom prst="rect">
             <a:avLst/>
@@ -9550,8 +9342,8 @@
         </p:nvSpPr>
         <p:spPr>
           <a:xfrm>
-            <a:off x="6492240" y="1417320"/>
-            <a:ext cx="2194560" cy="320040"/>
+            <a:off x="6675120" y="1417320"/>
+            <a:ext cx="2011680" cy="320040"/>
           </a:xfrm>
           <a:prstGeom prst="rect">
             <a:avLst/>
@@ -9590,7 +9382,7 @@
         <p:spPr>
           <a:xfrm>
             <a:off x="457200" y="1801368"/>
-            <a:ext cx="8229600" cy="475488"/>
+            <a:ext cx="8229600" cy="365760"/>
           </a:xfrm>
           <a:prstGeom prst="roundRect">
             <a:avLst>
@@ -9617,7 +9409,7 @@
         <p:spPr>
           <a:xfrm>
             <a:off x="640080" y="1801368"/>
-            <a:ext cx="3657600" cy="475488"/>
+            <a:ext cx="4023360" cy="365760"/>
           </a:xfrm>
           <a:prstGeom prst="rect">
             <a:avLst/>
@@ -9655,8 +9447,8 @@
         </p:nvSpPr>
         <p:spPr>
           <a:xfrm>
-            <a:off x="4297680" y="1801368"/>
-            <a:ext cx="2194560" cy="475488"/>
+            <a:off x="4663440" y="1801368"/>
+            <a:ext cx="2011680" cy="365760"/>
           </a:xfrm>
           <a:prstGeom prst="rect">
             <a:avLst/>
@@ -9694,8 +9486,8 @@
         </p:nvSpPr>
         <p:spPr>
           <a:xfrm>
-            <a:off x="6492240" y="1801368"/>
-            <a:ext cx="2194560" cy="475488"/>
+            <a:off x="6675120" y="1801368"/>
+            <a:ext cx="2011680" cy="365760"/>
           </a:xfrm>
           <a:prstGeom prst="rect">
             <a:avLst/>
@@ -9733,8 +9525,8 @@
         </p:nvSpPr>
         <p:spPr>
           <a:xfrm>
-            <a:off x="457200" y="2368296"/>
-            <a:ext cx="8229600" cy="475488"/>
+            <a:off x="457200" y="2240280"/>
+            <a:ext cx="8229600" cy="365760"/>
           </a:xfrm>
           <a:prstGeom prst="roundRect">
             <a:avLst>
@@ -9760,8 +9552,8 @@
         </p:nvSpPr>
         <p:spPr>
           <a:xfrm>
-            <a:off x="640080" y="2368296"/>
-            <a:ext cx="3657600" cy="475488"/>
+            <a:off x="640080" y="2240280"/>
+            <a:ext cx="4023360" cy="365760"/>
           </a:xfrm>
           <a:prstGeom prst="rect">
             <a:avLst/>
@@ -9799,8 +9591,8 @@
         </p:nvSpPr>
         <p:spPr>
           <a:xfrm>
-            <a:off x="4297680" y="2368296"/>
-            <a:ext cx="2194560" cy="475488"/>
+            <a:off x="4663440" y="2240280"/>
+            <a:ext cx="2011680" cy="365760"/>
           </a:xfrm>
           <a:prstGeom prst="rect">
             <a:avLst/>
@@ -9838,8 +9630,8 @@
         </p:nvSpPr>
         <p:spPr>
           <a:xfrm>
-            <a:off x="6492240" y="2368296"/>
-            <a:ext cx="2194560" cy="475488"/>
+            <a:off x="6675120" y="2240280"/>
+            <a:ext cx="2011680" cy="365760"/>
           </a:xfrm>
           <a:prstGeom prst="rect">
             <a:avLst/>
@@ -9877,8 +9669,8 @@
         </p:nvSpPr>
         <p:spPr>
           <a:xfrm>
-            <a:off x="457200" y="2935224"/>
-            <a:ext cx="8229600" cy="475488"/>
+            <a:off x="457200" y="2679192"/>
+            <a:ext cx="8229600" cy="365760"/>
           </a:xfrm>
           <a:prstGeom prst="roundRect">
             <a:avLst>
@@ -9904,8 +9696,8 @@
         </p:nvSpPr>
         <p:spPr>
           <a:xfrm>
-            <a:off x="640080" y="2935224"/>
-            <a:ext cx="3657600" cy="475488"/>
+            <a:off x="640080" y="2679192"/>
+            <a:ext cx="4023360" cy="365760"/>
           </a:xfrm>
           <a:prstGeom prst="rect">
             <a:avLst/>
@@ -9943,8 +9735,8 @@
         </p:nvSpPr>
         <p:spPr>
           <a:xfrm>
-            <a:off x="4297680" y="2935224"/>
-            <a:ext cx="2194560" cy="475488"/>
+            <a:off x="4663440" y="2679192"/>
+            <a:ext cx="2011680" cy="365760"/>
           </a:xfrm>
           <a:prstGeom prst="rect">
             <a:avLst/>
@@ -9982,8 +9774,8 @@
         </p:nvSpPr>
         <p:spPr>
           <a:xfrm>
-            <a:off x="6492240" y="2935224"/>
-            <a:ext cx="2194560" cy="475488"/>
+            <a:off x="6675120" y="2679192"/>
+            <a:ext cx="2011680" cy="365760"/>
           </a:xfrm>
           <a:prstGeom prst="rect">
             <a:avLst/>
@@ -10236,8 +10028,8 @@
         </p:nvSpPr>
         <p:spPr>
           <a:xfrm>
-            <a:off x="4846320" y="1417320"/>
-            <a:ext cx="1920240" cy="320040"/>
+            <a:off x="4663440" y="1417320"/>
+            <a:ext cx="2011680" cy="320040"/>
           </a:xfrm>
           <a:prstGeom prst="rect">
             <a:avLst/>
@@ -10275,8 +10067,8 @@
         </p:nvSpPr>
         <p:spPr>
           <a:xfrm>
-            <a:off x="6766560" y="1417320"/>
-            <a:ext cx="1920240" cy="320040"/>
+            <a:off x="6675120" y="1417320"/>
+            <a:ext cx="2011680" cy="320040"/>
           </a:xfrm>
           <a:prstGeom prst="rect">
             <a:avLst/>
@@ -10315,7 +10107,7 @@
         <p:spPr>
           <a:xfrm>
             <a:off x="457200" y="1801368"/>
-            <a:ext cx="8229600" cy="475488"/>
+            <a:ext cx="8229600" cy="365760"/>
           </a:xfrm>
           <a:prstGeom prst="roundRect">
             <a:avLst>
@@ -10342,7 +10134,7 @@
         <p:spPr>
           <a:xfrm>
             <a:off x="640080" y="1801368"/>
-            <a:ext cx="4206240" cy="475488"/>
+            <a:ext cx="4023360" cy="365760"/>
           </a:xfrm>
           <a:prstGeom prst="rect">
             <a:avLst/>
@@ -10380,8 +10172,8 @@
         </p:nvSpPr>
         <p:spPr>
           <a:xfrm>
-            <a:off x="4846320" y="1801368"/>
-            <a:ext cx="1920240" cy="475488"/>
+            <a:off x="4663440" y="1801368"/>
+            <a:ext cx="2011680" cy="365760"/>
           </a:xfrm>
           <a:prstGeom prst="rect">
             <a:avLst/>
@@ -10419,8 +10211,8 @@
         </p:nvSpPr>
         <p:spPr>
           <a:xfrm>
-            <a:off x="6766560" y="1801368"/>
-            <a:ext cx="1920240" cy="475488"/>
+            <a:off x="6675120" y="1801368"/>
+            <a:ext cx="2011680" cy="365760"/>
           </a:xfrm>
           <a:prstGeom prst="rect">
             <a:avLst/>
@@ -10458,8 +10250,8 @@
         </p:nvSpPr>
         <p:spPr>
           <a:xfrm>
-            <a:off x="457200" y="2368296"/>
-            <a:ext cx="8229600" cy="475488"/>
+            <a:off x="457200" y="2240280"/>
+            <a:ext cx="8229600" cy="365760"/>
           </a:xfrm>
           <a:prstGeom prst="roundRect">
             <a:avLst>
@@ -10485,8 +10277,8 @@
         </p:nvSpPr>
         <p:spPr>
           <a:xfrm>
-            <a:off x="640080" y="2368296"/>
-            <a:ext cx="4206240" cy="475488"/>
+            <a:off x="640080" y="2240280"/>
+            <a:ext cx="4023360" cy="365760"/>
           </a:xfrm>
           <a:prstGeom prst="rect">
             <a:avLst/>
@@ -10524,8 +10316,8 @@
         </p:nvSpPr>
         <p:spPr>
           <a:xfrm>
-            <a:off x="4846320" y="2368296"/>
-            <a:ext cx="1920240" cy="475488"/>
+            <a:off x="4663440" y="2240280"/>
+            <a:ext cx="2011680" cy="365760"/>
           </a:xfrm>
           <a:prstGeom prst="rect">
             <a:avLst/>
@@ -10563,8 +10355,8 @@
         </p:nvSpPr>
         <p:spPr>
           <a:xfrm>
-            <a:off x="6766560" y="2368296"/>
-            <a:ext cx="1920240" cy="475488"/>
+            <a:off x="6675120" y="2240280"/>
+            <a:ext cx="2011680" cy="365760"/>
           </a:xfrm>
           <a:prstGeom prst="rect">
             <a:avLst/>
@@ -10602,8 +10394,8 @@
         </p:nvSpPr>
         <p:spPr>
           <a:xfrm>
-            <a:off x="457200" y="2935224"/>
-            <a:ext cx="8229600" cy="475488"/>
+            <a:off x="457200" y="2679192"/>
+            <a:ext cx="8229600" cy="365760"/>
           </a:xfrm>
           <a:prstGeom prst="roundRect">
             <a:avLst>
@@ -10629,8 +10421,8 @@
         </p:nvSpPr>
         <p:spPr>
           <a:xfrm>
-            <a:off x="640080" y="2935224"/>
-            <a:ext cx="4206240" cy="475488"/>
+            <a:off x="640080" y="2679192"/>
+            <a:ext cx="4023360" cy="365760"/>
           </a:xfrm>
           <a:prstGeom prst="rect">
             <a:avLst/>
@@ -10668,8 +10460,8 @@
         </p:nvSpPr>
         <p:spPr>
           <a:xfrm>
-            <a:off x="4846320" y="2935224"/>
-            <a:ext cx="1920240" cy="475488"/>
+            <a:off x="4663440" y="2679192"/>
+            <a:ext cx="2011680" cy="365760"/>
           </a:xfrm>
           <a:prstGeom prst="rect">
             <a:avLst/>
@@ -10707,8 +10499,8 @@
         </p:nvSpPr>
         <p:spPr>
           <a:xfrm>
-            <a:off x="6766560" y="2935224"/>
-            <a:ext cx="1920240" cy="475488"/>
+            <a:off x="6675120" y="2679192"/>
+            <a:ext cx="2011680" cy="365760"/>
           </a:xfrm>
           <a:prstGeom prst="rect">
             <a:avLst/>
@@ -11183,7 +10975,7 @@
         </p:nvSpPr>
         <p:spPr>
           <a:xfrm>
-            <a:off x="457200" y="2258568"/>
+            <a:off x="457200" y="2240280"/>
             <a:ext cx="8229600" cy="365760"/>
           </a:xfrm>
           <a:prstGeom prst="roundRect">
@@ -11210,7 +11002,7 @@
         </p:nvSpPr>
         <p:spPr>
           <a:xfrm>
-            <a:off x="640080" y="2258568"/>
+            <a:off x="640080" y="2240280"/>
             <a:ext cx="4023360" cy="365760"/>
           </a:xfrm>
           <a:prstGeom prst="rect">
@@ -11249,7 +11041,7 @@
         </p:nvSpPr>
         <p:spPr>
           <a:xfrm>
-            <a:off x="4663440" y="2258568"/>
+            <a:off x="4663440" y="2240280"/>
             <a:ext cx="2011680" cy="365760"/>
           </a:xfrm>
           <a:prstGeom prst="rect">
@@ -11288,7 +11080,7 @@
         </p:nvSpPr>
         <p:spPr>
           <a:xfrm>
-            <a:off x="6675120" y="2258568"/>
+            <a:off x="6675120" y="2240280"/>
             <a:ext cx="2011680" cy="365760"/>
           </a:xfrm>
           <a:prstGeom prst="rect">
@@ -11327,7 +11119,7 @@
         </p:nvSpPr>
         <p:spPr>
           <a:xfrm>
-            <a:off x="457200" y="2715768"/>
+            <a:off x="457200" y="2679192"/>
             <a:ext cx="8229600" cy="365760"/>
           </a:xfrm>
           <a:prstGeom prst="roundRect">
@@ -11354,7 +11146,7 @@
         </p:nvSpPr>
         <p:spPr>
           <a:xfrm>
-            <a:off x="640080" y="2715768"/>
+            <a:off x="640080" y="2679192"/>
             <a:ext cx="4023360" cy="365760"/>
           </a:xfrm>
           <a:prstGeom prst="rect">
@@ -11393,7 +11185,7 @@
         </p:nvSpPr>
         <p:spPr>
           <a:xfrm>
-            <a:off x="4663440" y="2715768"/>
+            <a:off x="4663440" y="2679192"/>
             <a:ext cx="2011680" cy="365760"/>
           </a:xfrm>
           <a:prstGeom prst="rect">
@@ -11432,7 +11224,7 @@
         </p:nvSpPr>
         <p:spPr>
           <a:xfrm>
-            <a:off x="6675120" y="2715768"/>
+            <a:off x="6675120" y="2679192"/>
             <a:ext cx="2011680" cy="365760"/>
           </a:xfrm>
           <a:prstGeom prst="rect">
@@ -11471,7 +11263,7 @@
         </p:nvSpPr>
         <p:spPr>
           <a:xfrm>
-            <a:off x="457200" y="3172968"/>
+            <a:off x="457200" y="3118104"/>
             <a:ext cx="8229600" cy="365760"/>
           </a:xfrm>
           <a:prstGeom prst="roundRect">
@@ -11498,7 +11290,7 @@
         </p:nvSpPr>
         <p:spPr>
           <a:xfrm>
-            <a:off x="640080" y="3172968"/>
+            <a:off x="640080" y="3118104"/>
             <a:ext cx="4023360" cy="365760"/>
           </a:xfrm>
           <a:prstGeom prst="rect">
@@ -11537,7 +11329,7 @@
         </p:nvSpPr>
         <p:spPr>
           <a:xfrm>
-            <a:off x="4663440" y="3172968"/>
+            <a:off x="4663440" y="3118104"/>
             <a:ext cx="2011680" cy="365760"/>
           </a:xfrm>
           <a:prstGeom prst="rect">
@@ -11576,7 +11368,7 @@
         </p:nvSpPr>
         <p:spPr>
           <a:xfrm>
-            <a:off x="6675120" y="3172968"/>
+            <a:off x="6675120" y="3118104"/>
             <a:ext cx="2011680" cy="365760"/>
           </a:xfrm>
           <a:prstGeom prst="rect">
@@ -11615,7 +11407,7 @@
         </p:nvSpPr>
         <p:spPr>
           <a:xfrm>
-            <a:off x="457200" y="3630168"/>
+            <a:off x="457200" y="3557016"/>
             <a:ext cx="8229600" cy="365760"/>
           </a:xfrm>
           <a:prstGeom prst="roundRect">
@@ -11642,7 +11434,7 @@
         </p:nvSpPr>
         <p:spPr>
           <a:xfrm>
-            <a:off x="640080" y="3630168"/>
+            <a:off x="640080" y="3557016"/>
             <a:ext cx="4023360" cy="365760"/>
           </a:xfrm>
           <a:prstGeom prst="rect">
@@ -11681,7 +11473,7 @@
         </p:nvSpPr>
         <p:spPr>
           <a:xfrm>
-            <a:off x="4663440" y="3630168"/>
+            <a:off x="4663440" y="3557016"/>
             <a:ext cx="2011680" cy="365760"/>
           </a:xfrm>
           <a:prstGeom prst="rect">
@@ -11720,7 +11512,7 @@
         </p:nvSpPr>
         <p:spPr>
           <a:xfrm>
-            <a:off x="6675120" y="3630168"/>
+            <a:off x="6675120" y="3557016"/>
             <a:ext cx="2011680" cy="365760"/>
           </a:xfrm>
           <a:prstGeom prst="rect">
@@ -11974,8 +11766,8 @@
         </p:nvSpPr>
         <p:spPr>
           <a:xfrm>
-            <a:off x="4846320" y="1417320"/>
-            <a:ext cx="1920240" cy="320040"/>
+            <a:off x="4663440" y="1417320"/>
+            <a:ext cx="2011680" cy="320040"/>
           </a:xfrm>
           <a:prstGeom prst="rect">
             <a:avLst/>
@@ -12013,8 +11805,8 @@
         </p:nvSpPr>
         <p:spPr>
           <a:xfrm>
-            <a:off x="6766560" y="1417320"/>
-            <a:ext cx="1920240" cy="320040"/>
+            <a:off x="6675120" y="1417320"/>
+            <a:ext cx="2011680" cy="320040"/>
           </a:xfrm>
           <a:prstGeom prst="rect">
             <a:avLst/>
@@ -12053,7 +11845,7 @@
         <p:spPr>
           <a:xfrm>
             <a:off x="457200" y="1801368"/>
-            <a:ext cx="8229600" cy="475488"/>
+            <a:ext cx="8229600" cy="365760"/>
           </a:xfrm>
           <a:prstGeom prst="roundRect">
             <a:avLst>
@@ -12080,7 +11872,7 @@
         <p:spPr>
           <a:xfrm>
             <a:off x="640080" y="1801368"/>
-            <a:ext cx="4206240" cy="475488"/>
+            <a:ext cx="4023360" cy="365760"/>
           </a:xfrm>
           <a:prstGeom prst="rect">
             <a:avLst/>
@@ -12118,8 +11910,8 @@
         </p:nvSpPr>
         <p:spPr>
           <a:xfrm>
-            <a:off x="4846320" y="1801368"/>
-            <a:ext cx="1920240" cy="475488"/>
+            <a:off x="4663440" y="1801368"/>
+            <a:ext cx="2011680" cy="365760"/>
           </a:xfrm>
           <a:prstGeom prst="rect">
             <a:avLst/>
@@ -12157,8 +11949,8 @@
         </p:nvSpPr>
         <p:spPr>
           <a:xfrm>
-            <a:off x="6766560" y="1801368"/>
-            <a:ext cx="1920240" cy="475488"/>
+            <a:off x="6675120" y="1801368"/>
+            <a:ext cx="2011680" cy="365760"/>
           </a:xfrm>
           <a:prstGeom prst="rect">
             <a:avLst/>
@@ -12196,8 +11988,8 @@
         </p:nvSpPr>
         <p:spPr>
           <a:xfrm>
-            <a:off x="457200" y="2368296"/>
-            <a:ext cx="8229600" cy="475488"/>
+            <a:off x="457200" y="2240280"/>
+            <a:ext cx="8229600" cy="365760"/>
           </a:xfrm>
           <a:prstGeom prst="roundRect">
             <a:avLst>
@@ -12223,8 +12015,8 @@
         </p:nvSpPr>
         <p:spPr>
           <a:xfrm>
-            <a:off x="640080" y="2368296"/>
-            <a:ext cx="4206240" cy="475488"/>
+            <a:off x="640080" y="2240280"/>
+            <a:ext cx="4023360" cy="365760"/>
           </a:xfrm>
           <a:prstGeom prst="rect">
             <a:avLst/>
@@ -12262,8 +12054,8 @@
         </p:nvSpPr>
         <p:spPr>
           <a:xfrm>
-            <a:off x="4846320" y="2368296"/>
-            <a:ext cx="1920240" cy="475488"/>
+            <a:off x="4663440" y="2240280"/>
+            <a:ext cx="2011680" cy="365760"/>
           </a:xfrm>
           <a:prstGeom prst="rect">
             <a:avLst/>
@@ -12301,8 +12093,8 @@
         </p:nvSpPr>
         <p:spPr>
           <a:xfrm>
-            <a:off x="6766560" y="2368296"/>
-            <a:ext cx="1920240" cy="475488"/>
+            <a:off x="6675120" y="2240280"/>
+            <a:ext cx="2011680" cy="365760"/>
           </a:xfrm>
           <a:prstGeom prst="rect">
             <a:avLst/>
@@ -12340,8 +12132,8 @@
         </p:nvSpPr>
         <p:spPr>
           <a:xfrm>
-            <a:off x="457200" y="2935224"/>
-            <a:ext cx="8229600" cy="475488"/>
+            <a:off x="457200" y="2679192"/>
+            <a:ext cx="8229600" cy="365760"/>
           </a:xfrm>
           <a:prstGeom prst="roundRect">
             <a:avLst>
@@ -12367,8 +12159,8 @@
         </p:nvSpPr>
         <p:spPr>
           <a:xfrm>
-            <a:off x="640080" y="2935224"/>
-            <a:ext cx="4206240" cy="475488"/>
+            <a:off x="640080" y="2679192"/>
+            <a:ext cx="4023360" cy="365760"/>
           </a:xfrm>
           <a:prstGeom prst="rect">
             <a:avLst/>
@@ -12406,8 +12198,8 @@
         </p:nvSpPr>
         <p:spPr>
           <a:xfrm>
-            <a:off x="4846320" y="2935224"/>
-            <a:ext cx="1920240" cy="475488"/>
+            <a:off x="4663440" y="2679192"/>
+            <a:ext cx="2011680" cy="365760"/>
           </a:xfrm>
           <a:prstGeom prst="rect">
             <a:avLst/>
@@ -12445,8 +12237,8 @@
         </p:nvSpPr>
         <p:spPr>
           <a:xfrm>
-            <a:off x="6766560" y="2935224"/>
-            <a:ext cx="1920240" cy="475488"/>
+            <a:off x="6675120" y="2679192"/>
+            <a:ext cx="2011680" cy="365760"/>
           </a:xfrm>
           <a:prstGeom prst="rect">
             <a:avLst/>
@@ -12484,8 +12276,8 @@
         </p:nvSpPr>
         <p:spPr>
           <a:xfrm>
-            <a:off x="457200" y="3502152"/>
-            <a:ext cx="8229600" cy="475488"/>
+            <a:off x="457200" y="3118104"/>
+            <a:ext cx="8229600" cy="365760"/>
           </a:xfrm>
           <a:prstGeom prst="roundRect">
             <a:avLst>
@@ -12511,8 +12303,8 @@
         </p:nvSpPr>
         <p:spPr>
           <a:xfrm>
-            <a:off x="640080" y="3502152"/>
-            <a:ext cx="4206240" cy="475488"/>
+            <a:off x="640080" y="3118104"/>
+            <a:ext cx="4023360" cy="365760"/>
           </a:xfrm>
           <a:prstGeom prst="rect">
             <a:avLst/>
@@ -12550,8 +12342,8 @@
         </p:nvSpPr>
         <p:spPr>
           <a:xfrm>
-            <a:off x="4846320" y="3502152"/>
-            <a:ext cx="1920240" cy="475488"/>
+            <a:off x="4663440" y="3118104"/>
+            <a:ext cx="2011680" cy="365760"/>
           </a:xfrm>
           <a:prstGeom prst="rect">
             <a:avLst/>
@@ -12589,8 +12381,8 @@
         </p:nvSpPr>
         <p:spPr>
           <a:xfrm>
-            <a:off x="6766560" y="3502152"/>
-            <a:ext cx="1920240" cy="475488"/>
+            <a:off x="6675120" y="3118104"/>
+            <a:ext cx="2011680" cy="365760"/>
           </a:xfrm>
           <a:prstGeom prst="rect">
             <a:avLst/>
@@ -12976,10 +12768,11 @@
                 <a:spcPts val="200"/>
               </a:spcAft>
               <a:buSzPct val="100000"/>
+              <a:buFont typeface="Inter" pitchFamily="34" charset="0"/>
               <a:buChar char="•"/>
             </a:pPr>
             <a:r>
-              <a:rPr lang="en-US" sz="1200" dirty="0">
+              <a:rPr lang="en-US" sz="1050" dirty="0">
                 <a:solidFill>
                   <a:srgbClr val="1B2533"/>
                 </a:solidFill>
@@ -12987,9 +12780,9 @@
                 <a:ea typeface="Inter" pitchFamily="34" charset="-122"/>
                 <a:cs typeface="Inter" pitchFamily="34" charset="-120"/>
               </a:rPr>
-              <a:t>06:20–14:00 · 06:20–14:20</a:t>
-            </a:r>
-            <a:endParaRPr lang="en-US" sz="1200" dirty="0"/>
+              <a:t>06:20–14:00</a:t>
+            </a:r>
+            <a:endParaRPr lang="en-US" sz="1050" dirty="0"/>
           </a:p>
           <a:p>
             <a:pPr marL="152400" indent="-152400">
@@ -12997,10 +12790,11 @@
                 <a:spcPts val="200"/>
               </a:spcAft>
               <a:buSzPct val="100000"/>
+              <a:buFont typeface="Inter" pitchFamily="34" charset="0"/>
               <a:buChar char="•"/>
             </a:pPr>
             <a:r>
-              <a:rPr lang="en-US" sz="1200" dirty="0">
+              <a:rPr lang="en-US" sz="1050" dirty="0">
                 <a:solidFill>
                   <a:srgbClr val="1B2533"/>
                 </a:solidFill>
@@ -13008,9 +12802,9 @@
                 <a:ea typeface="Inter" pitchFamily="34" charset="-122"/>
                 <a:cs typeface="Inter" pitchFamily="34" charset="-120"/>
               </a:rPr>
-              <a:t>06:20–14:50 · 07:15–15:45</a:t>
-            </a:r>
-            <a:endParaRPr lang="en-US" sz="1200" dirty="0"/>
+              <a:t>06:20–14:20</a:t>
+            </a:r>
+            <a:endParaRPr lang="en-US" sz="1050" dirty="0"/>
           </a:p>
           <a:p>
             <a:pPr marL="152400" indent="-152400">
@@ -13018,10 +12812,11 @@
                 <a:spcPts val="200"/>
               </a:spcAft>
               <a:buSzPct val="100000"/>
+              <a:buFont typeface="Inter" pitchFamily="34" charset="0"/>
               <a:buChar char="•"/>
             </a:pPr>
             <a:r>
-              <a:rPr lang="en-US" sz="1200" dirty="0">
+              <a:rPr lang="en-US" sz="1050" dirty="0">
                 <a:solidFill>
                   <a:srgbClr val="1B2533"/>
                 </a:solidFill>
@@ -13029,9 +12824,9 @@
                 <a:ea typeface="Inter" pitchFamily="34" charset="-122"/>
                 <a:cs typeface="Inter" pitchFamily="34" charset="-120"/>
               </a:rPr>
-              <a:t>08:00–16:30 · 12:00–20:00</a:t>
-            </a:r>
-            <a:endParaRPr lang="en-US" sz="1200" dirty="0"/>
+              <a:t>06:20–14:50</a:t>
+            </a:r>
+            <a:endParaRPr lang="en-US" sz="1050" dirty="0"/>
           </a:p>
           <a:p>
             <a:pPr marL="152400" indent="-152400">
@@ -13039,10 +12834,11 @@
                 <a:spcPts val="200"/>
               </a:spcAft>
               <a:buSzPct val="100000"/>
+              <a:buFont typeface="Inter" pitchFamily="34" charset="0"/>
               <a:buChar char="•"/>
             </a:pPr>
             <a:r>
-              <a:rPr lang="en-US" sz="1200" dirty="0">
+              <a:rPr lang="en-US" sz="1050" dirty="0">
                 <a:solidFill>
                   <a:srgbClr val="1B2533"/>
                 </a:solidFill>
@@ -13050,9 +12846,9 @@
                 <a:ea typeface="Inter" pitchFamily="34" charset="-122"/>
                 <a:cs typeface="Inter" pitchFamily="34" charset="-120"/>
               </a:rPr>
-              <a:t>14:00–22:30 · 14:30–22:00</a:t>
-            </a:r>
-            <a:endParaRPr lang="en-US" sz="1200" dirty="0"/>
+              <a:t>07:15–15:45</a:t>
+            </a:r>
+            <a:endParaRPr lang="en-US" sz="1050" dirty="0"/>
           </a:p>
           <a:p>
             <a:pPr marL="152400" indent="-152400">
@@ -13060,10 +12856,11 @@
                 <a:spcPts val="200"/>
               </a:spcAft>
               <a:buSzPct val="100000"/>
+              <a:buFont typeface="Inter" pitchFamily="34" charset="0"/>
               <a:buChar char="•"/>
             </a:pPr>
             <a:r>
-              <a:rPr lang="en-US" sz="1200" dirty="0">
+              <a:rPr lang="en-US" sz="1050" dirty="0">
                 <a:solidFill>
                   <a:srgbClr val="1B2533"/>
                 </a:solidFill>
@@ -13071,9 +12868,97 @@
                 <a:ea typeface="Inter" pitchFamily="34" charset="-122"/>
                 <a:cs typeface="Inter" pitchFamily="34" charset="-120"/>
               </a:rPr>
+              <a:t>08:00–16:30</a:t>
+            </a:r>
+            <a:endParaRPr lang="en-US" sz="1050" dirty="0"/>
+          </a:p>
+          <a:p>
+            <a:pPr marL="152400" indent="-152400">
+              <a:spcAft>
+                <a:spcPts val="200"/>
+              </a:spcAft>
+              <a:buSzPct val="100000"/>
+              <a:buFont typeface="Inter" pitchFamily="34" charset="0"/>
+              <a:buChar char="•"/>
+            </a:pPr>
+            <a:r>
+              <a:rPr lang="en-US" sz="1050" dirty="0">
+                <a:solidFill>
+                  <a:srgbClr val="1B2533"/>
+                </a:solidFill>
+                <a:latin typeface="Inter" pitchFamily="34" charset="0"/>
+                <a:ea typeface="Inter" pitchFamily="34" charset="-122"/>
+                <a:cs typeface="Inter" pitchFamily="34" charset="-120"/>
+              </a:rPr>
+              <a:t>12:00–20:00</a:t>
+            </a:r>
+            <a:endParaRPr lang="en-US" sz="1050" dirty="0"/>
+          </a:p>
+          <a:p>
+            <a:pPr marL="152400" indent="-152400">
+              <a:spcAft>
+                <a:spcPts val="200"/>
+              </a:spcAft>
+              <a:buSzPct val="100000"/>
+              <a:buFont typeface="Inter" pitchFamily="34" charset="0"/>
+              <a:buChar char="•"/>
+            </a:pPr>
+            <a:r>
+              <a:rPr lang="en-US" sz="1050" dirty="0">
+                <a:solidFill>
+                  <a:srgbClr val="1B2533"/>
+                </a:solidFill>
+                <a:latin typeface="Inter" pitchFamily="34" charset="0"/>
+                <a:ea typeface="Inter" pitchFamily="34" charset="-122"/>
+                <a:cs typeface="Inter" pitchFamily="34" charset="-120"/>
+              </a:rPr>
+              <a:t>14:00–22:30</a:t>
+            </a:r>
+            <a:endParaRPr lang="en-US" sz="1050" dirty="0"/>
+          </a:p>
+          <a:p>
+            <a:pPr marL="152400" indent="-152400">
+              <a:spcAft>
+                <a:spcPts val="200"/>
+              </a:spcAft>
+              <a:buSzPct val="100000"/>
+              <a:buFont typeface="Inter" pitchFamily="34" charset="0"/>
+              <a:buChar char="•"/>
+            </a:pPr>
+            <a:r>
+              <a:rPr lang="en-US" sz="1050" dirty="0">
+                <a:solidFill>
+                  <a:srgbClr val="1B2533"/>
+                </a:solidFill>
+                <a:latin typeface="Inter" pitchFamily="34" charset="0"/>
+                <a:ea typeface="Inter" pitchFamily="34" charset="-122"/>
+                <a:cs typeface="Inter" pitchFamily="34" charset="-120"/>
+              </a:rPr>
+              <a:t>14:30–22:00</a:t>
+            </a:r>
+            <a:endParaRPr lang="en-US" sz="1050" dirty="0"/>
+          </a:p>
+          <a:p>
+            <a:pPr marL="152400" indent="-152400">
+              <a:spcAft>
+                <a:spcPts val="200"/>
+              </a:spcAft>
+              <a:buSzPct val="100000"/>
+              <a:buFont typeface="Inter" pitchFamily="34" charset="0"/>
+              <a:buChar char="•"/>
+            </a:pPr>
+            <a:r>
+              <a:rPr lang="en-US" sz="1050" dirty="0">
+                <a:solidFill>
+                  <a:srgbClr val="1B2533"/>
+                </a:solidFill>
+                <a:latin typeface="Inter" pitchFamily="34" charset="0"/>
+                <a:ea typeface="Inter" pitchFamily="34" charset="-122"/>
+                <a:cs typeface="Inter" pitchFamily="34" charset="-120"/>
+              </a:rPr>
               <a:t>15:15–23:55</a:t>
             </a:r>
-            <a:endParaRPr lang="en-US" sz="1200" dirty="0"/>
+            <a:endParaRPr lang="en-US" sz="1050" dirty="0"/>
           </a:p>
         </p:txBody>
       </p:sp>
@@ -13238,6 +13123,7 @@
                 <a:spcPts val="100"/>
               </a:spcAft>
               <a:buSzPct val="100000"/>
+              <a:buFont typeface="Inter" pitchFamily="34" charset="0"/>
               <a:buChar char="•"/>
             </a:pPr>
             <a:r>
@@ -13259,6 +13145,7 @@
                 <a:spcPts val="100"/>
               </a:spcAft>
               <a:buSzPct val="100000"/>
+              <a:buFont typeface="Inter" pitchFamily="34" charset="0"/>
               <a:buChar char="•"/>
             </a:pPr>
             <a:r>
@@ -13280,6 +13167,7 @@
                 <a:spcPts val="100"/>
               </a:spcAft>
               <a:buSzPct val="100000"/>
+              <a:buFont typeface="Inter" pitchFamily="34" charset="0"/>
               <a:buChar char="•"/>
             </a:pPr>
             <a:r>
@@ -13324,6 +13212,7 @@
                 <a:spcPts val="100"/>
               </a:spcAft>
               <a:buSzPct val="100000"/>
+              <a:buFont typeface="Inter" pitchFamily="34" charset="0"/>
               <a:buChar char="•"/>
             </a:pPr>
             <a:r>
@@ -13368,6 +13257,7 @@
                 <a:spcPts val="100"/>
               </a:spcAft>
               <a:buSzPct val="100000"/>
+              <a:buFont typeface="Inter" pitchFamily="34" charset="0"/>
               <a:buChar char="•"/>
             </a:pPr>
             <a:r>
@@ -13389,6 +13279,7 @@
                 <a:spcPts val="100"/>
               </a:spcAft>
               <a:buSzPct val="100000"/>
+              <a:buFont typeface="Inter" pitchFamily="34" charset="0"/>
               <a:buChar char="•"/>
             </a:pPr>
             <a:r>
@@ -13410,6 +13301,7 @@
                 <a:spcPts val="100"/>
               </a:spcAft>
               <a:buSzPct val="100000"/>
+              <a:buFont typeface="Inter" pitchFamily="34" charset="0"/>
               <a:buChar char="•"/>
             </a:pPr>
             <a:r>
@@ -13872,7 +13764,7 @@
         </p:nvSpPr>
         <p:spPr>
           <a:xfrm>
-            <a:off x="457200" y="2258568"/>
+            <a:off x="457200" y="2240280"/>
             <a:ext cx="8229600" cy="365760"/>
           </a:xfrm>
           <a:prstGeom prst="roundRect">
@@ -13899,7 +13791,7 @@
         </p:nvSpPr>
         <p:spPr>
           <a:xfrm>
-            <a:off x="640080" y="2258568"/>
+            <a:off x="640080" y="2240280"/>
             <a:ext cx="4023360" cy="365760"/>
           </a:xfrm>
           <a:prstGeom prst="rect">
@@ -13938,7 +13830,7 @@
         </p:nvSpPr>
         <p:spPr>
           <a:xfrm>
-            <a:off x="4663440" y="2258568"/>
+            <a:off x="4663440" y="2240280"/>
             <a:ext cx="2011680" cy="365760"/>
           </a:xfrm>
           <a:prstGeom prst="rect">
@@ -13977,7 +13869,7 @@
         </p:nvSpPr>
         <p:spPr>
           <a:xfrm>
-            <a:off x="6675120" y="2258568"/>
+            <a:off x="6675120" y="2240280"/>
             <a:ext cx="2011680" cy="365760"/>
           </a:xfrm>
           <a:prstGeom prst="rect">
@@ -14016,7 +13908,7 @@
         </p:nvSpPr>
         <p:spPr>
           <a:xfrm>
-            <a:off x="457200" y="2715768"/>
+            <a:off x="457200" y="2679192"/>
             <a:ext cx="8229600" cy="365760"/>
           </a:xfrm>
           <a:prstGeom prst="roundRect">
@@ -14043,7 +13935,7 @@
         </p:nvSpPr>
         <p:spPr>
           <a:xfrm>
-            <a:off x="640080" y="2715768"/>
+            <a:off x="640080" y="2679192"/>
             <a:ext cx="4023360" cy="365760"/>
           </a:xfrm>
           <a:prstGeom prst="rect">
@@ -14082,7 +13974,7 @@
         </p:nvSpPr>
         <p:spPr>
           <a:xfrm>
-            <a:off x="4663440" y="2715768"/>
+            <a:off x="4663440" y="2679192"/>
             <a:ext cx="2011680" cy="365760"/>
           </a:xfrm>
           <a:prstGeom prst="rect">
@@ -14121,7 +14013,7 @@
         </p:nvSpPr>
         <p:spPr>
           <a:xfrm>
-            <a:off x="6675120" y="2715768"/>
+            <a:off x="6675120" y="2679192"/>
             <a:ext cx="2011680" cy="365760"/>
           </a:xfrm>
           <a:prstGeom prst="rect">
@@ -14160,7 +14052,7 @@
         </p:nvSpPr>
         <p:spPr>
           <a:xfrm>
-            <a:off x="457200" y="3172968"/>
+            <a:off x="457200" y="3118104"/>
             <a:ext cx="8229600" cy="365760"/>
           </a:xfrm>
           <a:prstGeom prst="roundRect">
@@ -14187,7 +14079,7 @@
         </p:nvSpPr>
         <p:spPr>
           <a:xfrm>
-            <a:off x="640080" y="3172968"/>
+            <a:off x="640080" y="3118104"/>
             <a:ext cx="4023360" cy="365760"/>
           </a:xfrm>
           <a:prstGeom prst="rect">
@@ -14226,7 +14118,7 @@
         </p:nvSpPr>
         <p:spPr>
           <a:xfrm>
-            <a:off x="4663440" y="3172968"/>
+            <a:off x="4663440" y="3118104"/>
             <a:ext cx="2011680" cy="365760"/>
           </a:xfrm>
           <a:prstGeom prst="rect">
@@ -14265,7 +14157,7 @@
         </p:nvSpPr>
         <p:spPr>
           <a:xfrm>
-            <a:off x="6675120" y="3172968"/>
+            <a:off x="6675120" y="3118104"/>
             <a:ext cx="2011680" cy="365760"/>
           </a:xfrm>
           <a:prstGeom prst="rect">
@@ -14304,7 +14196,7 @@
         </p:nvSpPr>
         <p:spPr>
           <a:xfrm>
-            <a:off x="457200" y="3630168"/>
+            <a:off x="457200" y="3557016"/>
             <a:ext cx="8229600" cy="365760"/>
           </a:xfrm>
           <a:prstGeom prst="roundRect">
@@ -14331,7 +14223,7 @@
         </p:nvSpPr>
         <p:spPr>
           <a:xfrm>
-            <a:off x="640080" y="3630168"/>
+            <a:off x="640080" y="3557016"/>
             <a:ext cx="4023360" cy="365760"/>
           </a:xfrm>
           <a:prstGeom prst="rect">
@@ -14370,7 +14262,7 @@
         </p:nvSpPr>
         <p:spPr>
           <a:xfrm>
-            <a:off x="4663440" y="3630168"/>
+            <a:off x="4663440" y="3557016"/>
             <a:ext cx="2011680" cy="365760"/>
           </a:xfrm>
           <a:prstGeom prst="rect">
@@ -14409,7 +14301,7 @@
         </p:nvSpPr>
         <p:spPr>
           <a:xfrm>
-            <a:off x="6675120" y="3630168"/>
+            <a:off x="6675120" y="3557016"/>
             <a:ext cx="2011680" cy="365760"/>
           </a:xfrm>
           <a:prstGeom prst="rect">

--- a/docs/links-26/presentations/Second-Edition-for-colleagues.pptx
+++ b/docs/links-26/presentations/Second-Edition-for-colleagues.pptx
@@ -1132,7 +1132,7 @@
           <a:p>
             <a:r>
               <a:rPr lang="en-US" dirty="0"/>
-              <a:t>This is the whole pitch on one slide. Same 35-hour week as now. Never more than six days in a row. Seven full weekends off in every 26 weeks, against four in 20 today, and never more than five weeks apart — though each person works about two more Saturdays a year. Every week is all earlies or all lates, and 18 of the 21 working weeks keep one shift time Monday to Friday. Nine of the fifteen shift times are ones people already work. And every closing shift is shorter: the weekday and Saturday closers by 30 minutes, the Sunday closer by 45. Say the leave cost here too, before anyone asks: four full weeks off takes 15 days’ leave rather than 14, and the best 14-day stretch is 28 days off rather than 30; the average is the same and the worst a day better. A cover week is one of the five weeks in 26 with no fixed shifts: its four duties are placed later to cover leave and sickness; the fixed rota is the other 21 weeks, whose shifts are set.</a:t>
+              <a:t>This is the whole pitch on one slide. Same 35-hour week as now. Never more than six days in a row. Seven full weekends off in every 26 weeks, against four in 20 today, and never more than five weeks apart — though each person works about two more Saturdays a year. Every week is all earlies or all lates, and 18 of the 21 working weeks keep one shift time Monday to Friday. Nine of the fifteen shift times are ones people already work. And every closing shift is shorter: the weekday and Saturday closers by 30 minutes, the Sunday closer by 45. Say the leave cost here too, before anyone asks: four full weeks off, Sunday to Saturday, takes 15 days’ leave rather than 14, and the best 14-day stretch is 28 days off rather than 30; the average is the same and the worst a day better. A cover week is one of the five weeks in 26 with no fixed shifts: its four duties are placed later to cover leave and sickness; the fixed rota is the other 21 weeks, whose shifts are set.</a:t>
             </a:r>
             <a:endParaRPr lang="en-US" dirty="0"/>
           </a:p>
@@ -3350,7 +3350,7 @@
                 <a:ea typeface="Inter" pitchFamily="34" charset="-122"/>
                 <a:cs typeface="Inter" pitchFamily="34" charset="-120"/>
               </a:rPr>
-              <a:t>Best stretch 28 days, not 30; four full weeks off costs 15 days’ leave, not 14. Average the same, worst a day better.</a:t>
+              <a:t>Best stretch 28 days, not 30; four full weeks off, Sunday to Saturday, costs 15 days’ leave, not 14. Average the same, worst a day better.</a:t>
             </a:r>
             <a:endParaRPr lang="en-US" sz="1400" dirty="0"/>
           </a:p>

--- a/docs/links-26/presentations/Second-Edition-for-colleagues.pptx
+++ b/docs/links-26/presentations/Second-Edition-for-colleagues.pptx
@@ -1132,7 +1132,7 @@
           <a:p>
             <a:r>
               <a:rPr lang="en-US" dirty="0"/>
-              <a:t>This is the whole pitch on one slide. Same 35-hour week as now. Never more than six days in a row. Seven full weekends off in every 26 weeks, against four in 20 today, and never more than five weeks apart — though each person works about two more Saturdays a year. Every week is all earlies or all lates, and 18 of the 21 working weeks keep one shift time Monday to Friday. Nine of the fifteen shift times are ones people already work. And every closing shift is shorter: the weekday and Saturday closers by 30 minutes, the Sunday closer by 45. Say the leave cost here too, before anyone asks: four full weeks off takes 15 days’ leave rather than 14, and the best 14-day stretch is 28 days off rather than 30; the average is the same and the worst a day better. A cover week is one of the five weeks in 26 with no fixed shifts: its four duties are placed later to cover leave and sickness; the fixed rota is the other 21 weeks, whose shifts are set.</a:t>
+              <a:t>This is the whole pitch on one slide. Same 35-hour week as now. Never more than six days in a row. Seven full weekends off in every 26 weeks, against four in 20 today, and never more than five weeks apart — though each person works about two more Saturdays a year. Every week is all earlies or all lates, and 18 of the 21 working weeks keep one shift time Monday to Friday. Nine of the fifteen shift times are ones people already work. And every closing shift is shorter: the weekday and Saturday closers by 30 minutes, the Sunday closer by 45. Say the leave cost here too, before anyone asks: four full weeks off, Sunday to Saturday, takes 15 days’ leave rather than 14, and the best 14-day stretch is 28 days off rather than 30; the average is the same and the worst a day better. A cover week is one of the five weeks in 26 with no fixed shifts: its four duties are placed later to cover leave and sickness; the fixed rota is the other 21 weeks, whose shifts are set.</a:t>
             </a:r>
             <a:endParaRPr lang="en-US" dirty="0"/>
           </a:p>
@@ -2391,7 +2391,7 @@
                 <a:ea typeface="Inter" pitchFamily="34" charset="-122"/>
                 <a:cs typeface="Inter" pitchFamily="34" charset="-120"/>
               </a:rPr>
-              <a:t>Each week is all earlies or all lates; the green bars are the full weekends off — where you start is decided later</a:t>
+              <a:t>The green bars are the full weekends off; where you start is decided later</a:t>
             </a:r>
             <a:endParaRPr lang="en-US" sz="1500" dirty="0"/>
           </a:p>
@@ -2414,7 +2414,7 @@
         <p:spPr>
           <a:xfrm>
             <a:off x="457200" y="1371600"/>
-            <a:ext cx="8229600" cy="2651760"/>
+            <a:ext cx="8229600" cy="2575381"/>
           </a:xfrm>
           <a:prstGeom prst="rect">
             <a:avLst/>
@@ -2644,8 +2644,8 @@
         </p:nvSpPr>
         <p:spPr>
           <a:xfrm>
-            <a:off x="4297680" y="1417320"/>
-            <a:ext cx="2194560" cy="320040"/>
+            <a:off x="4663440" y="1417320"/>
+            <a:ext cx="2011680" cy="320040"/>
           </a:xfrm>
           <a:prstGeom prst="rect">
             <a:avLst/>
@@ -2683,8 +2683,8 @@
         </p:nvSpPr>
         <p:spPr>
           <a:xfrm>
-            <a:off x="6492240" y="1417320"/>
-            <a:ext cx="2194560" cy="320040"/>
+            <a:off x="6675120" y="1417320"/>
+            <a:ext cx="2011680" cy="320040"/>
           </a:xfrm>
           <a:prstGeom prst="rect">
             <a:avLst/>
@@ -2723,7 +2723,7 @@
         <p:spPr>
           <a:xfrm>
             <a:off x="457200" y="1801368"/>
-            <a:ext cx="8229600" cy="475488"/>
+            <a:ext cx="8229600" cy="365760"/>
           </a:xfrm>
           <a:prstGeom prst="roundRect">
             <a:avLst>
@@ -2750,7 +2750,7 @@
         <p:spPr>
           <a:xfrm>
             <a:off x="640080" y="1801368"/>
-            <a:ext cx="3657600" cy="475488"/>
+            <a:ext cx="4023360" cy="365760"/>
           </a:xfrm>
           <a:prstGeom prst="rect">
             <a:avLst/>
@@ -2788,8 +2788,8 @@
         </p:nvSpPr>
         <p:spPr>
           <a:xfrm>
-            <a:off x="4297680" y="1801368"/>
-            <a:ext cx="2194560" cy="475488"/>
+            <a:off x="4663440" y="1801368"/>
+            <a:ext cx="2011680" cy="365760"/>
           </a:xfrm>
           <a:prstGeom prst="rect">
             <a:avLst/>
@@ -2827,8 +2827,8 @@
         </p:nvSpPr>
         <p:spPr>
           <a:xfrm>
-            <a:off x="6492240" y="1801368"/>
-            <a:ext cx="2194560" cy="475488"/>
+            <a:off x="6675120" y="1801368"/>
+            <a:ext cx="2011680" cy="365760"/>
           </a:xfrm>
           <a:prstGeom prst="rect">
             <a:avLst/>
@@ -2866,8 +2866,8 @@
         </p:nvSpPr>
         <p:spPr>
           <a:xfrm>
-            <a:off x="457200" y="2368296"/>
-            <a:ext cx="8229600" cy="475488"/>
+            <a:off x="457200" y="2240280"/>
+            <a:ext cx="8229600" cy="365760"/>
           </a:xfrm>
           <a:prstGeom prst="roundRect">
             <a:avLst>
@@ -2893,8 +2893,8 @@
         </p:nvSpPr>
         <p:spPr>
           <a:xfrm>
-            <a:off x="640080" y="2368296"/>
-            <a:ext cx="3657600" cy="475488"/>
+            <a:off x="640080" y="2240280"/>
+            <a:ext cx="4023360" cy="365760"/>
           </a:xfrm>
           <a:prstGeom prst="rect">
             <a:avLst/>
@@ -2932,8 +2932,8 @@
         </p:nvSpPr>
         <p:spPr>
           <a:xfrm>
-            <a:off x="4297680" y="2368296"/>
-            <a:ext cx="2194560" cy="475488"/>
+            <a:off x="4663440" y="2240280"/>
+            <a:ext cx="2011680" cy="365760"/>
           </a:xfrm>
           <a:prstGeom prst="rect">
             <a:avLst/>
@@ -2971,8 +2971,8 @@
         </p:nvSpPr>
         <p:spPr>
           <a:xfrm>
-            <a:off x="6492240" y="2368296"/>
-            <a:ext cx="2194560" cy="475488"/>
+            <a:off x="6675120" y="2240280"/>
+            <a:ext cx="2011680" cy="365760"/>
           </a:xfrm>
           <a:prstGeom prst="rect">
             <a:avLst/>
@@ -3010,8 +3010,8 @@
         </p:nvSpPr>
         <p:spPr>
           <a:xfrm>
-            <a:off x="457200" y="2935224"/>
-            <a:ext cx="8229600" cy="475488"/>
+            <a:off x="457200" y="2679192"/>
+            <a:ext cx="8229600" cy="365760"/>
           </a:xfrm>
           <a:prstGeom prst="roundRect">
             <a:avLst>
@@ -3037,8 +3037,8 @@
         </p:nvSpPr>
         <p:spPr>
           <a:xfrm>
-            <a:off x="640080" y="2935224"/>
-            <a:ext cx="3657600" cy="475488"/>
+            <a:off x="640080" y="2679192"/>
+            <a:ext cx="4023360" cy="365760"/>
           </a:xfrm>
           <a:prstGeom prst="rect">
             <a:avLst/>
@@ -3076,8 +3076,8 @@
         </p:nvSpPr>
         <p:spPr>
           <a:xfrm>
-            <a:off x="4297680" y="2935224"/>
-            <a:ext cx="2194560" cy="475488"/>
+            <a:off x="4663440" y="2679192"/>
+            <a:ext cx="2011680" cy="365760"/>
           </a:xfrm>
           <a:prstGeom prst="rect">
             <a:avLst/>
@@ -3115,8 +3115,8 @@
         </p:nvSpPr>
         <p:spPr>
           <a:xfrm>
-            <a:off x="6492240" y="2935224"/>
-            <a:ext cx="2194560" cy="475488"/>
+            <a:off x="6675120" y="2679192"/>
+            <a:ext cx="2011680" cy="365760"/>
           </a:xfrm>
           <a:prstGeom prst="rect">
             <a:avLst/>
@@ -3154,8 +3154,8 @@
         </p:nvSpPr>
         <p:spPr>
           <a:xfrm>
-            <a:off x="457200" y="3502152"/>
-            <a:ext cx="8229600" cy="475488"/>
+            <a:off x="457200" y="3118104"/>
+            <a:ext cx="8229600" cy="365760"/>
           </a:xfrm>
           <a:prstGeom prst="roundRect">
             <a:avLst>
@@ -3181,8 +3181,8 @@
         </p:nvSpPr>
         <p:spPr>
           <a:xfrm>
-            <a:off x="640080" y="3502152"/>
-            <a:ext cx="3657600" cy="475488"/>
+            <a:off x="640080" y="3118104"/>
+            <a:ext cx="4023360" cy="365760"/>
           </a:xfrm>
           <a:prstGeom prst="rect">
             <a:avLst/>
@@ -3220,8 +3220,8 @@
         </p:nvSpPr>
         <p:spPr>
           <a:xfrm>
-            <a:off x="4297680" y="3502152"/>
-            <a:ext cx="2194560" cy="475488"/>
+            <a:off x="4663440" y="3118104"/>
+            <a:ext cx="2011680" cy="365760"/>
           </a:xfrm>
           <a:prstGeom prst="rect">
             <a:avLst/>
@@ -3259,8 +3259,8 @@
         </p:nvSpPr>
         <p:spPr>
           <a:xfrm>
-            <a:off x="6492240" y="3502152"/>
-            <a:ext cx="2194560" cy="475488"/>
+            <a:off x="6675120" y="3118104"/>
+            <a:ext cx="2011680" cy="365760"/>
           </a:xfrm>
           <a:prstGeom prst="rect">
             <a:avLst/>
@@ -3350,7 +3350,7 @@
                 <a:ea typeface="Inter" pitchFamily="34" charset="-122"/>
                 <a:cs typeface="Inter" pitchFamily="34" charset="-120"/>
               </a:rPr>
-              <a:t>Best stretch 28 days, not 30; four full weeks off costs 15 days’ leave, not 14. Average the same, worst a day better.</a:t>
+              <a:t>Best stretch 28 days, not 30; four full weeks off, Sunday to Saturday, costs 15 days’ leave, not 14. Average the same, worst a day better.</a:t>
             </a:r>
             <a:endParaRPr lang="en-US" sz="1400" dirty="0"/>
           </a:p>
@@ -3513,8 +3513,8 @@
         </p:nvSpPr>
         <p:spPr>
           <a:xfrm>
-            <a:off x="4297680" y="1417320"/>
-            <a:ext cx="2194560" cy="320040"/>
+            <a:off x="4663440" y="1417320"/>
+            <a:ext cx="2011680" cy="320040"/>
           </a:xfrm>
           <a:prstGeom prst="rect">
             <a:avLst/>
@@ -3552,8 +3552,8 @@
         </p:nvSpPr>
         <p:spPr>
           <a:xfrm>
-            <a:off x="6492240" y="1417320"/>
-            <a:ext cx="2194560" cy="320040"/>
+            <a:off x="6675120" y="1417320"/>
+            <a:ext cx="2011680" cy="320040"/>
           </a:xfrm>
           <a:prstGeom prst="rect">
             <a:avLst/>
@@ -3592,7 +3592,7 @@
         <p:spPr>
           <a:xfrm>
             <a:off x="457200" y="1801368"/>
-            <a:ext cx="8229600" cy="475488"/>
+            <a:ext cx="8229600" cy="365760"/>
           </a:xfrm>
           <a:prstGeom prst="roundRect">
             <a:avLst>
@@ -3619,7 +3619,7 @@
         <p:spPr>
           <a:xfrm>
             <a:off x="640080" y="1801368"/>
-            <a:ext cx="3657600" cy="475488"/>
+            <a:ext cx="4023360" cy="365760"/>
           </a:xfrm>
           <a:prstGeom prst="rect">
             <a:avLst/>
@@ -3657,8 +3657,8 @@
         </p:nvSpPr>
         <p:spPr>
           <a:xfrm>
-            <a:off x="4297680" y="1801368"/>
-            <a:ext cx="2194560" cy="475488"/>
+            <a:off x="4663440" y="1801368"/>
+            <a:ext cx="2011680" cy="365760"/>
           </a:xfrm>
           <a:prstGeom prst="rect">
             <a:avLst/>
@@ -3696,8 +3696,8 @@
         </p:nvSpPr>
         <p:spPr>
           <a:xfrm>
-            <a:off x="6492240" y="1801368"/>
-            <a:ext cx="2194560" cy="475488"/>
+            <a:off x="6675120" y="1801368"/>
+            <a:ext cx="2011680" cy="365760"/>
           </a:xfrm>
           <a:prstGeom prst="rect">
             <a:avLst/>
@@ -3735,8 +3735,8 @@
         </p:nvSpPr>
         <p:spPr>
           <a:xfrm>
-            <a:off x="457200" y="2368296"/>
-            <a:ext cx="8229600" cy="475488"/>
+            <a:off x="457200" y="2240280"/>
+            <a:ext cx="8229600" cy="365760"/>
           </a:xfrm>
           <a:prstGeom prst="roundRect">
             <a:avLst>
@@ -3762,8 +3762,8 @@
         </p:nvSpPr>
         <p:spPr>
           <a:xfrm>
-            <a:off x="640080" y="2368296"/>
-            <a:ext cx="3657600" cy="475488"/>
+            <a:off x="640080" y="2240280"/>
+            <a:ext cx="4023360" cy="365760"/>
           </a:xfrm>
           <a:prstGeom prst="rect">
             <a:avLst/>
@@ -3801,8 +3801,8 @@
         </p:nvSpPr>
         <p:spPr>
           <a:xfrm>
-            <a:off x="4297680" y="2368296"/>
-            <a:ext cx="2194560" cy="475488"/>
+            <a:off x="4663440" y="2240280"/>
+            <a:ext cx="2011680" cy="365760"/>
           </a:xfrm>
           <a:prstGeom prst="rect">
             <a:avLst/>
@@ -3840,8 +3840,8 @@
         </p:nvSpPr>
         <p:spPr>
           <a:xfrm>
-            <a:off x="6492240" y="2368296"/>
-            <a:ext cx="2194560" cy="475488"/>
+            <a:off x="6675120" y="2240280"/>
+            <a:ext cx="2011680" cy="365760"/>
           </a:xfrm>
           <a:prstGeom prst="rect">
             <a:avLst/>
@@ -3879,8 +3879,8 @@
         </p:nvSpPr>
         <p:spPr>
           <a:xfrm>
-            <a:off x="457200" y="2935224"/>
-            <a:ext cx="8229600" cy="475488"/>
+            <a:off x="457200" y="2679192"/>
+            <a:ext cx="8229600" cy="365760"/>
           </a:xfrm>
           <a:prstGeom prst="roundRect">
             <a:avLst>
@@ -3906,8 +3906,8 @@
         </p:nvSpPr>
         <p:spPr>
           <a:xfrm>
-            <a:off x="640080" y="2935224"/>
-            <a:ext cx="3657600" cy="475488"/>
+            <a:off x="640080" y="2679192"/>
+            <a:ext cx="4023360" cy="365760"/>
           </a:xfrm>
           <a:prstGeom prst="rect">
             <a:avLst/>
@@ -3945,8 +3945,8 @@
         </p:nvSpPr>
         <p:spPr>
           <a:xfrm>
-            <a:off x="4297680" y="2935224"/>
-            <a:ext cx="2194560" cy="475488"/>
+            <a:off x="4663440" y="2679192"/>
+            <a:ext cx="2011680" cy="365760"/>
           </a:xfrm>
           <a:prstGeom prst="rect">
             <a:avLst/>
@@ -3984,8 +3984,8 @@
         </p:nvSpPr>
         <p:spPr>
           <a:xfrm>
-            <a:off x="6492240" y="2935224"/>
-            <a:ext cx="2194560" cy="475488"/>
+            <a:off x="6675120" y="2679192"/>
+            <a:ext cx="2011680" cy="365760"/>
           </a:xfrm>
           <a:prstGeom prst="rect">
             <a:avLst/>
@@ -4023,8 +4023,8 @@
         </p:nvSpPr>
         <p:spPr>
           <a:xfrm>
-            <a:off x="457200" y="3502152"/>
-            <a:ext cx="8229600" cy="475488"/>
+            <a:off x="457200" y="3118104"/>
+            <a:ext cx="8229600" cy="365760"/>
           </a:xfrm>
           <a:prstGeom prst="roundRect">
             <a:avLst>
@@ -4050,8 +4050,8 @@
         </p:nvSpPr>
         <p:spPr>
           <a:xfrm>
-            <a:off x="640080" y="3502152"/>
-            <a:ext cx="3657600" cy="475488"/>
+            <a:off x="640080" y="3118104"/>
+            <a:ext cx="4023360" cy="365760"/>
           </a:xfrm>
           <a:prstGeom prst="rect">
             <a:avLst/>
@@ -4089,8 +4089,8 @@
         </p:nvSpPr>
         <p:spPr>
           <a:xfrm>
-            <a:off x="4297680" y="3502152"/>
-            <a:ext cx="2194560" cy="475488"/>
+            <a:off x="4663440" y="3118104"/>
+            <a:ext cx="2011680" cy="365760"/>
           </a:xfrm>
           <a:prstGeom prst="rect">
             <a:avLst/>
@@ -4128,8 +4128,8 @@
         </p:nvSpPr>
         <p:spPr>
           <a:xfrm>
-            <a:off x="6492240" y="3502152"/>
-            <a:ext cx="2194560" cy="475488"/>
+            <a:off x="6675120" y="3118104"/>
+            <a:ext cx="2011680" cy="365760"/>
           </a:xfrm>
           <a:prstGeom prst="rect">
             <a:avLst/>
@@ -4383,7 +4383,7 @@
         <p:spPr>
           <a:xfrm>
             <a:off x="457200" y="1371600"/>
-            <a:ext cx="4023360" cy="975272"/>
+            <a:ext cx="4023360" cy="822960"/>
           </a:xfrm>
           <a:prstGeom prst="roundRect">
             <a:avLst>
@@ -4409,8 +4409,8 @@
         </p:nvSpPr>
         <p:spPr>
           <a:xfrm>
-            <a:off x="640080" y="1530052"/>
-            <a:ext cx="3703320" cy="310896"/>
+            <a:off x="640080" y="1444752"/>
+            <a:ext cx="3703320" cy="274320"/>
           </a:xfrm>
           <a:prstGeom prst="rect">
             <a:avLst/>
@@ -4448,7 +4448,7 @@
         </p:nvSpPr>
         <p:spPr>
           <a:xfrm>
-            <a:off x="640080" y="1840948"/>
+            <a:off x="640080" y="1719072"/>
             <a:ext cx="3657600" cy="347472"/>
           </a:xfrm>
           <a:prstGeom prst="rect">
@@ -4473,7 +4473,7 @@
                 <a:ea typeface="Inter" pitchFamily="34" charset="-122"/>
                 <a:cs typeface="Inter" pitchFamily="34" charset="-120"/>
               </a:rPr>
-              <a:t>Several are shorter versions of today’s lates.</a:t>
+              <a:t>Several of them are shorter versions of the lates you already work today.</a:t>
             </a:r>
             <a:endParaRPr lang="en-US" sz="1250" dirty="0"/>
           </a:p>
@@ -4488,7 +4488,7 @@
         <p:spPr>
           <a:xfrm>
             <a:off x="4663440" y="1371600"/>
-            <a:ext cx="4023360" cy="975272"/>
+            <a:ext cx="4023360" cy="822960"/>
           </a:xfrm>
           <a:prstGeom prst="roundRect">
             <a:avLst>
@@ -4514,8 +4514,8 @@
         </p:nvSpPr>
         <p:spPr>
           <a:xfrm>
-            <a:off x="4846320" y="1530052"/>
-            <a:ext cx="3703320" cy="310896"/>
+            <a:off x="4846320" y="1444752"/>
+            <a:ext cx="3703320" cy="274320"/>
           </a:xfrm>
           <a:prstGeom prst="rect">
             <a:avLst/>
@@ -4553,7 +4553,7 @@
         </p:nvSpPr>
         <p:spPr>
           <a:xfrm>
-            <a:off x="4846320" y="1840948"/>
+            <a:off x="4846320" y="1719072"/>
             <a:ext cx="3657600" cy="347472"/>
           </a:xfrm>
           <a:prstGeom prst="rect">
@@ -4578,7 +4578,7 @@
                 <a:ea typeface="Inter" pitchFamily="34" charset="-122"/>
                 <a:cs typeface="Inter" pitchFamily="34" charset="-120"/>
               </a:rPr>
-              <a:t>It keeps days at work to 219 a year or fewer.</a:t>
+              <a:t>That is what keeps days at work to 219 a year or fewer on the same 35 hours.</a:t>
             </a:r>
             <a:endParaRPr lang="en-US" sz="1250" dirty="0"/>
           </a:p>
@@ -4592,8 +4592,8 @@
         </p:nvSpPr>
         <p:spPr>
           <a:xfrm>
-            <a:off x="457200" y="2456600"/>
-            <a:ext cx="4023360" cy="975272"/>
+            <a:off x="457200" y="2267712"/>
+            <a:ext cx="4023360" cy="822960"/>
           </a:xfrm>
           <a:prstGeom prst="roundRect">
             <a:avLst>
@@ -4619,8 +4619,8 @@
         </p:nvSpPr>
         <p:spPr>
           <a:xfrm>
-            <a:off x="640080" y="2615052"/>
-            <a:ext cx="3703320" cy="310896"/>
+            <a:off x="640080" y="2340864"/>
+            <a:ext cx="3703320" cy="274320"/>
           </a:xfrm>
           <a:prstGeom prst="rect">
             <a:avLst/>
@@ -4658,7 +4658,7 @@
         </p:nvSpPr>
         <p:spPr>
           <a:xfrm>
-            <a:off x="640080" y="2925948"/>
+            <a:off x="640080" y="2615184"/>
             <a:ext cx="3657600" cy="347472"/>
           </a:xfrm>
           <a:prstGeom prst="rect">
@@ -4697,8 +4697,8 @@
         </p:nvSpPr>
         <p:spPr>
           <a:xfrm>
-            <a:off x="4663440" y="2456600"/>
-            <a:ext cx="4023360" cy="975272"/>
+            <a:off x="4663440" y="2267712"/>
+            <a:ext cx="4023360" cy="822960"/>
           </a:xfrm>
           <a:prstGeom prst="roundRect">
             <a:avLst>
@@ -4724,8 +4724,8 @@
         </p:nvSpPr>
         <p:spPr>
           <a:xfrm>
-            <a:off x="4846320" y="2615052"/>
-            <a:ext cx="3703320" cy="310896"/>
+            <a:off x="4846320" y="2340864"/>
+            <a:ext cx="3703320" cy="274320"/>
           </a:xfrm>
           <a:prstGeom prst="rect">
             <a:avLst/>
@@ -4763,7 +4763,7 @@
         </p:nvSpPr>
         <p:spPr>
           <a:xfrm>
-            <a:off x="4846320" y="2925948"/>
+            <a:off x="4846320" y="2615184"/>
             <a:ext cx="3657600" cy="347472"/>
           </a:xfrm>
           <a:prstGeom prst="rect">
@@ -4802,8 +4802,8 @@
         </p:nvSpPr>
         <p:spPr>
           <a:xfrm>
-            <a:off x="457200" y="3541600"/>
-            <a:ext cx="4023360" cy="975272"/>
+            <a:off x="457200" y="3163824"/>
+            <a:ext cx="4023360" cy="822960"/>
           </a:xfrm>
           <a:prstGeom prst="roundRect">
             <a:avLst>
@@ -4829,8 +4829,8 @@
         </p:nvSpPr>
         <p:spPr>
           <a:xfrm>
-            <a:off x="640080" y="3700052"/>
-            <a:ext cx="3703320" cy="310896"/>
+            <a:off x="640080" y="3236976"/>
+            <a:ext cx="3703320" cy="274320"/>
           </a:xfrm>
           <a:prstGeom prst="rect">
             <a:avLst/>
@@ -4868,7 +4868,7 @@
         </p:nvSpPr>
         <p:spPr>
           <a:xfrm>
-            <a:off x="640080" y="4010948"/>
+            <a:off x="640080" y="3511296"/>
             <a:ext cx="3657600" cy="347472"/>
           </a:xfrm>
           <a:prstGeom prst="rect">
@@ -4907,8 +4907,8 @@
         </p:nvSpPr>
         <p:spPr>
           <a:xfrm>
-            <a:off x="4663440" y="3541600"/>
-            <a:ext cx="4023360" cy="975272"/>
+            <a:off x="4663440" y="3163824"/>
+            <a:ext cx="4023360" cy="822960"/>
           </a:xfrm>
           <a:prstGeom prst="roundRect">
             <a:avLst>
@@ -4934,8 +4934,8 @@
         </p:nvSpPr>
         <p:spPr>
           <a:xfrm>
-            <a:off x="4846320" y="3700052"/>
-            <a:ext cx="3703320" cy="310896"/>
+            <a:off x="4846320" y="3236976"/>
+            <a:ext cx="3703320" cy="274320"/>
           </a:xfrm>
           <a:prstGeom prst="rect">
             <a:avLst/>
@@ -4973,7 +4973,7 @@
         </p:nvSpPr>
         <p:spPr>
           <a:xfrm>
-            <a:off x="4846320" y="4010948"/>
+            <a:off x="4846320" y="3511296"/>
             <a:ext cx="3657600" cy="347472"/>
           </a:xfrm>
           <a:prstGeom prst="rect">
@@ -5001,6 +5001,70 @@
               <a:t>Your views count before a link is chosen, and who goes on which line is not decided.</a:t>
             </a:r>
             <a:endParaRPr lang="en-US" sz="1250" dirty="0"/>
+          </a:p>
+        </p:txBody>
+      </p:sp>
+      <p:sp>
+        <p:nvSpPr>
+          <p:cNvPr id="23" name="Banner"/>
+          <p:cNvSpPr/>
+          <p:nvPr/>
+        </p:nvSpPr>
+        <p:spPr>
+          <a:xfrm>
+            <a:off x="457200" y="4160520"/>
+            <a:ext cx="8229600" cy="548640"/>
+          </a:xfrm>
+          <a:prstGeom prst="roundRect">
+            <a:avLst>
+              <a:gd name="adj" fmla="val 16667"/>
+            </a:avLst>
+          </a:prstGeom>
+          <a:solidFill>
+            <a:srgbClr val="001E3C"/>
+          </a:solidFill>
+          <a:ln w="12700">
+            <a:solidFill>
+              <a:srgbClr val="001E3C"/>
+            </a:solidFill>
+            <a:prstDash val="solid"/>
+          </a:ln>
+        </p:spPr>
+      </p:sp>
+      <p:sp>
+        <p:nvSpPr>
+          <p:cNvPr id="24" name="Banner text"/>
+          <p:cNvSpPr txBox="1"/>
+          <p:nvPr/>
+        </p:nvSpPr>
+        <p:spPr>
+          <a:xfrm>
+            <a:off x="640080" y="4160520"/>
+            <a:ext cx="7863840" cy="548640"/>
+          </a:xfrm>
+          <a:prstGeom prst="rect">
+            <a:avLst/>
+          </a:prstGeom>
+          <a:noFill/>
+        </p:spPr>
+        <p:txBody>
+          <a:bodyPr wrap="square" lIns="0" tIns="0" rIns="0" bIns="0" rtlCol="0" anchor="ctr"/>
+          <a:lstStyle/>
+          <a:p>
+            <a:pPr indent="0" marL="0">
+              <a:buNone/>
+            </a:pPr>
+            <a:r>
+              <a:rPr lang="en-US" sz="1400" b="1" dirty="0">
+                <a:solidFill>
+                  <a:srgbClr val="FFFFFF"/>
+                </a:solidFill>
+                <a:latin typeface="Inter" pitchFamily="34" charset="0"/>
+                <a:ea typeface="Inter" pitchFamily="34" charset="-122"/>
+                <a:cs typeface="Inter" pitchFamily="34" charset="-120"/>
+              </a:rPr>
+              <a:t>None of these is hidden: each one is on the full proposal sheet too.</a:t>
+            </a:r>
           </a:p>
         </p:txBody>
       </p:sp>
@@ -5196,26 +5260,14 @@
                       </a:endParaRPr>
                     </a:p>
                   </a:txBody>
-                  <a:tcPr marL="91440" marR="91440" marT="0" marB="0" anchor="ctr">
-                    <a:lnL w="9525" cap="flat" cmpd="sng" algn="ctr">
-                      <a:solidFill>
-                        <a:srgbClr val="DDE3EA"/>
-                      </a:solidFill>
-                      <a:prstDash val="solid"/>
-                      <a:round/>
-                      <a:headEnd type="none" w="med" len="med"/>
-                      <a:tailEnd type="none" w="med" len="med"/>
+                  <a:tcPr marL="182880" marR="91440" marT="0" marB="0" anchor="ctr">
+                    <a:lnL>
+                      <a:noFill/>
                     </a:lnL>
-                    <a:lnR w="9525" cap="flat" cmpd="sng" algn="ctr">
-                      <a:solidFill>
-                        <a:srgbClr val="DDE3EA"/>
-                      </a:solidFill>
-                      <a:prstDash val="solid"/>
-                      <a:round/>
-                      <a:headEnd type="none" w="med" len="med"/>
-                      <a:tailEnd type="none" w="med" len="med"/>
+                    <a:lnR>
+                      <a:noFill/>
                     </a:lnR>
-                    <a:lnT w="9525" cap="flat" cmpd="sng" algn="ctr">
+                    <a:lnT w="6350" cap="flat" cmpd="sng" algn="ctr">
                       <a:solidFill>
                         <a:srgbClr val="DDE3EA"/>
                       </a:solidFill>
@@ -5224,7 +5276,7 @@
                       <a:headEnd type="none" w="med" len="med"/>
                       <a:tailEnd type="none" w="med" len="med"/>
                     </a:lnT>
-                    <a:lnB w="9525" cap="flat" cmpd="sng" algn="ctr">
+                    <a:lnB w="6350" cap="flat" cmpd="sng" algn="ctr">
                       <a:solidFill>
                         <a:srgbClr val="DDE3EA"/>
                       </a:solidFill>
@@ -5265,25 +5317,13 @@
                     </a:p>
                   </a:txBody>
                   <a:tcPr marL="91440" marR="91440" marT="0" marB="0" anchor="ctr">
-                    <a:lnL w="9525" cap="flat" cmpd="sng" algn="ctr">
-                      <a:solidFill>
-                        <a:srgbClr val="DDE3EA"/>
-                      </a:solidFill>
-                      <a:prstDash val="solid"/>
-                      <a:round/>
-                      <a:headEnd type="none" w="med" len="med"/>
-                      <a:tailEnd type="none" w="med" len="med"/>
+                    <a:lnL>
+                      <a:noFill/>
                     </a:lnL>
-                    <a:lnR w="9525" cap="flat" cmpd="sng" algn="ctr">
-                      <a:solidFill>
-                        <a:srgbClr val="DDE3EA"/>
-                      </a:solidFill>
-                      <a:prstDash val="solid"/>
-                      <a:round/>
-                      <a:headEnd type="none" w="med" len="med"/>
-                      <a:tailEnd type="none" w="med" len="med"/>
+                    <a:lnR>
+                      <a:noFill/>
                     </a:lnR>
-                    <a:lnT w="9525" cap="flat" cmpd="sng" algn="ctr">
+                    <a:lnT w="6350" cap="flat" cmpd="sng" algn="ctr">
                       <a:solidFill>
                         <a:srgbClr val="DDE3EA"/>
                       </a:solidFill>
@@ -5292,7 +5332,7 @@
                       <a:headEnd type="none" w="med" len="med"/>
                       <a:tailEnd type="none" w="med" len="med"/>
                     </a:lnT>
-                    <a:lnB w="9525" cap="flat" cmpd="sng" algn="ctr">
+                    <a:lnB w="6350" cap="flat" cmpd="sng" algn="ctr">
                       <a:solidFill>
                         <a:srgbClr val="DDE3EA"/>
                       </a:solidFill>
@@ -5333,25 +5373,13 @@
                     </a:p>
                   </a:txBody>
                   <a:tcPr marL="91440" marR="91440" marT="0" marB="0" anchor="ctr">
-                    <a:lnL w="9525" cap="flat" cmpd="sng" algn="ctr">
-                      <a:solidFill>
-                        <a:srgbClr val="DDE3EA"/>
-                      </a:solidFill>
-                      <a:prstDash val="solid"/>
-                      <a:round/>
-                      <a:headEnd type="none" w="med" len="med"/>
-                      <a:tailEnd type="none" w="med" len="med"/>
+                    <a:lnL>
+                      <a:noFill/>
                     </a:lnL>
-                    <a:lnR w="9525" cap="flat" cmpd="sng" algn="ctr">
-                      <a:solidFill>
-                        <a:srgbClr val="DDE3EA"/>
-                      </a:solidFill>
-                      <a:prstDash val="solid"/>
-                      <a:round/>
-                      <a:headEnd type="none" w="med" len="med"/>
-                      <a:tailEnd type="none" w="med" len="med"/>
+                    <a:lnR>
+                      <a:noFill/>
                     </a:lnR>
-                    <a:lnT w="9525" cap="flat" cmpd="sng" algn="ctr">
+                    <a:lnT w="6350" cap="flat" cmpd="sng" algn="ctr">
                       <a:solidFill>
                         <a:srgbClr val="DDE3EA"/>
                       </a:solidFill>
@@ -5360,7 +5388,7 @@
                       <a:headEnd type="none" w="med" len="med"/>
                       <a:tailEnd type="none" w="med" len="med"/>
                     </a:lnT>
-                    <a:lnB w="9525" cap="flat" cmpd="sng" algn="ctr">
+                    <a:lnB w="6350" cap="flat" cmpd="sng" algn="ctr">
                       <a:solidFill>
                         <a:srgbClr val="DDE3EA"/>
                       </a:solidFill>
@@ -5402,26 +5430,14 @@
                       </a:endParaRPr>
                     </a:p>
                   </a:txBody>
-                  <a:tcPr marL="91440" marR="91440" marT="0" marB="0" anchor="ctr">
-                    <a:lnL w="9525" cap="flat" cmpd="sng" algn="ctr">
-                      <a:solidFill>
-                        <a:srgbClr val="DDE3EA"/>
-                      </a:solidFill>
-                      <a:prstDash val="solid"/>
-                      <a:round/>
-                      <a:headEnd type="none" w="med" len="med"/>
-                      <a:tailEnd type="none" w="med" len="med"/>
+                  <a:tcPr marL="182880" marR="91440" marT="0" marB="0" anchor="ctr">
+                    <a:lnL>
+                      <a:noFill/>
                     </a:lnL>
-                    <a:lnR w="9525" cap="flat" cmpd="sng" algn="ctr">
-                      <a:solidFill>
-                        <a:srgbClr val="DDE3EA"/>
-                      </a:solidFill>
-                      <a:prstDash val="solid"/>
-                      <a:round/>
-                      <a:headEnd type="none" w="med" len="med"/>
-                      <a:tailEnd type="none" w="med" len="med"/>
+                    <a:lnR>
+                      <a:noFill/>
                     </a:lnR>
-                    <a:lnT w="9525" cap="flat" cmpd="sng" algn="ctr">
+                    <a:lnT w="6350" cap="flat" cmpd="sng" algn="ctr">
                       <a:solidFill>
                         <a:srgbClr val="DDE3EA"/>
                       </a:solidFill>
@@ -5430,7 +5446,7 @@
                       <a:headEnd type="none" w="med" len="med"/>
                       <a:tailEnd type="none" w="med" len="med"/>
                     </a:lnT>
-                    <a:lnB w="9525" cap="flat" cmpd="sng" algn="ctr">
+                    <a:lnB w="6350" cap="flat" cmpd="sng" algn="ctr">
                       <a:solidFill>
                         <a:srgbClr val="DDE3EA"/>
                       </a:solidFill>
@@ -5471,25 +5487,13 @@
                     </a:p>
                   </a:txBody>
                   <a:tcPr marL="91440" marR="91440" marT="0" marB="0" anchor="ctr">
-                    <a:lnL w="9525" cap="flat" cmpd="sng" algn="ctr">
-                      <a:solidFill>
-                        <a:srgbClr val="DDE3EA"/>
-                      </a:solidFill>
-                      <a:prstDash val="solid"/>
-                      <a:round/>
-                      <a:headEnd type="none" w="med" len="med"/>
-                      <a:tailEnd type="none" w="med" len="med"/>
+                    <a:lnL>
+                      <a:noFill/>
                     </a:lnL>
-                    <a:lnR w="9525" cap="flat" cmpd="sng" algn="ctr">
-                      <a:solidFill>
-                        <a:srgbClr val="DDE3EA"/>
-                      </a:solidFill>
-                      <a:prstDash val="solid"/>
-                      <a:round/>
-                      <a:headEnd type="none" w="med" len="med"/>
-                      <a:tailEnd type="none" w="med" len="med"/>
+                    <a:lnR>
+                      <a:noFill/>
                     </a:lnR>
-                    <a:lnT w="9525" cap="flat" cmpd="sng" algn="ctr">
+                    <a:lnT w="6350" cap="flat" cmpd="sng" algn="ctr">
                       <a:solidFill>
                         <a:srgbClr val="DDE3EA"/>
                       </a:solidFill>
@@ -5498,7 +5502,7 @@
                       <a:headEnd type="none" w="med" len="med"/>
                       <a:tailEnd type="none" w="med" len="med"/>
                     </a:lnT>
-                    <a:lnB w="9525" cap="flat" cmpd="sng" algn="ctr">
+                    <a:lnB w="6350" cap="flat" cmpd="sng" algn="ctr">
                       <a:solidFill>
                         <a:srgbClr val="DDE3EA"/>
                       </a:solidFill>
@@ -5539,25 +5543,13 @@
                     </a:p>
                   </a:txBody>
                   <a:tcPr marL="91440" marR="91440" marT="0" marB="0" anchor="ctr">
-                    <a:lnL w="9525" cap="flat" cmpd="sng" algn="ctr">
-                      <a:solidFill>
-                        <a:srgbClr val="DDE3EA"/>
-                      </a:solidFill>
-                      <a:prstDash val="solid"/>
-                      <a:round/>
-                      <a:headEnd type="none" w="med" len="med"/>
-                      <a:tailEnd type="none" w="med" len="med"/>
+                    <a:lnL>
+                      <a:noFill/>
                     </a:lnL>
-                    <a:lnR w="9525" cap="flat" cmpd="sng" algn="ctr">
-                      <a:solidFill>
-                        <a:srgbClr val="DDE3EA"/>
-                      </a:solidFill>
-                      <a:prstDash val="solid"/>
-                      <a:round/>
-                      <a:headEnd type="none" w="med" len="med"/>
-                      <a:tailEnd type="none" w="med" len="med"/>
+                    <a:lnR>
+                      <a:noFill/>
                     </a:lnR>
-                    <a:lnT w="9525" cap="flat" cmpd="sng" algn="ctr">
+                    <a:lnT w="6350" cap="flat" cmpd="sng" algn="ctr">
                       <a:solidFill>
                         <a:srgbClr val="DDE3EA"/>
                       </a:solidFill>
@@ -5566,7 +5558,7 @@
                       <a:headEnd type="none" w="med" len="med"/>
                       <a:tailEnd type="none" w="med" len="med"/>
                     </a:lnT>
-                    <a:lnB w="9525" cap="flat" cmpd="sng" algn="ctr">
+                    <a:lnB w="6350" cap="flat" cmpd="sng" algn="ctr">
                       <a:solidFill>
                         <a:srgbClr val="DDE3EA"/>
                       </a:solidFill>
@@ -5608,26 +5600,14 @@
                       </a:endParaRPr>
                     </a:p>
                   </a:txBody>
-                  <a:tcPr marL="91440" marR="91440" marT="0" marB="0" anchor="ctr">
-                    <a:lnL w="9525" cap="flat" cmpd="sng" algn="ctr">
-                      <a:solidFill>
-                        <a:srgbClr val="DDE3EA"/>
-                      </a:solidFill>
-                      <a:prstDash val="solid"/>
-                      <a:round/>
-                      <a:headEnd type="none" w="med" len="med"/>
-                      <a:tailEnd type="none" w="med" len="med"/>
+                  <a:tcPr marL="182880" marR="91440" marT="0" marB="0" anchor="ctr">
+                    <a:lnL>
+                      <a:noFill/>
                     </a:lnL>
-                    <a:lnR w="9525" cap="flat" cmpd="sng" algn="ctr">
-                      <a:solidFill>
-                        <a:srgbClr val="DDE3EA"/>
-                      </a:solidFill>
-                      <a:prstDash val="solid"/>
-                      <a:round/>
-                      <a:headEnd type="none" w="med" len="med"/>
-                      <a:tailEnd type="none" w="med" len="med"/>
+                    <a:lnR>
+                      <a:noFill/>
                     </a:lnR>
-                    <a:lnT w="9525" cap="flat" cmpd="sng" algn="ctr">
+                    <a:lnT w="6350" cap="flat" cmpd="sng" algn="ctr">
                       <a:solidFill>
                         <a:srgbClr val="DDE3EA"/>
                       </a:solidFill>
@@ -5636,7 +5616,7 @@
                       <a:headEnd type="none" w="med" len="med"/>
                       <a:tailEnd type="none" w="med" len="med"/>
                     </a:lnT>
-                    <a:lnB w="9525" cap="flat" cmpd="sng" algn="ctr">
+                    <a:lnB w="6350" cap="flat" cmpd="sng" algn="ctr">
                       <a:solidFill>
                         <a:srgbClr val="DDE3EA"/>
                       </a:solidFill>
@@ -5677,25 +5657,13 @@
                     </a:p>
                   </a:txBody>
                   <a:tcPr marL="91440" marR="91440" marT="0" marB="0" anchor="ctr">
-                    <a:lnL w="9525" cap="flat" cmpd="sng" algn="ctr">
-                      <a:solidFill>
-                        <a:srgbClr val="DDE3EA"/>
-                      </a:solidFill>
-                      <a:prstDash val="solid"/>
-                      <a:round/>
-                      <a:headEnd type="none" w="med" len="med"/>
-                      <a:tailEnd type="none" w="med" len="med"/>
+                    <a:lnL>
+                      <a:noFill/>
                     </a:lnL>
-                    <a:lnR w="9525" cap="flat" cmpd="sng" algn="ctr">
-                      <a:solidFill>
-                        <a:srgbClr val="DDE3EA"/>
-                      </a:solidFill>
-                      <a:prstDash val="solid"/>
-                      <a:round/>
-                      <a:headEnd type="none" w="med" len="med"/>
-                      <a:tailEnd type="none" w="med" len="med"/>
+                    <a:lnR>
+                      <a:noFill/>
                     </a:lnR>
-                    <a:lnT w="9525" cap="flat" cmpd="sng" algn="ctr">
+                    <a:lnT w="6350" cap="flat" cmpd="sng" algn="ctr">
                       <a:solidFill>
                         <a:srgbClr val="DDE3EA"/>
                       </a:solidFill>
@@ -5704,7 +5672,7 @@
                       <a:headEnd type="none" w="med" len="med"/>
                       <a:tailEnd type="none" w="med" len="med"/>
                     </a:lnT>
-                    <a:lnB w="9525" cap="flat" cmpd="sng" algn="ctr">
+                    <a:lnB w="6350" cap="flat" cmpd="sng" algn="ctr">
                       <a:solidFill>
                         <a:srgbClr val="DDE3EA"/>
                       </a:solidFill>
@@ -5745,25 +5713,13 @@
                     </a:p>
                   </a:txBody>
                   <a:tcPr marL="91440" marR="91440" marT="0" marB="0" anchor="ctr">
-                    <a:lnL w="9525" cap="flat" cmpd="sng" algn="ctr">
-                      <a:solidFill>
-                        <a:srgbClr val="DDE3EA"/>
-                      </a:solidFill>
-                      <a:prstDash val="solid"/>
-                      <a:round/>
-                      <a:headEnd type="none" w="med" len="med"/>
-                      <a:tailEnd type="none" w="med" len="med"/>
+                    <a:lnL>
+                      <a:noFill/>
                     </a:lnL>
-                    <a:lnR w="9525" cap="flat" cmpd="sng" algn="ctr">
-                      <a:solidFill>
-                        <a:srgbClr val="DDE3EA"/>
-                      </a:solidFill>
-                      <a:prstDash val="solid"/>
-                      <a:round/>
-                      <a:headEnd type="none" w="med" len="med"/>
-                      <a:tailEnd type="none" w="med" len="med"/>
+                    <a:lnR>
+                      <a:noFill/>
                     </a:lnR>
-                    <a:lnT w="9525" cap="flat" cmpd="sng" algn="ctr">
+                    <a:lnT w="6350" cap="flat" cmpd="sng" algn="ctr">
                       <a:solidFill>
                         <a:srgbClr val="DDE3EA"/>
                       </a:solidFill>
@@ -5772,7 +5728,7 @@
                       <a:headEnd type="none" w="med" len="med"/>
                       <a:tailEnd type="none" w="med" len="med"/>
                     </a:lnT>
-                    <a:lnB w="9525" cap="flat" cmpd="sng" algn="ctr">
+                    <a:lnB w="6350" cap="flat" cmpd="sng" algn="ctr">
                       <a:solidFill>
                         <a:srgbClr val="DDE3EA"/>
                       </a:solidFill>
@@ -5814,26 +5770,14 @@
                       </a:endParaRPr>
                     </a:p>
                   </a:txBody>
-                  <a:tcPr marL="91440" marR="91440" marT="0" marB="0" anchor="ctr">
-                    <a:lnL w="9525" cap="flat" cmpd="sng" algn="ctr">
-                      <a:solidFill>
-                        <a:srgbClr val="DDE3EA"/>
-                      </a:solidFill>
-                      <a:prstDash val="solid"/>
-                      <a:round/>
-                      <a:headEnd type="none" w="med" len="med"/>
-                      <a:tailEnd type="none" w="med" len="med"/>
+                  <a:tcPr marL="182880" marR="91440" marT="0" marB="0" anchor="ctr">
+                    <a:lnL>
+                      <a:noFill/>
                     </a:lnL>
-                    <a:lnR w="9525" cap="flat" cmpd="sng" algn="ctr">
-                      <a:solidFill>
-                        <a:srgbClr val="DDE3EA"/>
-                      </a:solidFill>
-                      <a:prstDash val="solid"/>
-                      <a:round/>
-                      <a:headEnd type="none" w="med" len="med"/>
-                      <a:tailEnd type="none" w="med" len="med"/>
+                    <a:lnR>
+                      <a:noFill/>
                     </a:lnR>
-                    <a:lnT w="9525" cap="flat" cmpd="sng" algn="ctr">
+                    <a:lnT w="6350" cap="flat" cmpd="sng" algn="ctr">
                       <a:solidFill>
                         <a:srgbClr val="DDE3EA"/>
                       </a:solidFill>
@@ -5842,7 +5786,7 @@
                       <a:headEnd type="none" w="med" len="med"/>
                       <a:tailEnd type="none" w="med" len="med"/>
                     </a:lnT>
-                    <a:lnB w="9525" cap="flat" cmpd="sng" algn="ctr">
+                    <a:lnB w="6350" cap="flat" cmpd="sng" algn="ctr">
                       <a:solidFill>
                         <a:srgbClr val="DDE3EA"/>
                       </a:solidFill>
@@ -5883,25 +5827,13 @@
                     </a:p>
                   </a:txBody>
                   <a:tcPr marL="91440" marR="91440" marT="0" marB="0" anchor="ctr">
-                    <a:lnL w="9525" cap="flat" cmpd="sng" algn="ctr">
-                      <a:solidFill>
-                        <a:srgbClr val="DDE3EA"/>
-                      </a:solidFill>
-                      <a:prstDash val="solid"/>
-                      <a:round/>
-                      <a:headEnd type="none" w="med" len="med"/>
-                      <a:tailEnd type="none" w="med" len="med"/>
+                    <a:lnL>
+                      <a:noFill/>
                     </a:lnL>
-                    <a:lnR w="9525" cap="flat" cmpd="sng" algn="ctr">
-                      <a:solidFill>
-                        <a:srgbClr val="DDE3EA"/>
-                      </a:solidFill>
-                      <a:prstDash val="solid"/>
-                      <a:round/>
-                      <a:headEnd type="none" w="med" len="med"/>
-                      <a:tailEnd type="none" w="med" len="med"/>
+                    <a:lnR>
+                      <a:noFill/>
                     </a:lnR>
-                    <a:lnT w="9525" cap="flat" cmpd="sng" algn="ctr">
+                    <a:lnT w="6350" cap="flat" cmpd="sng" algn="ctr">
                       <a:solidFill>
                         <a:srgbClr val="DDE3EA"/>
                       </a:solidFill>
@@ -5910,7 +5842,7 @@
                       <a:headEnd type="none" w="med" len="med"/>
                       <a:tailEnd type="none" w="med" len="med"/>
                     </a:lnT>
-                    <a:lnB w="9525" cap="flat" cmpd="sng" algn="ctr">
+                    <a:lnB w="6350" cap="flat" cmpd="sng" algn="ctr">
                       <a:solidFill>
                         <a:srgbClr val="DDE3EA"/>
                       </a:solidFill>
@@ -5951,25 +5883,13 @@
                     </a:p>
                   </a:txBody>
                   <a:tcPr marL="91440" marR="91440" marT="0" marB="0" anchor="ctr">
-                    <a:lnL w="9525" cap="flat" cmpd="sng" algn="ctr">
-                      <a:solidFill>
-                        <a:srgbClr val="DDE3EA"/>
-                      </a:solidFill>
-                      <a:prstDash val="solid"/>
-                      <a:round/>
-                      <a:headEnd type="none" w="med" len="med"/>
-                      <a:tailEnd type="none" w="med" len="med"/>
+                    <a:lnL>
+                      <a:noFill/>
                     </a:lnL>
-                    <a:lnR w="9525" cap="flat" cmpd="sng" algn="ctr">
-                      <a:solidFill>
-                        <a:srgbClr val="DDE3EA"/>
-                      </a:solidFill>
-                      <a:prstDash val="solid"/>
-                      <a:round/>
-                      <a:headEnd type="none" w="med" len="med"/>
-                      <a:tailEnd type="none" w="med" len="med"/>
+                    <a:lnR>
+                      <a:noFill/>
                     </a:lnR>
-                    <a:lnT w="9525" cap="flat" cmpd="sng" algn="ctr">
+                    <a:lnT w="6350" cap="flat" cmpd="sng" algn="ctr">
                       <a:solidFill>
                         <a:srgbClr val="DDE3EA"/>
                       </a:solidFill>
@@ -5978,7 +5898,7 @@
                       <a:headEnd type="none" w="med" len="med"/>
                       <a:tailEnd type="none" w="med" len="med"/>
                     </a:lnT>
-                    <a:lnB w="9525" cap="flat" cmpd="sng" algn="ctr">
+                    <a:lnB w="6350" cap="flat" cmpd="sng" algn="ctr">
                       <a:solidFill>
                         <a:srgbClr val="DDE3EA"/>
                       </a:solidFill>
@@ -6020,26 +5940,14 @@
                       </a:endParaRPr>
                     </a:p>
                   </a:txBody>
-                  <a:tcPr marL="91440" marR="91440" marT="0" marB="0" anchor="ctr">
-                    <a:lnL w="9525" cap="flat" cmpd="sng" algn="ctr">
-                      <a:solidFill>
-                        <a:srgbClr val="DDE3EA"/>
-                      </a:solidFill>
-                      <a:prstDash val="solid"/>
-                      <a:round/>
-                      <a:headEnd type="none" w="med" len="med"/>
-                      <a:tailEnd type="none" w="med" len="med"/>
+                  <a:tcPr marL="182880" marR="91440" marT="0" marB="0" anchor="ctr">
+                    <a:lnL>
+                      <a:noFill/>
                     </a:lnL>
-                    <a:lnR w="9525" cap="flat" cmpd="sng" algn="ctr">
-                      <a:solidFill>
-                        <a:srgbClr val="DDE3EA"/>
-                      </a:solidFill>
-                      <a:prstDash val="solid"/>
-                      <a:round/>
-                      <a:headEnd type="none" w="med" len="med"/>
-                      <a:tailEnd type="none" w="med" len="med"/>
+                    <a:lnR>
+                      <a:noFill/>
                     </a:lnR>
-                    <a:lnT w="9525" cap="flat" cmpd="sng" algn="ctr">
+                    <a:lnT w="6350" cap="flat" cmpd="sng" algn="ctr">
                       <a:solidFill>
                         <a:srgbClr val="DDE3EA"/>
                       </a:solidFill>
@@ -6048,7 +5956,7 @@
                       <a:headEnd type="none" w="med" len="med"/>
                       <a:tailEnd type="none" w="med" len="med"/>
                     </a:lnT>
-                    <a:lnB w="9525" cap="flat" cmpd="sng" algn="ctr">
+                    <a:lnB w="6350" cap="flat" cmpd="sng" algn="ctr">
                       <a:solidFill>
                         <a:srgbClr val="DDE3EA"/>
                       </a:solidFill>
@@ -6089,25 +5997,13 @@
                     </a:p>
                   </a:txBody>
                   <a:tcPr marL="91440" marR="91440" marT="0" marB="0" anchor="ctr">
-                    <a:lnL w="9525" cap="flat" cmpd="sng" algn="ctr">
-                      <a:solidFill>
-                        <a:srgbClr val="DDE3EA"/>
-                      </a:solidFill>
-                      <a:prstDash val="solid"/>
-                      <a:round/>
-                      <a:headEnd type="none" w="med" len="med"/>
-                      <a:tailEnd type="none" w="med" len="med"/>
+                    <a:lnL>
+                      <a:noFill/>
                     </a:lnL>
-                    <a:lnR w="9525" cap="flat" cmpd="sng" algn="ctr">
-                      <a:solidFill>
-                        <a:srgbClr val="DDE3EA"/>
-                      </a:solidFill>
-                      <a:prstDash val="solid"/>
-                      <a:round/>
-                      <a:headEnd type="none" w="med" len="med"/>
-                      <a:tailEnd type="none" w="med" len="med"/>
+                    <a:lnR>
+                      <a:noFill/>
                     </a:lnR>
-                    <a:lnT w="9525" cap="flat" cmpd="sng" algn="ctr">
+                    <a:lnT w="6350" cap="flat" cmpd="sng" algn="ctr">
                       <a:solidFill>
                         <a:srgbClr val="DDE3EA"/>
                       </a:solidFill>
@@ -6116,7 +6012,7 @@
                       <a:headEnd type="none" w="med" len="med"/>
                       <a:tailEnd type="none" w="med" len="med"/>
                     </a:lnT>
-                    <a:lnB w="9525" cap="flat" cmpd="sng" algn="ctr">
+                    <a:lnB w="6350" cap="flat" cmpd="sng" algn="ctr">
                       <a:solidFill>
                         <a:srgbClr val="DDE3EA"/>
                       </a:solidFill>
@@ -6157,25 +6053,13 @@
                     </a:p>
                   </a:txBody>
                   <a:tcPr marL="91440" marR="91440" marT="0" marB="0" anchor="ctr">
-                    <a:lnL w="9525" cap="flat" cmpd="sng" algn="ctr">
-                      <a:solidFill>
-                        <a:srgbClr val="DDE3EA"/>
-                      </a:solidFill>
-                      <a:prstDash val="solid"/>
-                      <a:round/>
-                      <a:headEnd type="none" w="med" len="med"/>
-                      <a:tailEnd type="none" w="med" len="med"/>
+                    <a:lnL>
+                      <a:noFill/>
                     </a:lnL>
-                    <a:lnR w="9525" cap="flat" cmpd="sng" algn="ctr">
-                      <a:solidFill>
-                        <a:srgbClr val="DDE3EA"/>
-                      </a:solidFill>
-                      <a:prstDash val="solid"/>
-                      <a:round/>
-                      <a:headEnd type="none" w="med" len="med"/>
-                      <a:tailEnd type="none" w="med" len="med"/>
+                    <a:lnR>
+                      <a:noFill/>
                     </a:lnR>
-                    <a:lnT w="9525" cap="flat" cmpd="sng" algn="ctr">
+                    <a:lnT w="6350" cap="flat" cmpd="sng" algn="ctr">
                       <a:solidFill>
                         <a:srgbClr val="DDE3EA"/>
                       </a:solidFill>
@@ -6184,7 +6068,7 @@
                       <a:headEnd type="none" w="med" len="med"/>
                       <a:tailEnd type="none" w="med" len="med"/>
                     </a:lnT>
-                    <a:lnB w="9525" cap="flat" cmpd="sng" algn="ctr">
+                    <a:lnB w="6350" cap="flat" cmpd="sng" algn="ctr">
                       <a:solidFill>
                         <a:srgbClr val="DDE3EA"/>
                       </a:solidFill>
@@ -6226,26 +6110,14 @@
                       </a:endParaRPr>
                     </a:p>
                   </a:txBody>
-                  <a:tcPr marL="91440" marR="91440" marT="0" marB="0" anchor="ctr">
-                    <a:lnL w="9525" cap="flat" cmpd="sng" algn="ctr">
-                      <a:solidFill>
-                        <a:srgbClr val="DDE3EA"/>
-                      </a:solidFill>
-                      <a:prstDash val="solid"/>
-                      <a:round/>
-                      <a:headEnd type="none" w="med" len="med"/>
-                      <a:tailEnd type="none" w="med" len="med"/>
+                  <a:tcPr marL="182880" marR="91440" marT="0" marB="0" anchor="ctr">
+                    <a:lnL>
+                      <a:noFill/>
                     </a:lnL>
-                    <a:lnR w="9525" cap="flat" cmpd="sng" algn="ctr">
-                      <a:solidFill>
-                        <a:srgbClr val="DDE3EA"/>
-                      </a:solidFill>
-                      <a:prstDash val="solid"/>
-                      <a:round/>
-                      <a:headEnd type="none" w="med" len="med"/>
-                      <a:tailEnd type="none" w="med" len="med"/>
+                    <a:lnR>
+                      <a:noFill/>
                     </a:lnR>
-                    <a:lnT w="9525" cap="flat" cmpd="sng" algn="ctr">
+                    <a:lnT w="6350" cap="flat" cmpd="sng" algn="ctr">
                       <a:solidFill>
                         <a:srgbClr val="DDE3EA"/>
                       </a:solidFill>
@@ -6254,7 +6126,7 @@
                       <a:headEnd type="none" w="med" len="med"/>
                       <a:tailEnd type="none" w="med" len="med"/>
                     </a:lnT>
-                    <a:lnB w="9525" cap="flat" cmpd="sng" algn="ctr">
+                    <a:lnB w="6350" cap="flat" cmpd="sng" algn="ctr">
                       <a:solidFill>
                         <a:srgbClr val="DDE3EA"/>
                       </a:solidFill>
@@ -6295,25 +6167,13 @@
                     </a:p>
                   </a:txBody>
                   <a:tcPr marL="91440" marR="91440" marT="0" marB="0" anchor="ctr">
-                    <a:lnL w="9525" cap="flat" cmpd="sng" algn="ctr">
-                      <a:solidFill>
-                        <a:srgbClr val="DDE3EA"/>
-                      </a:solidFill>
-                      <a:prstDash val="solid"/>
-                      <a:round/>
-                      <a:headEnd type="none" w="med" len="med"/>
-                      <a:tailEnd type="none" w="med" len="med"/>
+                    <a:lnL>
+                      <a:noFill/>
                     </a:lnL>
-                    <a:lnR w="9525" cap="flat" cmpd="sng" algn="ctr">
-                      <a:solidFill>
-                        <a:srgbClr val="DDE3EA"/>
-                      </a:solidFill>
-                      <a:prstDash val="solid"/>
-                      <a:round/>
-                      <a:headEnd type="none" w="med" len="med"/>
-                      <a:tailEnd type="none" w="med" len="med"/>
+                    <a:lnR>
+                      <a:noFill/>
                     </a:lnR>
-                    <a:lnT w="9525" cap="flat" cmpd="sng" algn="ctr">
+                    <a:lnT w="6350" cap="flat" cmpd="sng" algn="ctr">
                       <a:solidFill>
                         <a:srgbClr val="DDE3EA"/>
                       </a:solidFill>
@@ -6322,7 +6182,7 @@
                       <a:headEnd type="none" w="med" len="med"/>
                       <a:tailEnd type="none" w="med" len="med"/>
                     </a:lnT>
-                    <a:lnB w="9525" cap="flat" cmpd="sng" algn="ctr">
+                    <a:lnB w="6350" cap="flat" cmpd="sng" algn="ctr">
                       <a:solidFill>
                         <a:srgbClr val="DDE3EA"/>
                       </a:solidFill>
@@ -6363,25 +6223,13 @@
                     </a:p>
                   </a:txBody>
                   <a:tcPr marL="91440" marR="91440" marT="0" marB="0" anchor="ctr">
-                    <a:lnL w="9525" cap="flat" cmpd="sng" algn="ctr">
-                      <a:solidFill>
-                        <a:srgbClr val="DDE3EA"/>
-                      </a:solidFill>
-                      <a:prstDash val="solid"/>
-                      <a:round/>
-                      <a:headEnd type="none" w="med" len="med"/>
-                      <a:tailEnd type="none" w="med" len="med"/>
+                    <a:lnL>
+                      <a:noFill/>
                     </a:lnL>
-                    <a:lnR w="9525" cap="flat" cmpd="sng" algn="ctr">
-                      <a:solidFill>
-                        <a:srgbClr val="DDE3EA"/>
-                      </a:solidFill>
-                      <a:prstDash val="solid"/>
-                      <a:round/>
-                      <a:headEnd type="none" w="med" len="med"/>
-                      <a:tailEnd type="none" w="med" len="med"/>
+                    <a:lnR>
+                      <a:noFill/>
                     </a:lnR>
-                    <a:lnT w="9525" cap="flat" cmpd="sng" algn="ctr">
+                    <a:lnT w="6350" cap="flat" cmpd="sng" algn="ctr">
                       <a:solidFill>
                         <a:srgbClr val="DDE3EA"/>
                       </a:solidFill>
@@ -6390,7 +6238,7 @@
                       <a:headEnd type="none" w="med" len="med"/>
                       <a:tailEnd type="none" w="med" len="med"/>
                     </a:lnT>
-                    <a:lnB w="9525" cap="flat" cmpd="sng" algn="ctr">
+                    <a:lnB w="6350" cap="flat" cmpd="sng" algn="ctr">
                       <a:solidFill>
                         <a:srgbClr val="DDE3EA"/>
                       </a:solidFill>
@@ -6432,26 +6280,14 @@
                       </a:endParaRPr>
                     </a:p>
                   </a:txBody>
-                  <a:tcPr marL="91440" marR="91440" marT="0" marB="0" anchor="ctr">
-                    <a:lnL w="9525" cap="flat" cmpd="sng" algn="ctr">
-                      <a:solidFill>
-                        <a:srgbClr val="DDE3EA"/>
-                      </a:solidFill>
-                      <a:prstDash val="solid"/>
-                      <a:round/>
-                      <a:headEnd type="none" w="med" len="med"/>
-                      <a:tailEnd type="none" w="med" len="med"/>
+                  <a:tcPr marL="182880" marR="91440" marT="0" marB="0" anchor="ctr">
+                    <a:lnL>
+                      <a:noFill/>
                     </a:lnL>
-                    <a:lnR w="9525" cap="flat" cmpd="sng" algn="ctr">
-                      <a:solidFill>
-                        <a:srgbClr val="DDE3EA"/>
-                      </a:solidFill>
-                      <a:prstDash val="solid"/>
-                      <a:round/>
-                      <a:headEnd type="none" w="med" len="med"/>
-                      <a:tailEnd type="none" w="med" len="med"/>
+                    <a:lnR>
+                      <a:noFill/>
                     </a:lnR>
-                    <a:lnT w="9525" cap="flat" cmpd="sng" algn="ctr">
+                    <a:lnT w="6350" cap="flat" cmpd="sng" algn="ctr">
                       <a:solidFill>
                         <a:srgbClr val="DDE3EA"/>
                       </a:solidFill>
@@ -6460,7 +6296,7 @@
                       <a:headEnd type="none" w="med" len="med"/>
                       <a:tailEnd type="none" w="med" len="med"/>
                     </a:lnT>
-                    <a:lnB w="9525" cap="flat" cmpd="sng" algn="ctr">
+                    <a:lnB w="6350" cap="flat" cmpd="sng" algn="ctr">
                       <a:solidFill>
                         <a:srgbClr val="DDE3EA"/>
                       </a:solidFill>
@@ -6501,25 +6337,13 @@
                     </a:p>
                   </a:txBody>
                   <a:tcPr marL="91440" marR="91440" marT="0" marB="0" anchor="ctr">
-                    <a:lnL w="9525" cap="flat" cmpd="sng" algn="ctr">
-                      <a:solidFill>
-                        <a:srgbClr val="DDE3EA"/>
-                      </a:solidFill>
-                      <a:prstDash val="solid"/>
-                      <a:round/>
-                      <a:headEnd type="none" w="med" len="med"/>
-                      <a:tailEnd type="none" w="med" len="med"/>
+                    <a:lnL>
+                      <a:noFill/>
                     </a:lnL>
-                    <a:lnR w="9525" cap="flat" cmpd="sng" algn="ctr">
-                      <a:solidFill>
-                        <a:srgbClr val="DDE3EA"/>
-                      </a:solidFill>
-                      <a:prstDash val="solid"/>
-                      <a:round/>
-                      <a:headEnd type="none" w="med" len="med"/>
-                      <a:tailEnd type="none" w="med" len="med"/>
+                    <a:lnR>
+                      <a:noFill/>
                     </a:lnR>
-                    <a:lnT w="9525" cap="flat" cmpd="sng" algn="ctr">
+                    <a:lnT w="6350" cap="flat" cmpd="sng" algn="ctr">
                       <a:solidFill>
                         <a:srgbClr val="DDE3EA"/>
                       </a:solidFill>
@@ -6528,7 +6352,7 @@
                       <a:headEnd type="none" w="med" len="med"/>
                       <a:tailEnd type="none" w="med" len="med"/>
                     </a:lnT>
-                    <a:lnB w="9525" cap="flat" cmpd="sng" algn="ctr">
+                    <a:lnB w="6350" cap="flat" cmpd="sng" algn="ctr">
                       <a:solidFill>
                         <a:srgbClr val="DDE3EA"/>
                       </a:solidFill>
@@ -6569,25 +6393,13 @@
                     </a:p>
                   </a:txBody>
                   <a:tcPr marL="91440" marR="91440" marT="0" marB="0" anchor="ctr">
-                    <a:lnL w="9525" cap="flat" cmpd="sng" algn="ctr">
-                      <a:solidFill>
-                        <a:srgbClr val="DDE3EA"/>
-                      </a:solidFill>
-                      <a:prstDash val="solid"/>
-                      <a:round/>
-                      <a:headEnd type="none" w="med" len="med"/>
-                      <a:tailEnd type="none" w="med" len="med"/>
+                    <a:lnL>
+                      <a:noFill/>
                     </a:lnL>
-                    <a:lnR w="9525" cap="flat" cmpd="sng" algn="ctr">
-                      <a:solidFill>
-                        <a:srgbClr val="DDE3EA"/>
-                      </a:solidFill>
-                      <a:prstDash val="solid"/>
-                      <a:round/>
-                      <a:headEnd type="none" w="med" len="med"/>
-                      <a:tailEnd type="none" w="med" len="med"/>
+                    <a:lnR>
+                      <a:noFill/>
                     </a:lnR>
-                    <a:lnT w="9525" cap="flat" cmpd="sng" algn="ctr">
+                    <a:lnT w="6350" cap="flat" cmpd="sng" algn="ctr">
                       <a:solidFill>
                         <a:srgbClr val="DDE3EA"/>
                       </a:solidFill>
@@ -6596,7 +6408,7 @@
                       <a:headEnd type="none" w="med" len="med"/>
                       <a:tailEnd type="none" w="med" len="med"/>
                     </a:lnT>
-                    <a:lnB w="9525" cap="flat" cmpd="sng" algn="ctr">
+                    <a:lnB w="6350" cap="flat" cmpd="sng" algn="ctr">
                       <a:solidFill>
                         <a:srgbClr val="DDE3EA"/>
                       </a:solidFill>
@@ -6638,26 +6450,14 @@
                       </a:endParaRPr>
                     </a:p>
                   </a:txBody>
-                  <a:tcPr marL="91440" marR="91440" marT="0" marB="0" anchor="ctr">
-                    <a:lnL w="9525" cap="flat" cmpd="sng" algn="ctr">
-                      <a:solidFill>
-                        <a:srgbClr val="DDE3EA"/>
-                      </a:solidFill>
-                      <a:prstDash val="solid"/>
-                      <a:round/>
-                      <a:headEnd type="none" w="med" len="med"/>
-                      <a:tailEnd type="none" w="med" len="med"/>
+                  <a:tcPr marL="182880" marR="91440" marT="0" marB="0" anchor="ctr">
+                    <a:lnL>
+                      <a:noFill/>
                     </a:lnL>
-                    <a:lnR w="9525" cap="flat" cmpd="sng" algn="ctr">
-                      <a:solidFill>
-                        <a:srgbClr val="DDE3EA"/>
-                      </a:solidFill>
-                      <a:prstDash val="solid"/>
-                      <a:round/>
-                      <a:headEnd type="none" w="med" len="med"/>
-                      <a:tailEnd type="none" w="med" len="med"/>
+                    <a:lnR>
+                      <a:noFill/>
                     </a:lnR>
-                    <a:lnT w="9525" cap="flat" cmpd="sng" algn="ctr">
+                    <a:lnT w="6350" cap="flat" cmpd="sng" algn="ctr">
                       <a:solidFill>
                         <a:srgbClr val="DDE3EA"/>
                       </a:solidFill>
@@ -6666,7 +6466,7 @@
                       <a:headEnd type="none" w="med" len="med"/>
                       <a:tailEnd type="none" w="med" len="med"/>
                     </a:lnT>
-                    <a:lnB w="9525" cap="flat" cmpd="sng" algn="ctr">
+                    <a:lnB w="6350" cap="flat" cmpd="sng" algn="ctr">
                       <a:solidFill>
                         <a:srgbClr val="DDE3EA"/>
                       </a:solidFill>
@@ -6707,25 +6507,13 @@
                     </a:p>
                   </a:txBody>
                   <a:tcPr marL="91440" marR="91440" marT="0" marB="0" anchor="ctr">
-                    <a:lnL w="9525" cap="flat" cmpd="sng" algn="ctr">
-                      <a:solidFill>
-                        <a:srgbClr val="DDE3EA"/>
-                      </a:solidFill>
-                      <a:prstDash val="solid"/>
-                      <a:round/>
-                      <a:headEnd type="none" w="med" len="med"/>
-                      <a:tailEnd type="none" w="med" len="med"/>
+                    <a:lnL>
+                      <a:noFill/>
                     </a:lnL>
-                    <a:lnR w="9525" cap="flat" cmpd="sng" algn="ctr">
-                      <a:solidFill>
-                        <a:srgbClr val="DDE3EA"/>
-                      </a:solidFill>
-                      <a:prstDash val="solid"/>
-                      <a:round/>
-                      <a:headEnd type="none" w="med" len="med"/>
-                      <a:tailEnd type="none" w="med" len="med"/>
+                    <a:lnR>
+                      <a:noFill/>
                     </a:lnR>
-                    <a:lnT w="9525" cap="flat" cmpd="sng" algn="ctr">
+                    <a:lnT w="6350" cap="flat" cmpd="sng" algn="ctr">
                       <a:solidFill>
                         <a:srgbClr val="DDE3EA"/>
                       </a:solidFill>
@@ -6734,7 +6522,7 @@
                       <a:headEnd type="none" w="med" len="med"/>
                       <a:tailEnd type="none" w="med" len="med"/>
                     </a:lnT>
-                    <a:lnB w="9525" cap="flat" cmpd="sng" algn="ctr">
+                    <a:lnB w="6350" cap="flat" cmpd="sng" algn="ctr">
                       <a:solidFill>
                         <a:srgbClr val="DDE3EA"/>
                       </a:solidFill>
@@ -6775,25 +6563,13 @@
                     </a:p>
                   </a:txBody>
                   <a:tcPr marL="91440" marR="91440" marT="0" marB="0" anchor="ctr">
-                    <a:lnL w="9525" cap="flat" cmpd="sng" algn="ctr">
-                      <a:solidFill>
-                        <a:srgbClr val="DDE3EA"/>
-                      </a:solidFill>
-                      <a:prstDash val="solid"/>
-                      <a:round/>
-                      <a:headEnd type="none" w="med" len="med"/>
-                      <a:tailEnd type="none" w="med" len="med"/>
+                    <a:lnL>
+                      <a:noFill/>
                     </a:lnL>
-                    <a:lnR w="9525" cap="flat" cmpd="sng" algn="ctr">
-                      <a:solidFill>
-                        <a:srgbClr val="DDE3EA"/>
-                      </a:solidFill>
-                      <a:prstDash val="solid"/>
-                      <a:round/>
-                      <a:headEnd type="none" w="med" len="med"/>
-                      <a:tailEnd type="none" w="med" len="med"/>
+                    <a:lnR>
+                      <a:noFill/>
                     </a:lnR>
-                    <a:lnT w="9525" cap="flat" cmpd="sng" algn="ctr">
+                    <a:lnT w="6350" cap="flat" cmpd="sng" algn="ctr">
                       <a:solidFill>
                         <a:srgbClr val="DDE3EA"/>
                       </a:solidFill>
@@ -6802,7 +6578,7 @@
                       <a:headEnd type="none" w="med" len="med"/>
                       <a:tailEnd type="none" w="med" len="med"/>
                     </a:lnT>
-                    <a:lnB w="9525" cap="flat" cmpd="sng" algn="ctr">
+                    <a:lnB w="6350" cap="flat" cmpd="sng" algn="ctr">
                       <a:solidFill>
                         <a:srgbClr val="DDE3EA"/>
                       </a:solidFill>
@@ -6844,26 +6620,14 @@
                       </a:endParaRPr>
                     </a:p>
                   </a:txBody>
-                  <a:tcPr marL="91440" marR="91440" marT="0" marB="0" anchor="ctr">
-                    <a:lnL w="9525" cap="flat" cmpd="sng" algn="ctr">
-                      <a:solidFill>
-                        <a:srgbClr val="DDE3EA"/>
-                      </a:solidFill>
-                      <a:prstDash val="solid"/>
-                      <a:round/>
-                      <a:headEnd type="none" w="med" len="med"/>
-                      <a:tailEnd type="none" w="med" len="med"/>
+                  <a:tcPr marL="182880" marR="91440" marT="0" marB="0" anchor="ctr">
+                    <a:lnL>
+                      <a:noFill/>
                     </a:lnL>
-                    <a:lnR w="9525" cap="flat" cmpd="sng" algn="ctr">
-                      <a:solidFill>
-                        <a:srgbClr val="DDE3EA"/>
-                      </a:solidFill>
-                      <a:prstDash val="solid"/>
-                      <a:round/>
-                      <a:headEnd type="none" w="med" len="med"/>
-                      <a:tailEnd type="none" w="med" len="med"/>
+                    <a:lnR>
+                      <a:noFill/>
                     </a:lnR>
-                    <a:lnT w="9525" cap="flat" cmpd="sng" algn="ctr">
+                    <a:lnT w="6350" cap="flat" cmpd="sng" algn="ctr">
                       <a:solidFill>
                         <a:srgbClr val="DDE3EA"/>
                       </a:solidFill>
@@ -6872,7 +6636,7 @@
                       <a:headEnd type="none" w="med" len="med"/>
                       <a:tailEnd type="none" w="med" len="med"/>
                     </a:lnT>
-                    <a:lnB w="9525" cap="flat" cmpd="sng" algn="ctr">
+                    <a:lnB w="6350" cap="flat" cmpd="sng" algn="ctr">
                       <a:solidFill>
                         <a:srgbClr val="DDE3EA"/>
                       </a:solidFill>
@@ -6913,25 +6677,13 @@
                     </a:p>
                   </a:txBody>
                   <a:tcPr marL="91440" marR="91440" marT="0" marB="0" anchor="ctr">
-                    <a:lnL w="9525" cap="flat" cmpd="sng" algn="ctr">
-                      <a:solidFill>
-                        <a:srgbClr val="DDE3EA"/>
-                      </a:solidFill>
-                      <a:prstDash val="solid"/>
-                      <a:round/>
-                      <a:headEnd type="none" w="med" len="med"/>
-                      <a:tailEnd type="none" w="med" len="med"/>
+                    <a:lnL>
+                      <a:noFill/>
                     </a:lnL>
-                    <a:lnR w="9525" cap="flat" cmpd="sng" algn="ctr">
-                      <a:solidFill>
-                        <a:srgbClr val="DDE3EA"/>
-                      </a:solidFill>
-                      <a:prstDash val="solid"/>
-                      <a:round/>
-                      <a:headEnd type="none" w="med" len="med"/>
-                      <a:tailEnd type="none" w="med" len="med"/>
+                    <a:lnR>
+                      <a:noFill/>
                     </a:lnR>
-                    <a:lnT w="9525" cap="flat" cmpd="sng" algn="ctr">
+                    <a:lnT w="6350" cap="flat" cmpd="sng" algn="ctr">
                       <a:solidFill>
                         <a:srgbClr val="DDE3EA"/>
                       </a:solidFill>
@@ -6940,7 +6692,7 @@
                       <a:headEnd type="none" w="med" len="med"/>
                       <a:tailEnd type="none" w="med" len="med"/>
                     </a:lnT>
-                    <a:lnB w="9525" cap="flat" cmpd="sng" algn="ctr">
+                    <a:lnB w="6350" cap="flat" cmpd="sng" algn="ctr">
                       <a:solidFill>
                         <a:srgbClr val="DDE3EA"/>
                       </a:solidFill>
@@ -6981,25 +6733,13 @@
                     </a:p>
                   </a:txBody>
                   <a:tcPr marL="91440" marR="91440" marT="0" marB="0" anchor="ctr">
-                    <a:lnL w="9525" cap="flat" cmpd="sng" algn="ctr">
-                      <a:solidFill>
-                        <a:srgbClr val="DDE3EA"/>
-                      </a:solidFill>
-                      <a:prstDash val="solid"/>
-                      <a:round/>
-                      <a:headEnd type="none" w="med" len="med"/>
-                      <a:tailEnd type="none" w="med" len="med"/>
+                    <a:lnL>
+                      <a:noFill/>
                     </a:lnL>
-                    <a:lnR w="9525" cap="flat" cmpd="sng" algn="ctr">
-                      <a:solidFill>
-                        <a:srgbClr val="DDE3EA"/>
-                      </a:solidFill>
-                      <a:prstDash val="solid"/>
-                      <a:round/>
-                      <a:headEnd type="none" w="med" len="med"/>
-                      <a:tailEnd type="none" w="med" len="med"/>
+                    <a:lnR>
+                      <a:noFill/>
                     </a:lnR>
-                    <a:lnT w="9525" cap="flat" cmpd="sng" algn="ctr">
+                    <a:lnT w="6350" cap="flat" cmpd="sng" algn="ctr">
                       <a:solidFill>
                         <a:srgbClr val="DDE3EA"/>
                       </a:solidFill>
@@ -7008,7 +6748,7 @@
                       <a:headEnd type="none" w="med" len="med"/>
                       <a:tailEnd type="none" w="med" len="med"/>
                     </a:lnT>
-                    <a:lnB w="9525" cap="flat" cmpd="sng" algn="ctr">
+                    <a:lnB w="6350" cap="flat" cmpd="sng" algn="ctr">
                       <a:solidFill>
                         <a:srgbClr val="DDE3EA"/>
                       </a:solidFill>
@@ -7050,26 +6790,14 @@
                       </a:endParaRPr>
                     </a:p>
                   </a:txBody>
-                  <a:tcPr marL="91440" marR="91440" marT="0" marB="0" anchor="ctr">
-                    <a:lnL w="9525" cap="flat" cmpd="sng" algn="ctr">
-                      <a:solidFill>
-                        <a:srgbClr val="DDE3EA"/>
-                      </a:solidFill>
-                      <a:prstDash val="solid"/>
-                      <a:round/>
-                      <a:headEnd type="none" w="med" len="med"/>
-                      <a:tailEnd type="none" w="med" len="med"/>
+                  <a:tcPr marL="182880" marR="91440" marT="0" marB="0" anchor="ctr">
+                    <a:lnL>
+                      <a:noFill/>
                     </a:lnL>
-                    <a:lnR w="9525" cap="flat" cmpd="sng" algn="ctr">
-                      <a:solidFill>
-                        <a:srgbClr val="DDE3EA"/>
-                      </a:solidFill>
-                      <a:prstDash val="solid"/>
-                      <a:round/>
-                      <a:headEnd type="none" w="med" len="med"/>
-                      <a:tailEnd type="none" w="med" len="med"/>
+                    <a:lnR>
+                      <a:noFill/>
                     </a:lnR>
-                    <a:lnT w="9525" cap="flat" cmpd="sng" algn="ctr">
+                    <a:lnT w="6350" cap="flat" cmpd="sng" algn="ctr">
                       <a:solidFill>
                         <a:srgbClr val="DDE3EA"/>
                       </a:solidFill>
@@ -7078,7 +6806,7 @@
                       <a:headEnd type="none" w="med" len="med"/>
                       <a:tailEnd type="none" w="med" len="med"/>
                     </a:lnT>
-                    <a:lnB w="9525" cap="flat" cmpd="sng" algn="ctr">
+                    <a:lnB w="6350" cap="flat" cmpd="sng" algn="ctr">
                       <a:solidFill>
                         <a:srgbClr val="DDE3EA"/>
                       </a:solidFill>
@@ -7119,25 +6847,13 @@
                     </a:p>
                   </a:txBody>
                   <a:tcPr marL="91440" marR="91440" marT="0" marB="0" anchor="ctr">
-                    <a:lnL w="9525" cap="flat" cmpd="sng" algn="ctr">
-                      <a:solidFill>
-                        <a:srgbClr val="DDE3EA"/>
-                      </a:solidFill>
-                      <a:prstDash val="solid"/>
-                      <a:round/>
-                      <a:headEnd type="none" w="med" len="med"/>
-                      <a:tailEnd type="none" w="med" len="med"/>
+                    <a:lnL>
+                      <a:noFill/>
                     </a:lnL>
-                    <a:lnR w="9525" cap="flat" cmpd="sng" algn="ctr">
-                      <a:solidFill>
-                        <a:srgbClr val="DDE3EA"/>
-                      </a:solidFill>
-                      <a:prstDash val="solid"/>
-                      <a:round/>
-                      <a:headEnd type="none" w="med" len="med"/>
-                      <a:tailEnd type="none" w="med" len="med"/>
+                    <a:lnR>
+                      <a:noFill/>
                     </a:lnR>
-                    <a:lnT w="9525" cap="flat" cmpd="sng" algn="ctr">
+                    <a:lnT w="6350" cap="flat" cmpd="sng" algn="ctr">
                       <a:solidFill>
                         <a:srgbClr val="DDE3EA"/>
                       </a:solidFill>
@@ -7146,7 +6862,7 @@
                       <a:headEnd type="none" w="med" len="med"/>
                       <a:tailEnd type="none" w="med" len="med"/>
                     </a:lnT>
-                    <a:lnB w="9525" cap="flat" cmpd="sng" algn="ctr">
+                    <a:lnB w="6350" cap="flat" cmpd="sng" algn="ctr">
                       <a:solidFill>
                         <a:srgbClr val="DDE3EA"/>
                       </a:solidFill>
@@ -7187,25 +6903,13 @@
                     </a:p>
                   </a:txBody>
                   <a:tcPr marL="91440" marR="91440" marT="0" marB="0" anchor="ctr">
-                    <a:lnL w="9525" cap="flat" cmpd="sng" algn="ctr">
-                      <a:solidFill>
-                        <a:srgbClr val="DDE3EA"/>
-                      </a:solidFill>
-                      <a:prstDash val="solid"/>
-                      <a:round/>
-                      <a:headEnd type="none" w="med" len="med"/>
-                      <a:tailEnd type="none" w="med" len="med"/>
+                    <a:lnL>
+                      <a:noFill/>
                     </a:lnL>
-                    <a:lnR w="9525" cap="flat" cmpd="sng" algn="ctr">
-                      <a:solidFill>
-                        <a:srgbClr val="DDE3EA"/>
-                      </a:solidFill>
-                      <a:prstDash val="solid"/>
-                      <a:round/>
-                      <a:headEnd type="none" w="med" len="med"/>
-                      <a:tailEnd type="none" w="med" len="med"/>
+                    <a:lnR>
+                      <a:noFill/>
                     </a:lnR>
-                    <a:lnT w="9525" cap="flat" cmpd="sng" algn="ctr">
+                    <a:lnT w="6350" cap="flat" cmpd="sng" algn="ctr">
                       <a:solidFill>
                         <a:srgbClr val="DDE3EA"/>
                       </a:solidFill>
@@ -7214,7 +6918,7 @@
                       <a:headEnd type="none" w="med" len="med"/>
                       <a:tailEnd type="none" w="med" len="med"/>
                     </a:lnT>
-                    <a:lnB w="9525" cap="flat" cmpd="sng" algn="ctr">
+                    <a:lnB w="6350" cap="flat" cmpd="sng" algn="ctr">
                       <a:solidFill>
                         <a:srgbClr val="DDE3EA"/>
                       </a:solidFill>
@@ -7256,26 +6960,14 @@
                       </a:endParaRPr>
                     </a:p>
                   </a:txBody>
-                  <a:tcPr marL="91440" marR="91440" marT="0" marB="0" anchor="ctr">
-                    <a:lnL w="9525" cap="flat" cmpd="sng" algn="ctr">
-                      <a:solidFill>
-                        <a:srgbClr val="DDE3EA"/>
-                      </a:solidFill>
-                      <a:prstDash val="solid"/>
-                      <a:round/>
-                      <a:headEnd type="none" w="med" len="med"/>
-                      <a:tailEnd type="none" w="med" len="med"/>
+                  <a:tcPr marL="182880" marR="91440" marT="0" marB="0" anchor="ctr">
+                    <a:lnL>
+                      <a:noFill/>
                     </a:lnL>
-                    <a:lnR w="9525" cap="flat" cmpd="sng" algn="ctr">
-                      <a:solidFill>
-                        <a:srgbClr val="DDE3EA"/>
-                      </a:solidFill>
-                      <a:prstDash val="solid"/>
-                      <a:round/>
-                      <a:headEnd type="none" w="med" len="med"/>
-                      <a:tailEnd type="none" w="med" len="med"/>
+                    <a:lnR>
+                      <a:noFill/>
                     </a:lnR>
-                    <a:lnT w="9525" cap="flat" cmpd="sng" algn="ctr">
+                    <a:lnT w="6350" cap="flat" cmpd="sng" algn="ctr">
                       <a:solidFill>
                         <a:srgbClr val="DDE3EA"/>
                       </a:solidFill>
@@ -7284,7 +6976,7 @@
                       <a:headEnd type="none" w="med" len="med"/>
                       <a:tailEnd type="none" w="med" len="med"/>
                     </a:lnT>
-                    <a:lnB w="9525" cap="flat" cmpd="sng" algn="ctr">
+                    <a:lnB w="6350" cap="flat" cmpd="sng" algn="ctr">
                       <a:solidFill>
                         <a:srgbClr val="DDE3EA"/>
                       </a:solidFill>
@@ -7325,25 +7017,13 @@
                     </a:p>
                   </a:txBody>
                   <a:tcPr marL="91440" marR="91440" marT="0" marB="0" anchor="ctr">
-                    <a:lnL w="9525" cap="flat" cmpd="sng" algn="ctr">
-                      <a:solidFill>
-                        <a:srgbClr val="DDE3EA"/>
-                      </a:solidFill>
-                      <a:prstDash val="solid"/>
-                      <a:round/>
-                      <a:headEnd type="none" w="med" len="med"/>
-                      <a:tailEnd type="none" w="med" len="med"/>
+                    <a:lnL>
+                      <a:noFill/>
                     </a:lnL>
-                    <a:lnR w="9525" cap="flat" cmpd="sng" algn="ctr">
-                      <a:solidFill>
-                        <a:srgbClr val="DDE3EA"/>
-                      </a:solidFill>
-                      <a:prstDash val="solid"/>
-                      <a:round/>
-                      <a:headEnd type="none" w="med" len="med"/>
-                      <a:tailEnd type="none" w="med" len="med"/>
+                    <a:lnR>
+                      <a:noFill/>
                     </a:lnR>
-                    <a:lnT w="9525" cap="flat" cmpd="sng" algn="ctr">
+                    <a:lnT w="6350" cap="flat" cmpd="sng" algn="ctr">
                       <a:solidFill>
                         <a:srgbClr val="DDE3EA"/>
                       </a:solidFill>
@@ -7352,7 +7032,7 @@
                       <a:headEnd type="none" w="med" len="med"/>
                       <a:tailEnd type="none" w="med" len="med"/>
                     </a:lnT>
-                    <a:lnB w="9525" cap="flat" cmpd="sng" algn="ctr">
+                    <a:lnB w="6350" cap="flat" cmpd="sng" algn="ctr">
                       <a:solidFill>
                         <a:srgbClr val="DDE3EA"/>
                       </a:solidFill>
@@ -7393,25 +7073,13 @@
                     </a:p>
                   </a:txBody>
                   <a:tcPr marL="91440" marR="91440" marT="0" marB="0" anchor="ctr">
-                    <a:lnL w="9525" cap="flat" cmpd="sng" algn="ctr">
-                      <a:solidFill>
-                        <a:srgbClr val="DDE3EA"/>
-                      </a:solidFill>
-                      <a:prstDash val="solid"/>
-                      <a:round/>
-                      <a:headEnd type="none" w="med" len="med"/>
-                      <a:tailEnd type="none" w="med" len="med"/>
+                    <a:lnL>
+                      <a:noFill/>
                     </a:lnL>
-                    <a:lnR w="9525" cap="flat" cmpd="sng" algn="ctr">
-                      <a:solidFill>
-                        <a:srgbClr val="DDE3EA"/>
-                      </a:solidFill>
-                      <a:prstDash val="solid"/>
-                      <a:round/>
-                      <a:headEnd type="none" w="med" len="med"/>
-                      <a:tailEnd type="none" w="med" len="med"/>
+                    <a:lnR>
+                      <a:noFill/>
                     </a:lnR>
-                    <a:lnT w="9525" cap="flat" cmpd="sng" algn="ctr">
+                    <a:lnT w="6350" cap="flat" cmpd="sng" algn="ctr">
                       <a:solidFill>
                         <a:srgbClr val="DDE3EA"/>
                       </a:solidFill>
@@ -7420,7 +7088,7 @@
                       <a:headEnd type="none" w="med" len="med"/>
                       <a:tailEnd type="none" w="med" len="med"/>
                     </a:lnT>
-                    <a:lnB w="9525" cap="flat" cmpd="sng" algn="ctr">
+                    <a:lnB w="6350" cap="flat" cmpd="sng" algn="ctr">
                       <a:solidFill>
                         <a:srgbClr val="DDE3EA"/>
                       </a:solidFill>
@@ -7977,8 +7645,8 @@
         </p:nvSpPr>
         <p:spPr>
           <a:xfrm>
-            <a:off x="548640" y="2560320"/>
-            <a:ext cx="1353312" cy="640080"/>
+            <a:off x="512064" y="2560320"/>
+            <a:ext cx="1426464" cy="640080"/>
           </a:xfrm>
           <a:prstGeom prst="rect">
             <a:avLst/>
@@ -8002,7 +7670,19 @@
                 <a:ea typeface="Inter" pitchFamily="34" charset="-122"/>
                 <a:cs typeface="Inter" pitchFamily="34" charset="-120"/>
               </a:rPr>
-              <a:t>the same contracted week</a:t>
+              <a:t>the contracted</a:t>
+            </a:r>
+            <a:br/>
+            <a:r>
+              <a:rPr lang="en-US" sz="1400" b="1" dirty="0">
+                <a:solidFill>
+                  <a:srgbClr val="1B2533"/>
+                </a:solidFill>
+                <a:latin typeface="Inter" pitchFamily="34" charset="0"/>
+                <a:ea typeface="Inter" pitchFamily="34" charset="-122"/>
+                <a:cs typeface="Inter" pitchFamily="34" charset="-120"/>
+              </a:rPr>
+              <a:t>week, as now</a:t>
             </a:r>
             <a:endParaRPr lang="en-US" sz="1400" dirty="0"/>
           </a:p>
@@ -8016,8 +7696,8 @@
         </p:nvSpPr>
         <p:spPr>
           <a:xfrm>
-            <a:off x="548640" y="3200400"/>
-            <a:ext cx="1353312" cy="457200"/>
+            <a:off x="512064" y="3200400"/>
+            <a:ext cx="1426464" cy="457200"/>
           </a:xfrm>
           <a:prstGeom prst="rect">
             <a:avLst/>
@@ -8041,7 +7721,7 @@
                 <a:ea typeface="Inter" pitchFamily="34" charset="-122"/>
                 <a:cs typeface="Inter" pitchFamily="34" charset="-120"/>
               </a:rPr>
-              <a:t>no extra contracted hours</a:t>
+              <a:t>no extra hours</a:t>
             </a:r>
             <a:endParaRPr lang="en-US" sz="1200" dirty="0"/>
           </a:p>
@@ -8123,8 +7803,8 @@
         </p:nvSpPr>
         <p:spPr>
           <a:xfrm>
-            <a:off x="2221992" y="2560320"/>
-            <a:ext cx="1353312" cy="640080"/>
+            <a:off x="2185416" y="2560320"/>
+            <a:ext cx="1426464" cy="640080"/>
           </a:xfrm>
           <a:prstGeom prst="rect">
             <a:avLst/>
@@ -8148,7 +7828,19 @@
                 <a:ea typeface="Inter" pitchFamily="34" charset="-122"/>
                 <a:cs typeface="Inter" pitchFamily="34" charset="-120"/>
               </a:rPr>
-              <a:t>most days in a row</a:t>
+              <a:t>most days</a:t>
+            </a:r>
+            <a:br/>
+            <a:r>
+              <a:rPr lang="en-US" sz="1400" b="1" dirty="0">
+                <a:solidFill>
+                  <a:srgbClr val="1B2533"/>
+                </a:solidFill>
+                <a:latin typeface="Inter" pitchFamily="34" charset="0"/>
+                <a:ea typeface="Inter" pitchFamily="34" charset="-122"/>
+                <a:cs typeface="Inter" pitchFamily="34" charset="-120"/>
+              </a:rPr>
+              <a:t>in a row</a:t>
             </a:r>
             <a:endParaRPr lang="en-US" sz="1400" dirty="0"/>
           </a:p>
@@ -8162,8 +7854,8 @@
         </p:nvSpPr>
         <p:spPr>
           <a:xfrm>
-            <a:off x="2221992" y="3200400"/>
-            <a:ext cx="1353312" cy="457200"/>
+            <a:off x="2185416" y="3200400"/>
+            <a:ext cx="1426464" cy="457200"/>
           </a:xfrm>
           <a:prstGeom prst="rect">
             <a:avLst/>
@@ -8269,8 +7961,8 @@
         </p:nvSpPr>
         <p:spPr>
           <a:xfrm>
-            <a:off x="3895344" y="2560320"/>
-            <a:ext cx="1353312" cy="640080"/>
+            <a:off x="3858768" y="2560320"/>
+            <a:ext cx="1426464" cy="640080"/>
           </a:xfrm>
           <a:prstGeom prst="rect">
             <a:avLst/>
@@ -8294,7 +7986,19 @@
                 <a:ea typeface="Inter" pitchFamily="34" charset="-122"/>
                 <a:cs typeface="Inter" pitchFamily="34" charset="-120"/>
               </a:rPr>
-              <a:t>full weekends off a year</a:t>
+              <a:t>full weekends</a:t>
+            </a:r>
+            <a:br/>
+            <a:r>
+              <a:rPr lang="en-US" sz="1400" b="1" dirty="0">
+                <a:solidFill>
+                  <a:srgbClr val="1B2533"/>
+                </a:solidFill>
+                <a:latin typeface="Inter" pitchFamily="34" charset="0"/>
+                <a:ea typeface="Inter" pitchFamily="34" charset="-122"/>
+                <a:cs typeface="Inter" pitchFamily="34" charset="-120"/>
+              </a:rPr>
+              <a:t>off a year</a:t>
             </a:r>
             <a:endParaRPr lang="en-US" sz="1400" dirty="0"/>
           </a:p>
@@ -8308,8 +8012,8 @@
         </p:nvSpPr>
         <p:spPr>
           <a:xfrm>
-            <a:off x="3895344" y="3200400"/>
-            <a:ext cx="1353312" cy="457200"/>
+            <a:off x="3858768" y="3200400"/>
+            <a:ext cx="1426464" cy="457200"/>
           </a:xfrm>
           <a:prstGeom prst="rect">
             <a:avLst/>
@@ -8333,7 +8037,7 @@
                 <a:ea typeface="Inter" pitchFamily="34" charset="-122"/>
                 <a:cs typeface="Inter" pitchFamily="34" charset="-120"/>
               </a:rPr>
-              <a:t>today 10 · 7 in 26 · at most 5 apart</a:t>
+              <a:t>today 10 · 7 in 26</a:t>
             </a:r>
             <a:endParaRPr lang="en-US" sz="1200" dirty="0"/>
           </a:p>
@@ -8415,8 +8119,8 @@
         </p:nvSpPr>
         <p:spPr>
           <a:xfrm>
-            <a:off x="5568696" y="2560320"/>
-            <a:ext cx="1353312" cy="640080"/>
+            <a:off x="5532120" y="2560320"/>
+            <a:ext cx="1426464" cy="640080"/>
           </a:xfrm>
           <a:prstGeom prst="rect">
             <a:avLst/>
@@ -8440,7 +8144,19 @@
                 <a:ea typeface="Inter" pitchFamily="34" charset="-122"/>
                 <a:cs typeface="Inter" pitchFamily="34" charset="-120"/>
               </a:rPr>
-              <a:t>shift times you already work</a:t>
+              <a:t>shift times you</a:t>
+            </a:r>
+            <a:br/>
+            <a:r>
+              <a:rPr lang="en-US" sz="1400" b="1" dirty="0">
+                <a:solidFill>
+                  <a:srgbClr val="1B2533"/>
+                </a:solidFill>
+                <a:latin typeface="Inter" pitchFamily="34" charset="0"/>
+                <a:ea typeface="Inter" pitchFamily="34" charset="-122"/>
+                <a:cs typeface="Inter" pitchFamily="34" charset="-120"/>
+              </a:rPr>
+              <a:t>already work</a:t>
             </a:r>
             <a:endParaRPr lang="en-US" sz="1400" dirty="0"/>
           </a:p>
@@ -8454,8 +8170,8 @@
         </p:nvSpPr>
         <p:spPr>
           <a:xfrm>
-            <a:off x="5568696" y="3200400"/>
-            <a:ext cx="1353312" cy="457200"/>
+            <a:off x="5532120" y="3200400"/>
+            <a:ext cx="1426464" cy="457200"/>
           </a:xfrm>
           <a:prstGeom prst="rect">
             <a:avLst/>
@@ -8561,8 +8277,8 @@
         </p:nvSpPr>
         <p:spPr>
           <a:xfrm>
-            <a:off x="7242048" y="2560320"/>
-            <a:ext cx="1353312" cy="640080"/>
+            <a:off x="7205472" y="2560320"/>
+            <a:ext cx="1426464" cy="640080"/>
           </a:xfrm>
           <a:prstGeom prst="rect">
             <a:avLst/>
@@ -8586,7 +8302,19 @@
                 <a:ea typeface="Inter" pitchFamily="34" charset="-122"/>
                 <a:cs typeface="Inter" pitchFamily="34" charset="-120"/>
               </a:rPr>
-              <a:t>shorter on every closing shift</a:t>
+              <a:t>off every</a:t>
+            </a:r>
+            <a:br/>
+            <a:r>
+              <a:rPr lang="en-US" sz="1400" b="1" dirty="0">
+                <a:solidFill>
+                  <a:srgbClr val="1B2533"/>
+                </a:solidFill>
+                <a:latin typeface="Inter" pitchFamily="34" charset="0"/>
+                <a:ea typeface="Inter" pitchFamily="34" charset="-122"/>
+                <a:cs typeface="Inter" pitchFamily="34" charset="-120"/>
+              </a:rPr>
+              <a:t>closing shift</a:t>
             </a:r>
             <a:endParaRPr lang="en-US" sz="1400" dirty="0"/>
           </a:p>
@@ -8600,8 +8328,8 @@
         </p:nvSpPr>
         <p:spPr>
           <a:xfrm>
-            <a:off x="7242048" y="3200400"/>
-            <a:ext cx="1353312" cy="457200"/>
+            <a:off x="7205472" y="3200400"/>
+            <a:ext cx="1426464" cy="457200"/>
           </a:xfrm>
           <a:prstGeom prst="rect">
             <a:avLst/>
@@ -8625,7 +8353,7 @@
                 <a:ea typeface="Inter" pitchFamily="34" charset="-122"/>
                 <a:cs typeface="Inter" pitchFamily="34" charset="-120"/>
               </a:rPr>
-              <a:t>45 min on a Sunday</a:t>
+              <a:t>Sundays: 45 min</a:t>
             </a:r>
             <a:endParaRPr lang="en-US" sz="1200" dirty="0"/>
           </a:p>
@@ -8981,7 +8709,7 @@
         </p:nvSpPr>
         <p:spPr>
           <a:xfrm>
-            <a:off x="457200" y="2233968"/>
+            <a:off x="457200" y="2084832"/>
             <a:ext cx="457200" cy="457200"/>
           </a:xfrm>
           <a:prstGeom prst="ellipse">
@@ -9014,7 +8742,7 @@
         </p:blipFill>
         <p:spPr>
           <a:xfrm>
-            <a:off x="557784" y="2334552"/>
+            <a:off x="557784" y="2185416"/>
             <a:ext cx="256032" cy="256032"/>
           </a:xfrm>
           <a:prstGeom prst="rect">
@@ -9030,7 +8758,7 @@
         </p:nvSpPr>
         <p:spPr>
           <a:xfrm>
-            <a:off x="1097280" y="2197392"/>
+            <a:off x="1097280" y="2048256"/>
             <a:ext cx="7589520" cy="292608"/>
           </a:xfrm>
           <a:prstGeom prst="rect">
@@ -9069,7 +8797,7 @@
         </p:nvSpPr>
         <p:spPr>
           <a:xfrm>
-            <a:off x="1097280" y="2480856"/>
+            <a:off x="1097280" y="2331720"/>
             <a:ext cx="7589520" cy="274320"/>
           </a:xfrm>
           <a:prstGeom prst="rect">
@@ -9108,7 +8836,7 @@
         </p:nvSpPr>
         <p:spPr>
           <a:xfrm>
-            <a:off x="457200" y="3096336"/>
+            <a:off x="457200" y="2798064"/>
             <a:ext cx="457200" cy="457200"/>
           </a:xfrm>
           <a:prstGeom prst="ellipse">
@@ -9141,7 +8869,7 @@
         </p:blipFill>
         <p:spPr>
           <a:xfrm>
-            <a:off x="557784" y="3196920"/>
+            <a:off x="557784" y="2898648"/>
             <a:ext cx="256032" cy="256032"/>
           </a:xfrm>
           <a:prstGeom prst="rect">
@@ -9157,7 +8885,7 @@
         </p:nvSpPr>
         <p:spPr>
           <a:xfrm>
-            <a:off x="1097280" y="3059760"/>
+            <a:off x="1097280" y="2761488"/>
             <a:ext cx="7589520" cy="292608"/>
           </a:xfrm>
           <a:prstGeom prst="rect">
@@ -9196,7 +8924,7 @@
         </p:nvSpPr>
         <p:spPr>
           <a:xfrm>
-            <a:off x="1097280" y="3343224"/>
+            <a:off x="1097280" y="3044952"/>
             <a:ext cx="7589520" cy="274320"/>
           </a:xfrm>
           <a:prstGeom prst="rect">
@@ -9235,7 +8963,7 @@
         </p:nvSpPr>
         <p:spPr>
           <a:xfrm>
-            <a:off x="457200" y="3958704"/>
+            <a:off x="457200" y="3511296"/>
             <a:ext cx="457200" cy="457200"/>
           </a:xfrm>
           <a:prstGeom prst="ellipse">
@@ -9268,7 +8996,7 @@
         </p:blipFill>
         <p:spPr>
           <a:xfrm>
-            <a:off x="557784" y="4059288"/>
+            <a:off x="557784" y="3611880"/>
             <a:ext cx="256032" cy="256032"/>
           </a:xfrm>
           <a:prstGeom prst="rect">
@@ -9284,7 +9012,7 @@
         </p:nvSpPr>
         <p:spPr>
           <a:xfrm>
-            <a:off x="1097280" y="3922128"/>
+            <a:off x="1097280" y="3474720"/>
             <a:ext cx="7589520" cy="292608"/>
           </a:xfrm>
           <a:prstGeom prst="rect">
@@ -9323,7 +9051,7 @@
         </p:nvSpPr>
         <p:spPr>
           <a:xfrm>
-            <a:off x="1097280" y="4205592"/>
+            <a:off x="1097280" y="3758184"/>
             <a:ext cx="7589520" cy="274320"/>
           </a:xfrm>
           <a:prstGeom prst="rect">
@@ -9351,6 +9079,70 @@
               <a:t>Two early and two late, on the same shifts, every day.</a:t>
             </a:r>
             <a:endParaRPr lang="en-US" sz="1300" dirty="0"/>
+          </a:p>
+        </p:txBody>
+      </p:sp>
+      <p:sp>
+        <p:nvSpPr>
+          <p:cNvPr id="21" name="Banner"/>
+          <p:cNvSpPr/>
+          <p:nvPr/>
+        </p:nvSpPr>
+        <p:spPr>
+          <a:xfrm>
+            <a:off x="457200" y="4160520"/>
+            <a:ext cx="8229600" cy="548640"/>
+          </a:xfrm>
+          <a:prstGeom prst="roundRect">
+            <a:avLst>
+              <a:gd name="adj" fmla="val 16667"/>
+            </a:avLst>
+          </a:prstGeom>
+          <a:solidFill>
+            <a:srgbClr val="001E3C"/>
+          </a:solidFill>
+          <a:ln w="12700">
+            <a:solidFill>
+              <a:srgbClr val="001E3C"/>
+            </a:solidFill>
+            <a:prstDash val="solid"/>
+          </a:ln>
+        </p:spPr>
+      </p:sp>
+      <p:sp>
+        <p:nvSpPr>
+          <p:cNvPr id="22" name="Banner text"/>
+          <p:cNvSpPr txBox="1"/>
+          <p:nvPr/>
+        </p:nvSpPr>
+        <p:spPr>
+          <a:xfrm>
+            <a:off x="640080" y="4160520"/>
+            <a:ext cx="7863840" cy="548640"/>
+          </a:xfrm>
+          <a:prstGeom prst="rect">
+            <a:avLst/>
+          </a:prstGeom>
+          <a:noFill/>
+        </p:spPr>
+        <p:txBody>
+          <a:bodyPr wrap="square" lIns="0" tIns="0" rIns="0" bIns="0" rtlCol="0" anchor="ctr"/>
+          <a:lstStyle/>
+          <a:p>
+            <a:pPr indent="0" marL="0">
+              <a:buNone/>
+            </a:pPr>
+            <a:r>
+              <a:rPr lang="en-US" sz="1400" b="1" dirty="0">
+                <a:solidFill>
+                  <a:srgbClr val="FFFFFF"/>
+                </a:solidFill>
+                <a:latin typeface="Inter" pitchFamily="34" charset="0"/>
+                <a:ea typeface="Inter" pitchFamily="34" charset="-122"/>
+                <a:cs typeface="Inter" pitchFamily="34" charset="-120"/>
+              </a:rPr>
+              <a:t>The change is coming whatever we do — the question is which version we want.</a:t>
+            </a:r>
           </a:p>
         </p:txBody>
       </p:sp>
@@ -9511,8 +9303,8 @@
         </p:nvSpPr>
         <p:spPr>
           <a:xfrm>
-            <a:off x="4297680" y="1417320"/>
-            <a:ext cx="2194560" cy="320040"/>
+            <a:off x="4663440" y="1417320"/>
+            <a:ext cx="2011680" cy="320040"/>
           </a:xfrm>
           <a:prstGeom prst="rect">
             <a:avLst/>
@@ -9550,8 +9342,8 @@
         </p:nvSpPr>
         <p:spPr>
           <a:xfrm>
-            <a:off x="6492240" y="1417320"/>
-            <a:ext cx="2194560" cy="320040"/>
+            <a:off x="6675120" y="1417320"/>
+            <a:ext cx="2011680" cy="320040"/>
           </a:xfrm>
           <a:prstGeom prst="rect">
             <a:avLst/>
@@ -9590,7 +9382,7 @@
         <p:spPr>
           <a:xfrm>
             <a:off x="457200" y="1801368"/>
-            <a:ext cx="8229600" cy="475488"/>
+            <a:ext cx="8229600" cy="365760"/>
           </a:xfrm>
           <a:prstGeom prst="roundRect">
             <a:avLst>
@@ -9617,7 +9409,7 @@
         <p:spPr>
           <a:xfrm>
             <a:off x="640080" y="1801368"/>
-            <a:ext cx="3657600" cy="475488"/>
+            <a:ext cx="4023360" cy="365760"/>
           </a:xfrm>
           <a:prstGeom prst="rect">
             <a:avLst/>
@@ -9655,8 +9447,8 @@
         </p:nvSpPr>
         <p:spPr>
           <a:xfrm>
-            <a:off x="4297680" y="1801368"/>
-            <a:ext cx="2194560" cy="475488"/>
+            <a:off x="4663440" y="1801368"/>
+            <a:ext cx="2011680" cy="365760"/>
           </a:xfrm>
           <a:prstGeom prst="rect">
             <a:avLst/>
@@ -9694,8 +9486,8 @@
         </p:nvSpPr>
         <p:spPr>
           <a:xfrm>
-            <a:off x="6492240" y="1801368"/>
-            <a:ext cx="2194560" cy="475488"/>
+            <a:off x="6675120" y="1801368"/>
+            <a:ext cx="2011680" cy="365760"/>
           </a:xfrm>
           <a:prstGeom prst="rect">
             <a:avLst/>
@@ -9733,8 +9525,8 @@
         </p:nvSpPr>
         <p:spPr>
           <a:xfrm>
-            <a:off x="457200" y="2368296"/>
-            <a:ext cx="8229600" cy="475488"/>
+            <a:off x="457200" y="2240280"/>
+            <a:ext cx="8229600" cy="365760"/>
           </a:xfrm>
           <a:prstGeom prst="roundRect">
             <a:avLst>
@@ -9760,8 +9552,8 @@
         </p:nvSpPr>
         <p:spPr>
           <a:xfrm>
-            <a:off x="640080" y="2368296"/>
-            <a:ext cx="3657600" cy="475488"/>
+            <a:off x="640080" y="2240280"/>
+            <a:ext cx="4023360" cy="365760"/>
           </a:xfrm>
           <a:prstGeom prst="rect">
             <a:avLst/>
@@ -9799,8 +9591,8 @@
         </p:nvSpPr>
         <p:spPr>
           <a:xfrm>
-            <a:off x="4297680" y="2368296"/>
-            <a:ext cx="2194560" cy="475488"/>
+            <a:off x="4663440" y="2240280"/>
+            <a:ext cx="2011680" cy="365760"/>
           </a:xfrm>
           <a:prstGeom prst="rect">
             <a:avLst/>
@@ -9838,8 +9630,8 @@
         </p:nvSpPr>
         <p:spPr>
           <a:xfrm>
-            <a:off x="6492240" y="2368296"/>
-            <a:ext cx="2194560" cy="475488"/>
+            <a:off x="6675120" y="2240280"/>
+            <a:ext cx="2011680" cy="365760"/>
           </a:xfrm>
           <a:prstGeom prst="rect">
             <a:avLst/>
@@ -9877,8 +9669,8 @@
         </p:nvSpPr>
         <p:spPr>
           <a:xfrm>
-            <a:off x="457200" y="2935224"/>
-            <a:ext cx="8229600" cy="475488"/>
+            <a:off x="457200" y="2679192"/>
+            <a:ext cx="8229600" cy="365760"/>
           </a:xfrm>
           <a:prstGeom prst="roundRect">
             <a:avLst>
@@ -9904,8 +9696,8 @@
         </p:nvSpPr>
         <p:spPr>
           <a:xfrm>
-            <a:off x="640080" y="2935224"/>
-            <a:ext cx="3657600" cy="475488"/>
+            <a:off x="640080" y="2679192"/>
+            <a:ext cx="4023360" cy="365760"/>
           </a:xfrm>
           <a:prstGeom prst="rect">
             <a:avLst/>
@@ -9943,8 +9735,8 @@
         </p:nvSpPr>
         <p:spPr>
           <a:xfrm>
-            <a:off x="4297680" y="2935224"/>
-            <a:ext cx="2194560" cy="475488"/>
+            <a:off x="4663440" y="2679192"/>
+            <a:ext cx="2011680" cy="365760"/>
           </a:xfrm>
           <a:prstGeom prst="rect">
             <a:avLst/>
@@ -9982,8 +9774,8 @@
         </p:nvSpPr>
         <p:spPr>
           <a:xfrm>
-            <a:off x="6492240" y="2935224"/>
-            <a:ext cx="2194560" cy="475488"/>
+            <a:off x="6675120" y="2679192"/>
+            <a:ext cx="2011680" cy="365760"/>
           </a:xfrm>
           <a:prstGeom prst="rect">
             <a:avLst/>
@@ -10236,8 +10028,8 @@
         </p:nvSpPr>
         <p:spPr>
           <a:xfrm>
-            <a:off x="4846320" y="1417320"/>
-            <a:ext cx="1920240" cy="320040"/>
+            <a:off x="4663440" y="1417320"/>
+            <a:ext cx="2011680" cy="320040"/>
           </a:xfrm>
           <a:prstGeom prst="rect">
             <a:avLst/>
@@ -10275,8 +10067,8 @@
         </p:nvSpPr>
         <p:spPr>
           <a:xfrm>
-            <a:off x="6766560" y="1417320"/>
-            <a:ext cx="1920240" cy="320040"/>
+            <a:off x="6675120" y="1417320"/>
+            <a:ext cx="2011680" cy="320040"/>
           </a:xfrm>
           <a:prstGeom prst="rect">
             <a:avLst/>
@@ -10315,7 +10107,7 @@
         <p:spPr>
           <a:xfrm>
             <a:off x="457200" y="1801368"/>
-            <a:ext cx="8229600" cy="475488"/>
+            <a:ext cx="8229600" cy="365760"/>
           </a:xfrm>
           <a:prstGeom prst="roundRect">
             <a:avLst>
@@ -10342,7 +10134,7 @@
         <p:spPr>
           <a:xfrm>
             <a:off x="640080" y="1801368"/>
-            <a:ext cx="4206240" cy="475488"/>
+            <a:ext cx="4023360" cy="365760"/>
           </a:xfrm>
           <a:prstGeom prst="rect">
             <a:avLst/>
@@ -10380,8 +10172,8 @@
         </p:nvSpPr>
         <p:spPr>
           <a:xfrm>
-            <a:off x="4846320" y="1801368"/>
-            <a:ext cx="1920240" cy="475488"/>
+            <a:off x="4663440" y="1801368"/>
+            <a:ext cx="2011680" cy="365760"/>
           </a:xfrm>
           <a:prstGeom prst="rect">
             <a:avLst/>
@@ -10419,8 +10211,8 @@
         </p:nvSpPr>
         <p:spPr>
           <a:xfrm>
-            <a:off x="6766560" y="1801368"/>
-            <a:ext cx="1920240" cy="475488"/>
+            <a:off x="6675120" y="1801368"/>
+            <a:ext cx="2011680" cy="365760"/>
           </a:xfrm>
           <a:prstGeom prst="rect">
             <a:avLst/>
@@ -10458,8 +10250,8 @@
         </p:nvSpPr>
         <p:spPr>
           <a:xfrm>
-            <a:off x="457200" y="2368296"/>
-            <a:ext cx="8229600" cy="475488"/>
+            <a:off x="457200" y="2240280"/>
+            <a:ext cx="8229600" cy="365760"/>
           </a:xfrm>
           <a:prstGeom prst="roundRect">
             <a:avLst>
@@ -10485,8 +10277,8 @@
         </p:nvSpPr>
         <p:spPr>
           <a:xfrm>
-            <a:off x="640080" y="2368296"/>
-            <a:ext cx="4206240" cy="475488"/>
+            <a:off x="640080" y="2240280"/>
+            <a:ext cx="4023360" cy="365760"/>
           </a:xfrm>
           <a:prstGeom prst="rect">
             <a:avLst/>
@@ -10524,8 +10316,8 @@
         </p:nvSpPr>
         <p:spPr>
           <a:xfrm>
-            <a:off x="4846320" y="2368296"/>
-            <a:ext cx="1920240" cy="475488"/>
+            <a:off x="4663440" y="2240280"/>
+            <a:ext cx="2011680" cy="365760"/>
           </a:xfrm>
           <a:prstGeom prst="rect">
             <a:avLst/>
@@ -10563,8 +10355,8 @@
         </p:nvSpPr>
         <p:spPr>
           <a:xfrm>
-            <a:off x="6766560" y="2368296"/>
-            <a:ext cx="1920240" cy="475488"/>
+            <a:off x="6675120" y="2240280"/>
+            <a:ext cx="2011680" cy="365760"/>
           </a:xfrm>
           <a:prstGeom prst="rect">
             <a:avLst/>
@@ -10602,8 +10394,8 @@
         </p:nvSpPr>
         <p:spPr>
           <a:xfrm>
-            <a:off x="457200" y="2935224"/>
-            <a:ext cx="8229600" cy="475488"/>
+            <a:off x="457200" y="2679192"/>
+            <a:ext cx="8229600" cy="365760"/>
           </a:xfrm>
           <a:prstGeom prst="roundRect">
             <a:avLst>
@@ -10629,8 +10421,8 @@
         </p:nvSpPr>
         <p:spPr>
           <a:xfrm>
-            <a:off x="640080" y="2935224"/>
-            <a:ext cx="4206240" cy="475488"/>
+            <a:off x="640080" y="2679192"/>
+            <a:ext cx="4023360" cy="365760"/>
           </a:xfrm>
           <a:prstGeom prst="rect">
             <a:avLst/>
@@ -10668,8 +10460,8 @@
         </p:nvSpPr>
         <p:spPr>
           <a:xfrm>
-            <a:off x="4846320" y="2935224"/>
-            <a:ext cx="1920240" cy="475488"/>
+            <a:off x="4663440" y="2679192"/>
+            <a:ext cx="2011680" cy="365760"/>
           </a:xfrm>
           <a:prstGeom prst="rect">
             <a:avLst/>
@@ -10707,8 +10499,8 @@
         </p:nvSpPr>
         <p:spPr>
           <a:xfrm>
-            <a:off x="6766560" y="2935224"/>
-            <a:ext cx="1920240" cy="475488"/>
+            <a:off x="6675120" y="2679192"/>
+            <a:ext cx="2011680" cy="365760"/>
           </a:xfrm>
           <a:prstGeom prst="rect">
             <a:avLst/>
@@ -11183,7 +10975,7 @@
         </p:nvSpPr>
         <p:spPr>
           <a:xfrm>
-            <a:off x="457200" y="2258568"/>
+            <a:off x="457200" y="2240280"/>
             <a:ext cx="8229600" cy="365760"/>
           </a:xfrm>
           <a:prstGeom prst="roundRect">
@@ -11210,7 +11002,7 @@
         </p:nvSpPr>
         <p:spPr>
           <a:xfrm>
-            <a:off x="640080" y="2258568"/>
+            <a:off x="640080" y="2240280"/>
             <a:ext cx="4023360" cy="365760"/>
           </a:xfrm>
           <a:prstGeom prst="rect">
@@ -11249,7 +11041,7 @@
         </p:nvSpPr>
         <p:spPr>
           <a:xfrm>
-            <a:off x="4663440" y="2258568"/>
+            <a:off x="4663440" y="2240280"/>
             <a:ext cx="2011680" cy="365760"/>
           </a:xfrm>
           <a:prstGeom prst="rect">
@@ -11288,7 +11080,7 @@
         </p:nvSpPr>
         <p:spPr>
           <a:xfrm>
-            <a:off x="6675120" y="2258568"/>
+            <a:off x="6675120" y="2240280"/>
             <a:ext cx="2011680" cy="365760"/>
           </a:xfrm>
           <a:prstGeom prst="rect">
@@ -11327,7 +11119,7 @@
         </p:nvSpPr>
         <p:spPr>
           <a:xfrm>
-            <a:off x="457200" y="2715768"/>
+            <a:off x="457200" y="2679192"/>
             <a:ext cx="8229600" cy="365760"/>
           </a:xfrm>
           <a:prstGeom prst="roundRect">
@@ -11354,7 +11146,7 @@
         </p:nvSpPr>
         <p:spPr>
           <a:xfrm>
-            <a:off x="640080" y="2715768"/>
+            <a:off x="640080" y="2679192"/>
             <a:ext cx="4023360" cy="365760"/>
           </a:xfrm>
           <a:prstGeom prst="rect">
@@ -11393,7 +11185,7 @@
         </p:nvSpPr>
         <p:spPr>
           <a:xfrm>
-            <a:off x="4663440" y="2715768"/>
+            <a:off x="4663440" y="2679192"/>
             <a:ext cx="2011680" cy="365760"/>
           </a:xfrm>
           <a:prstGeom prst="rect">
@@ -11432,7 +11224,7 @@
         </p:nvSpPr>
         <p:spPr>
           <a:xfrm>
-            <a:off x="6675120" y="2715768"/>
+            <a:off x="6675120" y="2679192"/>
             <a:ext cx="2011680" cy="365760"/>
           </a:xfrm>
           <a:prstGeom prst="rect">
@@ -11471,7 +11263,7 @@
         </p:nvSpPr>
         <p:spPr>
           <a:xfrm>
-            <a:off x="457200" y="3172968"/>
+            <a:off x="457200" y="3118104"/>
             <a:ext cx="8229600" cy="365760"/>
           </a:xfrm>
           <a:prstGeom prst="roundRect">
@@ -11498,7 +11290,7 @@
         </p:nvSpPr>
         <p:spPr>
           <a:xfrm>
-            <a:off x="640080" y="3172968"/>
+            <a:off x="640080" y="3118104"/>
             <a:ext cx="4023360" cy="365760"/>
           </a:xfrm>
           <a:prstGeom prst="rect">
@@ -11537,7 +11329,7 @@
         </p:nvSpPr>
         <p:spPr>
           <a:xfrm>
-            <a:off x="4663440" y="3172968"/>
+            <a:off x="4663440" y="3118104"/>
             <a:ext cx="2011680" cy="365760"/>
           </a:xfrm>
           <a:prstGeom prst="rect">
@@ -11576,7 +11368,7 @@
         </p:nvSpPr>
         <p:spPr>
           <a:xfrm>
-            <a:off x="6675120" y="3172968"/>
+            <a:off x="6675120" y="3118104"/>
             <a:ext cx="2011680" cy="365760"/>
           </a:xfrm>
           <a:prstGeom prst="rect">
@@ -11615,7 +11407,7 @@
         </p:nvSpPr>
         <p:spPr>
           <a:xfrm>
-            <a:off x="457200" y="3630168"/>
+            <a:off x="457200" y="3557016"/>
             <a:ext cx="8229600" cy="365760"/>
           </a:xfrm>
           <a:prstGeom prst="roundRect">
@@ -11642,7 +11434,7 @@
         </p:nvSpPr>
         <p:spPr>
           <a:xfrm>
-            <a:off x="640080" y="3630168"/>
+            <a:off x="640080" y="3557016"/>
             <a:ext cx="4023360" cy="365760"/>
           </a:xfrm>
           <a:prstGeom prst="rect">
@@ -11681,7 +11473,7 @@
         </p:nvSpPr>
         <p:spPr>
           <a:xfrm>
-            <a:off x="4663440" y="3630168"/>
+            <a:off x="4663440" y="3557016"/>
             <a:ext cx="2011680" cy="365760"/>
           </a:xfrm>
           <a:prstGeom prst="rect">
@@ -11720,7 +11512,7 @@
         </p:nvSpPr>
         <p:spPr>
           <a:xfrm>
-            <a:off x="6675120" y="3630168"/>
+            <a:off x="6675120" y="3557016"/>
             <a:ext cx="2011680" cy="365760"/>
           </a:xfrm>
           <a:prstGeom prst="rect">
@@ -11974,8 +11766,8 @@
         </p:nvSpPr>
         <p:spPr>
           <a:xfrm>
-            <a:off x="4846320" y="1417320"/>
-            <a:ext cx="1920240" cy="320040"/>
+            <a:off x="4663440" y="1417320"/>
+            <a:ext cx="2011680" cy="320040"/>
           </a:xfrm>
           <a:prstGeom prst="rect">
             <a:avLst/>
@@ -12013,8 +11805,8 @@
         </p:nvSpPr>
         <p:spPr>
           <a:xfrm>
-            <a:off x="6766560" y="1417320"/>
-            <a:ext cx="1920240" cy="320040"/>
+            <a:off x="6675120" y="1417320"/>
+            <a:ext cx="2011680" cy="320040"/>
           </a:xfrm>
           <a:prstGeom prst="rect">
             <a:avLst/>
@@ -12053,7 +11845,7 @@
         <p:spPr>
           <a:xfrm>
             <a:off x="457200" y="1801368"/>
-            <a:ext cx="8229600" cy="475488"/>
+            <a:ext cx="8229600" cy="365760"/>
           </a:xfrm>
           <a:prstGeom prst="roundRect">
             <a:avLst>
@@ -12080,7 +11872,7 @@
         <p:spPr>
           <a:xfrm>
             <a:off x="640080" y="1801368"/>
-            <a:ext cx="4206240" cy="475488"/>
+            <a:ext cx="4023360" cy="365760"/>
           </a:xfrm>
           <a:prstGeom prst="rect">
             <a:avLst/>
@@ -12118,8 +11910,8 @@
         </p:nvSpPr>
         <p:spPr>
           <a:xfrm>
-            <a:off x="4846320" y="1801368"/>
-            <a:ext cx="1920240" cy="475488"/>
+            <a:off x="4663440" y="1801368"/>
+            <a:ext cx="2011680" cy="365760"/>
           </a:xfrm>
           <a:prstGeom prst="rect">
             <a:avLst/>
@@ -12157,8 +11949,8 @@
         </p:nvSpPr>
         <p:spPr>
           <a:xfrm>
-            <a:off x="6766560" y="1801368"/>
-            <a:ext cx="1920240" cy="475488"/>
+            <a:off x="6675120" y="1801368"/>
+            <a:ext cx="2011680" cy="365760"/>
           </a:xfrm>
           <a:prstGeom prst="rect">
             <a:avLst/>
@@ -12196,8 +11988,8 @@
         </p:nvSpPr>
         <p:spPr>
           <a:xfrm>
-            <a:off x="457200" y="2368296"/>
-            <a:ext cx="8229600" cy="475488"/>
+            <a:off x="457200" y="2240280"/>
+            <a:ext cx="8229600" cy="365760"/>
           </a:xfrm>
           <a:prstGeom prst="roundRect">
             <a:avLst>
@@ -12223,8 +12015,8 @@
         </p:nvSpPr>
         <p:spPr>
           <a:xfrm>
-            <a:off x="640080" y="2368296"/>
-            <a:ext cx="4206240" cy="475488"/>
+            <a:off x="640080" y="2240280"/>
+            <a:ext cx="4023360" cy="365760"/>
           </a:xfrm>
           <a:prstGeom prst="rect">
             <a:avLst/>
@@ -12262,8 +12054,8 @@
         </p:nvSpPr>
         <p:spPr>
           <a:xfrm>
-            <a:off x="4846320" y="2368296"/>
-            <a:ext cx="1920240" cy="475488"/>
+            <a:off x="4663440" y="2240280"/>
+            <a:ext cx="2011680" cy="365760"/>
           </a:xfrm>
           <a:prstGeom prst="rect">
             <a:avLst/>
@@ -12301,8 +12093,8 @@
         </p:nvSpPr>
         <p:spPr>
           <a:xfrm>
-            <a:off x="6766560" y="2368296"/>
-            <a:ext cx="1920240" cy="475488"/>
+            <a:off x="6675120" y="2240280"/>
+            <a:ext cx="2011680" cy="365760"/>
           </a:xfrm>
           <a:prstGeom prst="rect">
             <a:avLst/>
@@ -12340,8 +12132,8 @@
         </p:nvSpPr>
         <p:spPr>
           <a:xfrm>
-            <a:off x="457200" y="2935224"/>
-            <a:ext cx="8229600" cy="475488"/>
+            <a:off x="457200" y="2679192"/>
+            <a:ext cx="8229600" cy="365760"/>
           </a:xfrm>
           <a:prstGeom prst="roundRect">
             <a:avLst>
@@ -12367,8 +12159,8 @@
         </p:nvSpPr>
         <p:spPr>
           <a:xfrm>
-            <a:off x="640080" y="2935224"/>
-            <a:ext cx="4206240" cy="475488"/>
+            <a:off x="640080" y="2679192"/>
+            <a:ext cx="4023360" cy="365760"/>
           </a:xfrm>
           <a:prstGeom prst="rect">
             <a:avLst/>
@@ -12406,8 +12198,8 @@
         </p:nvSpPr>
         <p:spPr>
           <a:xfrm>
-            <a:off x="4846320" y="2935224"/>
-            <a:ext cx="1920240" cy="475488"/>
+            <a:off x="4663440" y="2679192"/>
+            <a:ext cx="2011680" cy="365760"/>
           </a:xfrm>
           <a:prstGeom prst="rect">
             <a:avLst/>
@@ -12445,8 +12237,8 @@
         </p:nvSpPr>
         <p:spPr>
           <a:xfrm>
-            <a:off x="6766560" y="2935224"/>
-            <a:ext cx="1920240" cy="475488"/>
+            <a:off x="6675120" y="2679192"/>
+            <a:ext cx="2011680" cy="365760"/>
           </a:xfrm>
           <a:prstGeom prst="rect">
             <a:avLst/>
@@ -12484,8 +12276,8 @@
         </p:nvSpPr>
         <p:spPr>
           <a:xfrm>
-            <a:off x="457200" y="3502152"/>
-            <a:ext cx="8229600" cy="475488"/>
+            <a:off x="457200" y="3118104"/>
+            <a:ext cx="8229600" cy="365760"/>
           </a:xfrm>
           <a:prstGeom prst="roundRect">
             <a:avLst>
@@ -12511,8 +12303,8 @@
         </p:nvSpPr>
         <p:spPr>
           <a:xfrm>
-            <a:off x="640080" y="3502152"/>
-            <a:ext cx="4206240" cy="475488"/>
+            <a:off x="640080" y="3118104"/>
+            <a:ext cx="4023360" cy="365760"/>
           </a:xfrm>
           <a:prstGeom prst="rect">
             <a:avLst/>
@@ -12550,8 +12342,8 @@
         </p:nvSpPr>
         <p:spPr>
           <a:xfrm>
-            <a:off x="4846320" y="3502152"/>
-            <a:ext cx="1920240" cy="475488"/>
+            <a:off x="4663440" y="3118104"/>
+            <a:ext cx="2011680" cy="365760"/>
           </a:xfrm>
           <a:prstGeom prst="rect">
             <a:avLst/>
@@ -12589,8 +12381,8 @@
         </p:nvSpPr>
         <p:spPr>
           <a:xfrm>
-            <a:off x="6766560" y="3502152"/>
-            <a:ext cx="1920240" cy="475488"/>
+            <a:off x="6675120" y="3118104"/>
+            <a:ext cx="2011680" cy="365760"/>
           </a:xfrm>
           <a:prstGeom prst="rect">
             <a:avLst/>
@@ -12976,10 +12768,11 @@
                 <a:spcPts val="200"/>
               </a:spcAft>
               <a:buSzPct val="100000"/>
+              <a:buFont typeface="Inter" pitchFamily="34" charset="0"/>
               <a:buChar char="•"/>
             </a:pPr>
             <a:r>
-              <a:rPr lang="en-US" sz="1200" dirty="0">
+              <a:rPr lang="en-US" sz="1050" dirty="0">
                 <a:solidFill>
                   <a:srgbClr val="1B2533"/>
                 </a:solidFill>
@@ -12987,9 +12780,9 @@
                 <a:ea typeface="Inter" pitchFamily="34" charset="-122"/>
                 <a:cs typeface="Inter" pitchFamily="34" charset="-120"/>
               </a:rPr>
-              <a:t>06:20–14:00 · 06:20–14:20</a:t>
-            </a:r>
-            <a:endParaRPr lang="en-US" sz="1200" dirty="0"/>
+              <a:t>06:20–14:00</a:t>
+            </a:r>
+            <a:endParaRPr lang="en-US" sz="1050" dirty="0"/>
           </a:p>
           <a:p>
             <a:pPr marL="152400" indent="-152400">
@@ -12997,10 +12790,11 @@
                 <a:spcPts val="200"/>
               </a:spcAft>
               <a:buSzPct val="100000"/>
+              <a:buFont typeface="Inter" pitchFamily="34" charset="0"/>
               <a:buChar char="•"/>
             </a:pPr>
             <a:r>
-              <a:rPr lang="en-US" sz="1200" dirty="0">
+              <a:rPr lang="en-US" sz="1050" dirty="0">
                 <a:solidFill>
                   <a:srgbClr val="1B2533"/>
                 </a:solidFill>
@@ -13008,9 +12802,9 @@
                 <a:ea typeface="Inter" pitchFamily="34" charset="-122"/>
                 <a:cs typeface="Inter" pitchFamily="34" charset="-120"/>
               </a:rPr>
-              <a:t>06:20–14:50 · 07:15–15:45</a:t>
-            </a:r>
-            <a:endParaRPr lang="en-US" sz="1200" dirty="0"/>
+              <a:t>06:20–14:20</a:t>
+            </a:r>
+            <a:endParaRPr lang="en-US" sz="1050" dirty="0"/>
           </a:p>
           <a:p>
             <a:pPr marL="152400" indent="-152400">
@@ -13018,10 +12812,11 @@
                 <a:spcPts val="200"/>
               </a:spcAft>
               <a:buSzPct val="100000"/>
+              <a:buFont typeface="Inter" pitchFamily="34" charset="0"/>
               <a:buChar char="•"/>
             </a:pPr>
             <a:r>
-              <a:rPr lang="en-US" sz="1200" dirty="0">
+              <a:rPr lang="en-US" sz="1050" dirty="0">
                 <a:solidFill>
                   <a:srgbClr val="1B2533"/>
                 </a:solidFill>
@@ -13029,9 +12824,9 @@
                 <a:ea typeface="Inter" pitchFamily="34" charset="-122"/>
                 <a:cs typeface="Inter" pitchFamily="34" charset="-120"/>
               </a:rPr>
-              <a:t>08:00–16:30 · 12:00–20:00</a:t>
-            </a:r>
-            <a:endParaRPr lang="en-US" sz="1200" dirty="0"/>
+              <a:t>06:20–14:50</a:t>
+            </a:r>
+            <a:endParaRPr lang="en-US" sz="1050" dirty="0"/>
           </a:p>
           <a:p>
             <a:pPr marL="152400" indent="-152400">
@@ -13039,10 +12834,11 @@
                 <a:spcPts val="200"/>
               </a:spcAft>
               <a:buSzPct val="100000"/>
+              <a:buFont typeface="Inter" pitchFamily="34" charset="0"/>
               <a:buChar char="•"/>
             </a:pPr>
             <a:r>
-              <a:rPr lang="en-US" sz="1200" dirty="0">
+              <a:rPr lang="en-US" sz="1050" dirty="0">
                 <a:solidFill>
                   <a:srgbClr val="1B2533"/>
                 </a:solidFill>
@@ -13050,9 +12846,9 @@
                 <a:ea typeface="Inter" pitchFamily="34" charset="-122"/>
                 <a:cs typeface="Inter" pitchFamily="34" charset="-120"/>
               </a:rPr>
-              <a:t>14:00–22:30 · 14:30–22:00</a:t>
-            </a:r>
-            <a:endParaRPr lang="en-US" sz="1200" dirty="0"/>
+              <a:t>07:15–15:45</a:t>
+            </a:r>
+            <a:endParaRPr lang="en-US" sz="1050" dirty="0"/>
           </a:p>
           <a:p>
             <a:pPr marL="152400" indent="-152400">
@@ -13060,10 +12856,11 @@
                 <a:spcPts val="200"/>
               </a:spcAft>
               <a:buSzPct val="100000"/>
+              <a:buFont typeface="Inter" pitchFamily="34" charset="0"/>
               <a:buChar char="•"/>
             </a:pPr>
             <a:r>
-              <a:rPr lang="en-US" sz="1200" dirty="0">
+              <a:rPr lang="en-US" sz="1050" dirty="0">
                 <a:solidFill>
                   <a:srgbClr val="1B2533"/>
                 </a:solidFill>
@@ -13071,9 +12868,97 @@
                 <a:ea typeface="Inter" pitchFamily="34" charset="-122"/>
                 <a:cs typeface="Inter" pitchFamily="34" charset="-120"/>
               </a:rPr>
+              <a:t>08:00–16:30</a:t>
+            </a:r>
+            <a:endParaRPr lang="en-US" sz="1050" dirty="0"/>
+          </a:p>
+          <a:p>
+            <a:pPr marL="152400" indent="-152400">
+              <a:spcAft>
+                <a:spcPts val="200"/>
+              </a:spcAft>
+              <a:buSzPct val="100000"/>
+              <a:buFont typeface="Inter" pitchFamily="34" charset="0"/>
+              <a:buChar char="•"/>
+            </a:pPr>
+            <a:r>
+              <a:rPr lang="en-US" sz="1050" dirty="0">
+                <a:solidFill>
+                  <a:srgbClr val="1B2533"/>
+                </a:solidFill>
+                <a:latin typeface="Inter" pitchFamily="34" charset="0"/>
+                <a:ea typeface="Inter" pitchFamily="34" charset="-122"/>
+                <a:cs typeface="Inter" pitchFamily="34" charset="-120"/>
+              </a:rPr>
+              <a:t>12:00–20:00</a:t>
+            </a:r>
+            <a:endParaRPr lang="en-US" sz="1050" dirty="0"/>
+          </a:p>
+          <a:p>
+            <a:pPr marL="152400" indent="-152400">
+              <a:spcAft>
+                <a:spcPts val="200"/>
+              </a:spcAft>
+              <a:buSzPct val="100000"/>
+              <a:buFont typeface="Inter" pitchFamily="34" charset="0"/>
+              <a:buChar char="•"/>
+            </a:pPr>
+            <a:r>
+              <a:rPr lang="en-US" sz="1050" dirty="0">
+                <a:solidFill>
+                  <a:srgbClr val="1B2533"/>
+                </a:solidFill>
+                <a:latin typeface="Inter" pitchFamily="34" charset="0"/>
+                <a:ea typeface="Inter" pitchFamily="34" charset="-122"/>
+                <a:cs typeface="Inter" pitchFamily="34" charset="-120"/>
+              </a:rPr>
+              <a:t>14:00–22:30</a:t>
+            </a:r>
+            <a:endParaRPr lang="en-US" sz="1050" dirty="0"/>
+          </a:p>
+          <a:p>
+            <a:pPr marL="152400" indent="-152400">
+              <a:spcAft>
+                <a:spcPts val="200"/>
+              </a:spcAft>
+              <a:buSzPct val="100000"/>
+              <a:buFont typeface="Inter" pitchFamily="34" charset="0"/>
+              <a:buChar char="•"/>
+            </a:pPr>
+            <a:r>
+              <a:rPr lang="en-US" sz="1050" dirty="0">
+                <a:solidFill>
+                  <a:srgbClr val="1B2533"/>
+                </a:solidFill>
+                <a:latin typeface="Inter" pitchFamily="34" charset="0"/>
+                <a:ea typeface="Inter" pitchFamily="34" charset="-122"/>
+                <a:cs typeface="Inter" pitchFamily="34" charset="-120"/>
+              </a:rPr>
+              <a:t>14:30–22:00</a:t>
+            </a:r>
+            <a:endParaRPr lang="en-US" sz="1050" dirty="0"/>
+          </a:p>
+          <a:p>
+            <a:pPr marL="152400" indent="-152400">
+              <a:spcAft>
+                <a:spcPts val="200"/>
+              </a:spcAft>
+              <a:buSzPct val="100000"/>
+              <a:buFont typeface="Inter" pitchFamily="34" charset="0"/>
+              <a:buChar char="•"/>
+            </a:pPr>
+            <a:r>
+              <a:rPr lang="en-US" sz="1050" dirty="0">
+                <a:solidFill>
+                  <a:srgbClr val="1B2533"/>
+                </a:solidFill>
+                <a:latin typeface="Inter" pitchFamily="34" charset="0"/>
+                <a:ea typeface="Inter" pitchFamily="34" charset="-122"/>
+                <a:cs typeface="Inter" pitchFamily="34" charset="-120"/>
+              </a:rPr>
               <a:t>15:15–23:55</a:t>
             </a:r>
-            <a:endParaRPr lang="en-US" sz="1200" dirty="0"/>
+            <a:endParaRPr lang="en-US" sz="1050" dirty="0"/>
           </a:p>
         </p:txBody>
       </p:sp>
@@ -13238,6 +13123,7 @@
                 <a:spcPts val="100"/>
               </a:spcAft>
               <a:buSzPct val="100000"/>
+              <a:buFont typeface="Inter" pitchFamily="34" charset="0"/>
               <a:buChar char="•"/>
             </a:pPr>
             <a:r>
@@ -13259,6 +13145,7 @@
                 <a:spcPts val="100"/>
               </a:spcAft>
               <a:buSzPct val="100000"/>
+              <a:buFont typeface="Inter" pitchFamily="34" charset="0"/>
               <a:buChar char="•"/>
             </a:pPr>
             <a:r>
@@ -13280,6 +13167,7 @@
                 <a:spcPts val="100"/>
               </a:spcAft>
               <a:buSzPct val="100000"/>
+              <a:buFont typeface="Inter" pitchFamily="34" charset="0"/>
               <a:buChar char="•"/>
             </a:pPr>
             <a:r>
@@ -13324,6 +13212,7 @@
                 <a:spcPts val="100"/>
               </a:spcAft>
               <a:buSzPct val="100000"/>
+              <a:buFont typeface="Inter" pitchFamily="34" charset="0"/>
               <a:buChar char="•"/>
             </a:pPr>
             <a:r>
@@ -13368,6 +13257,7 @@
                 <a:spcPts val="100"/>
               </a:spcAft>
               <a:buSzPct val="100000"/>
+              <a:buFont typeface="Inter" pitchFamily="34" charset="0"/>
               <a:buChar char="•"/>
             </a:pPr>
             <a:r>
@@ -13389,6 +13279,7 @@
                 <a:spcPts val="100"/>
               </a:spcAft>
               <a:buSzPct val="100000"/>
+              <a:buFont typeface="Inter" pitchFamily="34" charset="0"/>
               <a:buChar char="•"/>
             </a:pPr>
             <a:r>
@@ -13410,6 +13301,7 @@
                 <a:spcPts val="100"/>
               </a:spcAft>
               <a:buSzPct val="100000"/>
+              <a:buFont typeface="Inter" pitchFamily="34" charset="0"/>
               <a:buChar char="•"/>
             </a:pPr>
             <a:r>
@@ -13872,7 +13764,7 @@
         </p:nvSpPr>
         <p:spPr>
           <a:xfrm>
-            <a:off x="457200" y="2258568"/>
+            <a:off x="457200" y="2240280"/>
             <a:ext cx="8229600" cy="365760"/>
           </a:xfrm>
           <a:prstGeom prst="roundRect">
@@ -13899,7 +13791,7 @@
         </p:nvSpPr>
         <p:spPr>
           <a:xfrm>
-            <a:off x="640080" y="2258568"/>
+            <a:off x="640080" y="2240280"/>
             <a:ext cx="4023360" cy="365760"/>
           </a:xfrm>
           <a:prstGeom prst="rect">
@@ -13938,7 +13830,7 @@
         </p:nvSpPr>
         <p:spPr>
           <a:xfrm>
-            <a:off x="4663440" y="2258568"/>
+            <a:off x="4663440" y="2240280"/>
             <a:ext cx="2011680" cy="365760"/>
           </a:xfrm>
           <a:prstGeom prst="rect">
@@ -13977,7 +13869,7 @@
         </p:nvSpPr>
         <p:spPr>
           <a:xfrm>
-            <a:off x="6675120" y="2258568"/>
+            <a:off x="6675120" y="2240280"/>
             <a:ext cx="2011680" cy="365760"/>
           </a:xfrm>
           <a:prstGeom prst="rect">
@@ -14016,7 +13908,7 @@
         </p:nvSpPr>
         <p:spPr>
           <a:xfrm>
-            <a:off x="457200" y="2715768"/>
+            <a:off x="457200" y="2679192"/>
             <a:ext cx="8229600" cy="365760"/>
           </a:xfrm>
           <a:prstGeom prst="roundRect">
@@ -14043,7 +13935,7 @@
         </p:nvSpPr>
         <p:spPr>
           <a:xfrm>
-            <a:off x="640080" y="2715768"/>
+            <a:off x="640080" y="2679192"/>
             <a:ext cx="4023360" cy="365760"/>
           </a:xfrm>
           <a:prstGeom prst="rect">
@@ -14082,7 +13974,7 @@
         </p:nvSpPr>
         <p:spPr>
           <a:xfrm>
-            <a:off x="4663440" y="2715768"/>
+            <a:off x="4663440" y="2679192"/>
             <a:ext cx="2011680" cy="365760"/>
           </a:xfrm>
           <a:prstGeom prst="rect">
@@ -14121,7 +14013,7 @@
         </p:nvSpPr>
         <p:spPr>
           <a:xfrm>
-            <a:off x="6675120" y="2715768"/>
+            <a:off x="6675120" y="2679192"/>
             <a:ext cx="2011680" cy="365760"/>
           </a:xfrm>
           <a:prstGeom prst="rect">
@@ -14160,7 +14052,7 @@
         </p:nvSpPr>
         <p:spPr>
           <a:xfrm>
-            <a:off x="457200" y="3172968"/>
+            <a:off x="457200" y="3118104"/>
             <a:ext cx="8229600" cy="365760"/>
           </a:xfrm>
           <a:prstGeom prst="roundRect">
@@ -14187,7 +14079,7 @@
         </p:nvSpPr>
         <p:spPr>
           <a:xfrm>
-            <a:off x="640080" y="3172968"/>
+            <a:off x="640080" y="3118104"/>
             <a:ext cx="4023360" cy="365760"/>
           </a:xfrm>
           <a:prstGeom prst="rect">
@@ -14226,7 +14118,7 @@
         </p:nvSpPr>
         <p:spPr>
           <a:xfrm>
-            <a:off x="4663440" y="3172968"/>
+            <a:off x="4663440" y="3118104"/>
             <a:ext cx="2011680" cy="365760"/>
           </a:xfrm>
           <a:prstGeom prst="rect">
@@ -14265,7 +14157,7 @@
         </p:nvSpPr>
         <p:spPr>
           <a:xfrm>
-            <a:off x="6675120" y="3172968"/>
+            <a:off x="6675120" y="3118104"/>
             <a:ext cx="2011680" cy="365760"/>
           </a:xfrm>
           <a:prstGeom prst="rect">
@@ -14304,7 +14196,7 @@
         </p:nvSpPr>
         <p:spPr>
           <a:xfrm>
-            <a:off x="457200" y="3630168"/>
+            <a:off x="457200" y="3557016"/>
             <a:ext cx="8229600" cy="365760"/>
           </a:xfrm>
           <a:prstGeom prst="roundRect">
@@ -14331,7 +14223,7 @@
         </p:nvSpPr>
         <p:spPr>
           <a:xfrm>
-            <a:off x="640080" y="3630168"/>
+            <a:off x="640080" y="3557016"/>
             <a:ext cx="4023360" cy="365760"/>
           </a:xfrm>
           <a:prstGeom prst="rect">
@@ -14370,7 +14262,7 @@
         </p:nvSpPr>
         <p:spPr>
           <a:xfrm>
-            <a:off x="4663440" y="3630168"/>
+            <a:off x="4663440" y="3557016"/>
             <a:ext cx="2011680" cy="365760"/>
           </a:xfrm>
           <a:prstGeom prst="rect">
@@ -14409,7 +14301,7 @@
         </p:nvSpPr>
         <p:spPr>
           <a:xfrm>
-            <a:off x="6675120" y="3630168"/>
+            <a:off x="6675120" y="3557016"/>
             <a:ext cx="2011680" cy="365760"/>
           </a:xfrm>
           <a:prstGeom prst="rect">

--- a/docs/links-26/presentations/Second-Edition-for-colleagues.pptx
+++ b/docs/links-26/presentations/Second-Edition-for-colleagues.pptx
@@ -604,7 +604,7 @@
           <a:p>
             <a:r>
               <a:rPr lang="en-US" dirty="0"/>
-              <a:t>Read the strip left to right; week 27 is week 1 again. A cover week has no fixed shifts of its own — its four duties are placed later to cover leave and sickness, which is why it is drawn empty. Earlies here means a start before 11:00. A weekday has 7 earlies and 8 lates; a Saturday 7 and 7; a Sunday 5 and 5. Sundays stay overtime, 20 a year each (today 21), and still finish at 23:25. Who starts on which week is decided after the link is chosen.</a:t>
+              <a:t>Read the strip left to right; week 27 is week 1 again. A cover week has no fixed shifts of its own — its four duties are placed later to cover leave and sickness, which is why it is drawn empty. Earlies here means a start before 11:00. A weekday has 7 earlies and 8 lates; a Saturday 7 and 7; a Sunday 5 and 5. Sundays stay overtime, 20 a year each (today 21), and still finish at 23:25. Who starts on which week is decided after the link is chosen. A block is weeks in a row all on earlies or all on lates. On the fixed rota the longest is 5 weeks (today 2); because a cover week’s duties are placed later, a block can run to 7 if the cover weeks beside it are given the same kind (today 3). Fewer switches between earlies and lates, but someone who prefers one kind waits longer for it to come round.</a:t>
             </a:r>
             <a:endParaRPr lang="en-US" dirty="0"/>
           </a:p>
@@ -2481,7 +2481,7 @@
                 <a:ea typeface="Inter" pitchFamily="34" charset="-122"/>
                 <a:cs typeface="Inter" pitchFamily="34" charset="-120"/>
               </a:rPr>
-              <a:t>14 full weekends off a year, never more than five weeks apart; the longest run of one kind is 5 weeks of lates.</a:t>
+              <a:t>14 full weekends off a year, at most five weeks apart; blocks of earlies or lates up to 5 weeks, 7 if the cover weeks go the same way.</a:t>
             </a:r>
             <a:endParaRPr lang="en-US" sz="1400" dirty="0"/>
           </a:p>

--- a/docs/links-26/presentations/Second-Edition-for-colleagues.pptx
+++ b/docs/links-26/presentations/Second-Edition-for-colleagues.pptx
@@ -868,7 +868,7 @@
           <a:p>
             <a:r>
               <a:rPr lang="en-US" dirty="0"/>
-              <a:t>Saying the downsides out loud is what makes the rest believable. None of these is hidden on the full proposal sheet either.</a:t>
+              <a:t>Saying the downsides out loud is what makes the rest believable. None of these is hidden on the full proposal sheet either. The early finishes are the cost most people will raise first, so this slide names them; the full sheet lists 06:20–13:35 and 06:20–13:45 as dropped (page 4). The two minutes on the average shift are on slide 6.</a:t>
             </a:r>
             <a:endParaRPr lang="en-US" dirty="0"/>
           </a:p>
@@ -1132,7 +1132,7 @@
           <a:p>
             <a:r>
               <a:rPr lang="en-US" dirty="0"/>
-              <a:t>This is the whole pitch on one slide. Same 35-hour week as now. Never more than six days in a row. Seven full weekends off in every 26 weeks, against four in 20 today, and never more than five weeks apart — though each person works about two more Saturdays a year. Every week is all earlies or all lates, and 18 of the 21 working weeks keep one shift time Monday to Friday. Nine of the fifteen shift times are ones people already work. And every closing shift is shorter: the weekday and Saturday closers by 30 minutes, the Sunday closer by 45. Say the leave cost here too, before anyone asks: four full weeks off, Sunday to Saturday, takes 15 days’ leave rather than 14, and the best 14-day stretch is 28 days off rather than 30; the average is the same and the worst a day better. A cover week is one of the five weeks in 26 with no fixed shifts: its four duties are placed later to cover leave and sickness; the fixed rota is the other 21 weeks, whose shifts are set.</a:t>
+              <a:t>This is the whole pitch on one slide. Same 35-hour week as now. Never more than six days in a row. Seven full weekends off in every 26 weeks, against four in 20 today, and never more than five weeks apart — though each person works about two more Saturdays a year. Every week is all earlies or all lates, and 18 of the 21 working weeks keep one shift time Monday to Friday. Nine of the fifteen shift times are ones people already work. And every closing shift is shorter: the weekday and Saturday closers by 30 minutes, the Sunday closer by 45. Say the leave cost here too, before anyone asks: four full weeks off, Sunday to Saturday, takes 15 days’ leave rather than 14, and the best 14-day stretch is 28 days off rather than 30; the average is the same and the worst a day better. A cover week is one of the five weeks in 26 with no fixed shifts: its four duties are placed later to cover leave and sickness; the fixed rota is the other 21 weeks, whose shifts are set. And the early finishes, as plainly as the closers: the 13:35 and 13:45 go, and a weekday 06:20 early on the floor ends at 14:50 — slide 6 says why.</a:t>
             </a:r>
             <a:endParaRPr lang="en-US" dirty="0"/>
           </a:p>
@@ -1484,7 +1484,7 @@
           <a:p>
             <a:r>
               <a:rPr lang="en-US" dirty="0"/>
-              <a:t>Lead with the closers: they are the shifts people dislike most, and every one of them is shorter. Weekday 15:45 to 23:55 instead of 15:15 (8h 10m, not 8h 40m); Saturday 15:15 instead of 14:45 (8h 40m, not 9h 10m); Sunday 15:15 to 23:25 instead of 14:30 (8h 10m, not 8h 55m). Be upfront about the two minutes on the average: the 26-week link may have no more than 219 contracted days a year, so the same 35 hours go into slightly fewer, slightly longer shifts. Nothing runs over 9 hours.</a:t>
+              <a:t>Lead with the closers: they are the shifts people dislike most, and every one of them is shorter. Weekday 15:45 to 23:55 instead of 15:15 (8h 10m, not 8h 40m); Saturday 15:15 instead of 14:45 (8h 40m, not 9h 10m); Sunday 15:15 to 23:25 instead of 14:30 (8h 10m, not 8h 55m). Be upfront about the two minutes on the average: the 26-week link may have no more than 219 contracted days a year, so the same 35 hours go into slightly fewer, slightly longer shifts. Nothing runs over 9 hours. Then say the cost before anyone asks: the 13:35 and 13:45 finishes go. On a weekday the 06:20 early on the floor ends at 14:50; today about 26 earlies a year each finish before 14:00, here none. The week’s total is fixed, so the minutes taken off the lates go on the earlies: earlies average 8h 26m (today 7h 59m), lates 8h 06m (today 8h 29m), and the longest early turn goes from 8h 30m to 9h 00m. Everyone works every line in turn, so the people who lose the early finishes are the people whose lates get shorter. Asked whether a 13:45 can come back: only if a late gets longer — each 06:20–14:50 made 06:20–13:45 turns one 15:00–22:30 into 13:55–22:30 the same day. Tested on this rota: one a weekday still meets every rule with no fatigue warning, at the cost of a 43h 00m heaviest week and two more shift times; two a weekday would add a backward-rotation warning (FF17).</a:t>
             </a:r>
             <a:endParaRPr lang="en-US" dirty="0"/>
           </a:p>
@@ -4539,7 +4539,7 @@
                 <a:ea typeface="Inter" pitchFamily="34" charset="-122"/>
                 <a:cs typeface="Inter" pitchFamily="34" charset="-120"/>
               </a:rPr>
-              <a:t>Shifts about 2 minutes longer on average</a:t>
+              <a:t>The 13:35 and 13:45 finishes go</a:t>
             </a:r>
             <a:endParaRPr lang="en-US" sz="1400" dirty="0"/>
           </a:p>
@@ -4578,7 +4578,7 @@
                 <a:ea typeface="Inter" pitchFamily="34" charset="-122"/>
                 <a:cs typeface="Inter" pitchFamily="34" charset="-120"/>
               </a:rPr>
-              <a:t>That is what keeps days at work to 219 a year or fewer on the same 35 hours.</a:t>
+              <a:t>No weekday 06:20 ends before 14:20. Each 13:45 back makes a late 1h 05m longer.</a:t>
             </a:r>
             <a:endParaRPr lang="en-US" sz="1250" dirty="0"/>
           </a:p>
@@ -10739,7 +10739,7 @@
                 <a:ea typeface="Inter" pitchFamily="34" charset="-122"/>
                 <a:cs typeface="Inter" pitchFamily="34" charset="-120"/>
               </a:rPr>
-              <a:t>Every closing shift gets shorter — the average goes up about two minutes</a:t>
+              <a:t>Closers get shorter, earlies longer — the average goes up about two minutes</a:t>
             </a:r>
             <a:endParaRPr lang="en-US" sz="1500" dirty="0"/>
           </a:p>
@@ -11315,7 +11315,7 @@
                 <a:ea typeface="Inter" pitchFamily="34" charset="-122"/>
                 <a:cs typeface="Inter" pitchFamily="34" charset="-120"/>
               </a:rPr>
-              <a:t>Longest shift anywhere</a:t>
+              <a:t>Weekday 06:20 early on the floor ends</a:t>
             </a:r>
             <a:endParaRPr lang="en-US" sz="1400" dirty="0"/>
           </a:p>
@@ -11354,7 +11354,7 @@
                 <a:ea typeface="Inter" pitchFamily="34" charset="-122"/>
                 <a:cs typeface="Inter" pitchFamily="34" charset="-120"/>
               </a:rPr>
-              <a:t>9h 10m</a:t>
+              <a:t>13:35 · 13:45</a:t>
             </a:r>
             <a:endParaRPr lang="en-US" sz="1600" dirty="0"/>
           </a:p>
@@ -11387,13 +11387,13 @@
             <a:r>
               <a:rPr lang="en-US" sz="1800" b="1" dirty="0">
                 <a:solidFill>
-                  <a:srgbClr val="1E7B4B"/>
-                </a:solidFill>
-                <a:latin typeface="Inter" pitchFamily="34" charset="0"/>
-                <a:ea typeface="Inter" pitchFamily="34" charset="-122"/>
-                <a:cs typeface="Inter" pitchFamily="34" charset="-120"/>
-              </a:rPr>
-              <a:t>9h 00m</a:t>
+                  <a:srgbClr val="A15C00"/>
+                </a:solidFill>
+                <a:latin typeface="Inter" pitchFamily="34" charset="0"/>
+                <a:ea typeface="Inter" pitchFamily="34" charset="-122"/>
+                <a:cs typeface="Inter" pitchFamily="34" charset="-120"/>
+              </a:rPr>
+              <a:t>14:50</a:t>
             </a:r>
             <a:endParaRPr lang="en-US" sz="1800" dirty="0"/>
           </a:p>
@@ -11603,7 +11603,7 @@
                 <a:ea typeface="Inter" pitchFamily="34" charset="-122"/>
                 <a:cs typeface="Inter" pitchFamily="34" charset="-120"/>
               </a:rPr>
-              <a:t>Every closing shift is 30 to 45 minutes shorter; the longest early turn goes from 8h 30m to 9h 00m, and nothing runs over 9 hours.</a:t>
+              <a:t>The same 35 hours, moved from the lates to the earlies: every closing shift is 30 to 45 minutes shorter, and nothing runs over 9 hours.</a:t>
             </a:r>
             <a:endParaRPr lang="en-US" sz="1400" dirty="0"/>
           </a:p>

--- a/docs/links-26/presentations/Second-Edition-for-colleagues.pptx
+++ b/docs/links-26/presentations/Second-Edition-for-colleagues.pptx
@@ -692,7 +692,7 @@
           <a:p>
             <a:r>
               <a:rPr lang="en-US" dirty="0"/>
-              <a:t>Leave is only needed on working days Monday to Saturday; rest days and Sundays cost nothing. Today there is one unusual stretch of the roster where 14 days buys 30 days off — Second Edition spreads rest days more evenly, so its best is 28. On average it is the same, 23.4 days, and at its worst it is a day better than today. Four full weeks off (Sunday to Saturday) takes at least 15 days of leave, instead of 14 at best today. Say the four-weeks figure plainly: all three shortlisted links are worse than today here (Long Break, the leave-first design in the pack, keeps the 14), and people plan a year around it. The averages depend on where you count a booking as starting, so quote those as “about the same”.</a:t>
+              <a:t>Leave is only needed on working days Monday to Saturday; rest days and Sundays cost nothing. Today there is one unusual stretch of the roster where 14 days buys 30 days off — Second Edition spreads rest days more evenly, so its best is 28. On average it is the same, 23.4 days, and at its worst it is a day better than today. Four full weeks off (Sunday to Saturday) takes at least 15 days of leave, instead of 14 at best today. Say the four-weeks figure plainly: all four shortlisted links are worse than today here (Long Break, the leave-first design in the pack, keeps the 14), and people plan a year around it. The averages depend on where you count a booking as starting, so quote those as “about the same”.</a:t>
             </a:r>
             <a:endParaRPr lang="en-US" dirty="0"/>
           </a:p>

--- a/docs/links-26/presentations/Second-Edition-for-colleagues.pptx
+++ b/docs/links-26/presentations/Second-Edition-for-colleagues.pptx
@@ -3499,7 +3499,7 @@
                 <a:ea typeface="Inter" pitchFamily="34" charset="-122"/>
                 <a:cs typeface="Inter" pitchFamily="34" charset="-120"/>
               </a:rPr>
-              <a:t>More people rostered every day, at the open and the close</a:t>
+              <a:t>More people rostered every day, and more at the open and the close on most days</a:t>
             </a:r>
             <a:endParaRPr lang="en-US" sz="1500" dirty="0"/>
           </a:p>
@@ -4683,7 +4683,7 @@
                 <a:ea typeface="Inter" pitchFamily="34" charset="-122"/>
                 <a:cs typeface="Inter" pitchFamily="34" charset="-120"/>
               </a:rPr>
-              <a:t>Best 14-day stretch 28 days, not 30; average as today, worst a day better.</a:t>
+              <a:t>The least leave for four complete weeks off, Sunday to Saturday.</a:t>
             </a:r>
             <a:endParaRPr lang="en-US" sz="1250" dirty="0"/>
           </a:p>

--- a/docs/links-26/presentations/Second-Edition-for-colleagues.pptx
+++ b/docs/links-26/presentations/Second-Edition-for-colleagues.pptx
@@ -692,7 +692,7 @@
           <a:p>
             <a:r>
               <a:rPr lang="en-US" dirty="0"/>
-              <a:t>Leave is only needed on working days Monday to Saturday; rest days and Sundays cost nothing. Today there is one unusual stretch of the roster where 14 days buys 30 days off — Second Edition spreads rest days more evenly, so its best is 28. On average it is the same, 23.4 days, and at its worst it is a day better than today. Four full weeks off (Sunday to Saturday) takes at least 15 days of leave, instead of 14 at best today. Say the four-weeks figure plainly: all three shortlisted links are worse than today here (Long Break, the leave-first design in the pack, keeps the 14), and people plan a year around it. The averages depend on where you count a booking as starting, so quote those as “about the same”.</a:t>
+              <a:t>Leave is only needed on working days Monday to Saturday; rest days and Sundays cost nothing. Today there is one unusual stretch of the roster where 14 days buys 30 days off — Second Edition spreads rest days more evenly, so its best is 28. On average it is the same, 23.4 days, and at its worst it is a day better than today. Four full weeks off (Sunday to Saturday) takes at least 15 days of leave, instead of 14 at best today. Say the four-weeks figure plainly: all four shortlisted links are worse than today here (Long Break, the leave-first design in the pack, keeps the 14), and people plan a year around it. The averages depend on where you count a booking as starting, so quote those as “about the same”.</a:t>
             </a:r>
             <a:endParaRPr lang="en-US" dirty="0"/>
           </a:p>
@@ -3499,7 +3499,7 @@
                 <a:ea typeface="Inter" pitchFamily="34" charset="-122"/>
                 <a:cs typeface="Inter" pitchFamily="34" charset="-120"/>
               </a:rPr>
-              <a:t>More people rostered every day, at the open and the close</a:t>
+              <a:t>More people rostered every day, and more at the open and the close on most days</a:t>
             </a:r>
             <a:endParaRPr lang="en-US" sz="1500" dirty="0"/>
           </a:p>
@@ -4683,7 +4683,7 @@
                 <a:ea typeface="Inter" pitchFamily="34" charset="-122"/>
                 <a:cs typeface="Inter" pitchFamily="34" charset="-120"/>
               </a:rPr>
-              <a:t>Best 14-day stretch 28 days, not 30; average as today, worst a day better.</a:t>
+              <a:t>The least leave for four complete weeks off, Sunday to Saturday.</a:t>
             </a:r>
             <a:endParaRPr lang="en-US" sz="1250" dirty="0"/>
           </a:p>
